--- a/artifacts/speaking-portfolio-expanded/decks/product-engineering-15min-handout.pptx
+++ b/artifacts/speaking-portfolio-expanded/decks/product-engineering-15min-handout.pptx
@@ -17,6 +17,8 @@
     <p:sldId id="262" r:id="rIdSlide7"/>
     <p:sldId id="263" r:id="rIdSlide8"/>
     <p:sldId id="264" r:id="rIdSlide9"/>
+    <p:sldId id="265" r:id="rIdSlide10"/>
+    <p:sldId id="266" r:id="rIdSlide11"/>
   </p:sldIdLst>
   <p:sldSz cx="10058400" cy="7772400" type="custom"/>
   <p:notesSz cx="6858000" cy="9144000"/>
@@ -101,7 +103,739 @@
                 <a:ea typeface="Arial"/>
                 <a:cs typeface="Arial"/>
               </a:rPr>
-              <a:t xml:space="preserve">40 minutes. Timings include the exercises and delivery pauses, without Q&amp;A. Sources checked 6 September 2026. Story prompts belong in speaker notes and require Dan’s own records before delivery.</a:t>
+              <a:t xml:space="preserve">40 minutes, 17 slides. Timings include the exercises and delivery pauses, without Q&amp;A. Sources checked 6 September 2026. Story prompts belong in speaker notes and require Dan’s own records before delivery. Slides 14 and 15 are labelled predictions, once, on slide 14; everything before them is the operating model as it stands.</a:t>
+            </a:r>
+            <a:endParaRPr lang="en-US" sz="1200"/>
+          </a:p>
+        </p:txBody>
+      </p:sp>
+    </p:spTree>
+  </p:cSld>
+  <p:clrMapOvr>
+    <a:masterClrMapping/>
+  </p:clrMapOvr>
+</p:notes>
+</file>
+
+<file path=ppt/notesSlides/notesSlide10.xml><?xml version="1.0" encoding="utf-8"?>
+<p:notes xmlns:a="http://schemas.openxmlformats.org/drawingml/2006/main" xmlns:r="http://schemas.openxmlformats.org/officeDocument/2006/relationships" xmlns:p="http://schemas.openxmlformats.org/presentationml/2006/main">
+  <p:cSld>
+    <p:spTree>
+      <p:nvGrpSpPr>
+        <p:cNvPr id="1" name=""/>
+        <p:cNvGrpSpPr/>
+        <p:nvPr/>
+      </p:nvGrpSpPr>
+      <p:grpSpPr>
+        <a:xfrm>
+          <a:off x="0" y="0"/>
+          <a:ext cx="0" cy="0"/>
+          <a:chOff x="0" y="0"/>
+          <a:chExt cx="0" cy="0"/>
+        </a:xfrm>
+      </p:grpSpPr>
+      <p:sp>
+        <p:nvSpPr>
+          <p:cNvPr id="2" name="Presenter notes"/>
+          <p:cNvSpPr txBox="1"/>
+          <p:nvPr>
+            <p:ph type="body" idx="1"/>
+          </p:nvPr>
+        </p:nvSpPr>
+        <p:spPr>
+          <a:xfrm>
+            <a:off x="457200" y="1428750"/>
+            <a:ext cx="5715000" cy="6667500"/>
+          </a:xfrm>
+        </p:spPr>
+        <p:txBody>
+          <a:bodyPr/>
+          <a:lstStyle/>
+          <a:p>
+            <a:pPr marL="0" indent="0">
+              <a:lnSpc>
+                <a:spcPts val="1560"/>
+              </a:lnSpc>
+              <a:spcAft>
+                <a:spcPts val="0"/>
+              </a:spcAft>
+              <a:buNone/>
+            </a:pPr>
+            <a:r>
+              <a:rPr lang="en-US" sz="1200" b="0">
+                <a:solidFill>
+                  <a:srgbClr val="202b33"/>
+                </a:solidFill>
+                <a:latin typeface="Arial"/>
+                <a:ea typeface="Arial"/>
+                <a:cs typeface="Arial"/>
+              </a:rPr>
+              <a:t xml:space="preserve">The Future of Product Engineering: Break the Mirror on Purpose</a:t>
+            </a:r>
+            <a:endParaRPr lang="en-US" sz="1200"/>
+          </a:p>
+          <a:p>
+            <a:pPr marL="0" indent="0">
+              <a:lnSpc>
+                <a:spcPts val="1560"/>
+              </a:lnSpc>
+              <a:spcAft>
+                <a:spcPts val="0"/>
+              </a:spcAft>
+              <a:buNone/>
+            </a:pPr>
+            <a:r>
+              <a:rPr lang="en-US" sz="1200" b="0">
+                <a:solidFill>
+                  <a:srgbClr val="202b33"/>
+                </a:solidFill>
+                <a:latin typeface="Arial"/>
+                <a:ea typeface="Arial"/>
+                <a:cs typeface="Arial"/>
+              </a:rPr>
+              <a:t xml:space="preserve"/>
+            </a:r>
+            <a:endParaRPr lang="en-US" sz="1200"/>
+          </a:p>
+          <a:p>
+            <a:pPr marL="0" indent="0">
+              <a:lnSpc>
+                <a:spcPts val="1560"/>
+              </a:lnSpc>
+              <a:spcAft>
+                <a:spcPts val="0"/>
+              </a:spcAft>
+              <a:buNone/>
+            </a:pPr>
+            <a:r>
+              <a:rPr lang="en-US" sz="1200" b="0">
+                <a:solidFill>
+                  <a:srgbClr val="202b33"/>
+                </a:solidFill>
+                <a:latin typeface="Arial"/>
+                <a:ea typeface="Arial"/>
+                <a:cs typeface="Arial"/>
+              </a:rPr>
+              <a:t xml:space="preserve">Source slide 17. 13:30 to 15:00</a:t>
+            </a:r>
+            <a:endParaRPr lang="en-US" sz="1200"/>
+          </a:p>
+          <a:p>
+            <a:pPr marL="0" indent="0">
+              <a:lnSpc>
+                <a:spcPts val="1560"/>
+              </a:lnSpc>
+              <a:spcAft>
+                <a:spcPts val="0"/>
+              </a:spcAft>
+              <a:buNone/>
+            </a:pPr>
+            <a:r>
+              <a:rPr lang="en-US" sz="1200" b="0">
+                <a:solidFill>
+                  <a:srgbClr val="202b33"/>
+                </a:solidFill>
+                <a:latin typeface="Arial"/>
+                <a:ea typeface="Arial"/>
+                <a:cs typeface="Arial"/>
+              </a:rPr>
+              <a:t xml:space="preserve"/>
+            </a:r>
+            <a:endParaRPr lang="en-US" sz="1200"/>
+          </a:p>
+          <a:p>
+            <a:pPr marL="0" indent="0">
+              <a:lnSpc>
+                <a:spcPts val="1560"/>
+              </a:lnSpc>
+              <a:spcAft>
+                <a:spcPts val="0"/>
+              </a:spcAft>
+              <a:buNone/>
+            </a:pPr>
+            <a:r>
+              <a:rPr lang="en-US" sz="1200" b="0">
+                <a:solidFill>
+                  <a:srgbClr val="202b33"/>
+                </a:solidFill>
+                <a:latin typeface="Arial"/>
+                <a:ea typeface="Arial"/>
+                <a:cs typeface="Arial"/>
+              </a:rPr>
+              <a:t xml:space="preserve">Reprice the handoffs. Draw the interfaces.</a:t>
+            </a:r>
+            <a:endParaRPr lang="en-US" sz="1200"/>
+          </a:p>
+          <a:p>
+            <a:pPr marL="0" indent="0">
+              <a:lnSpc>
+                <a:spcPts val="1560"/>
+              </a:lnSpc>
+              <a:spcAft>
+                <a:spcPts val="0"/>
+              </a:spcAft>
+              <a:buNone/>
+            </a:pPr>
+            <a:r>
+              <a:rPr lang="en-US" sz="1200" b="0">
+                <a:solidFill>
+                  <a:srgbClr val="202b33"/>
+                </a:solidFill>
+                <a:latin typeface="Arial"/>
+                <a:ea typeface="Arial"/>
+                <a:cs typeface="Arial"/>
+              </a:rPr>
+              <a:t xml:space="preserve"/>
+            </a:r>
+            <a:endParaRPr lang="en-US" sz="1200"/>
+          </a:p>
+          <a:p>
+            <a:pPr marL="0" indent="0">
+              <a:lnSpc>
+                <a:spcPts val="1560"/>
+              </a:lnSpc>
+              <a:spcAft>
+                <a:spcPts val="0"/>
+              </a:spcAft>
+              <a:buNone/>
+            </a:pPr>
+            <a:r>
+              <a:rPr lang="en-US" sz="1200" b="0">
+                <a:solidFill>
+                  <a:srgbClr val="202b33"/>
+                </a:solidFill>
+                <a:latin typeface="Arial"/>
+                <a:ea typeface="Arial"/>
+                <a:cs typeface="Arial"/>
+              </a:rPr>
+              <a:t xml:space="preserve">Automate the right things. Keep the taste.</a:t>
+            </a:r>
+            <a:endParaRPr lang="en-US" sz="1200"/>
+          </a:p>
+          <a:p>
+            <a:pPr marL="0" indent="0">
+              <a:lnSpc>
+                <a:spcPts val="1560"/>
+              </a:lnSpc>
+              <a:spcAft>
+                <a:spcPts val="0"/>
+              </a:spcAft>
+              <a:buNone/>
+            </a:pPr>
+            <a:r>
+              <a:rPr lang="en-US" sz="1200" b="0">
+                <a:solidFill>
+                  <a:srgbClr val="202b33"/>
+                </a:solidFill>
+                <a:latin typeface="Arial"/>
+                <a:ea typeface="Arial"/>
+                <a:cs typeface="Arial"/>
+              </a:rPr>
+              <a:t xml:space="preserve"/>
+            </a:r>
+            <a:endParaRPr lang="en-US" sz="1200"/>
+          </a:p>
+          <a:p>
+            <a:pPr marL="0" indent="0">
+              <a:lnSpc>
+                <a:spcPts val="1560"/>
+              </a:lnSpc>
+              <a:spcAft>
+                <a:spcPts val="0"/>
+              </a:spcAft>
+              <a:buNone/>
+            </a:pPr>
+            <a:r>
+              <a:rPr lang="en-US" sz="1200" b="0">
+                <a:solidFill>
+                  <a:srgbClr val="202b33"/>
+                </a:solidFill>
+                <a:latin typeface="Arial"/>
+                <a:ea typeface="Arial"/>
+                <a:cs typeface="Arial"/>
+              </a:rPr>
+              <a:t xml:space="preserve">Back to the org chart. Some of those boundaries exist because the work really is different. Some exist because the person with the spreadsheet sat in another department. We should know which before teaching agents to repeat them.</a:t>
+            </a:r>
+            <a:endParaRPr lang="en-US" sz="1200"/>
+          </a:p>
+          <a:p>
+            <a:pPr marL="0" indent="0">
+              <a:lnSpc>
+                <a:spcPts val="1560"/>
+              </a:lnSpc>
+              <a:spcAft>
+                <a:spcPts val="0"/>
+              </a:spcAft>
+              <a:buNone/>
+            </a:pPr>
+            <a:r>
+              <a:rPr lang="en-US" sz="1200" b="0">
+                <a:solidFill>
+                  <a:srgbClr val="202b33"/>
+                </a:solidFill>
+                <a:latin typeface="Arial"/>
+                <a:ea typeface="Arial"/>
+                <a:cs typeface="Arial"/>
+              </a:rPr>
+              <a:t xml:space="preserve"/>
+            </a:r>
+            <a:endParaRPr lang="en-US" sz="1200"/>
+          </a:p>
+          <a:p>
+            <a:pPr marL="0" indent="0">
+              <a:lnSpc>
+                <a:spcPts val="1560"/>
+              </a:lnSpc>
+              <a:spcAft>
+                <a:spcPts val="0"/>
+              </a:spcAft>
+              <a:buNone/>
+            </a:pPr>
+            <a:r>
+              <a:rPr lang="en-US" sz="1200" b="0">
+                <a:solidFill>
+                  <a:srgbClr val="202b33"/>
+                </a:solidFill>
+                <a:latin typeface="Arial"/>
+                <a:ea typeface="Arial"/>
+                <a:cs typeface="Arial"/>
+              </a:rPr>
+              <a:t xml:space="preserve">Take one boundary. What arrives, what leaves, who decides, and what did it cost last week? Make collection cheaper without erasing the disagreement the handoff used to expose. Keep the product review where the evidence conflicts, and give the decision a durable artifact so the next agent does not have to guess.</a:t>
+            </a:r>
+            <a:endParaRPr lang="en-US" sz="1200"/>
+          </a:p>
+          <a:p>
+            <a:pPr marL="0" indent="0">
+              <a:lnSpc>
+                <a:spcPts val="1560"/>
+              </a:lnSpc>
+              <a:spcAft>
+                <a:spcPts val="0"/>
+              </a:spcAft>
+              <a:buNone/>
+            </a:pPr>
+            <a:r>
+              <a:rPr lang="en-US" sz="1200" b="0">
+                <a:solidFill>
+                  <a:srgbClr val="202b33"/>
+                </a:solidFill>
+                <a:latin typeface="Arial"/>
+                <a:ea typeface="Arial"/>
+                <a:cs typeface="Arial"/>
+              </a:rPr>
+              <a:t xml:space="preserve"/>
+            </a:r>
+            <a:endParaRPr lang="en-US" sz="1200"/>
+          </a:p>
+          <a:p>
+            <a:pPr marL="0" indent="0">
+              <a:lnSpc>
+                <a:spcPts val="1560"/>
+              </a:lnSpc>
+              <a:spcAft>
+                <a:spcPts val="0"/>
+              </a:spcAft>
+              <a:buNone/>
+            </a:pPr>
+            <a:r>
+              <a:rPr lang="en-US" sz="1200" b="0">
+                <a:solidFill>
+                  <a:srgbClr val="202b33"/>
+                </a:solidFill>
+                <a:latin typeface="Arial"/>
+                <a:ea typeface="Arial"/>
+                <a:cs typeface="Arial"/>
+              </a:rPr>
+              <a:t xml:space="preserve">Then price ownership, and price the fuel. Six agents do not become free because one person has their names in a config file, and neither does the burn that keeps them running. Put permission before customer consequences.</a:t>
+            </a:r>
+            <a:endParaRPr lang="en-US" sz="1200"/>
+          </a:p>
+          <a:p>
+            <a:pPr marL="0" indent="0">
+              <a:lnSpc>
+                <a:spcPts val="1560"/>
+              </a:lnSpc>
+              <a:spcAft>
+                <a:spcPts val="0"/>
+              </a:spcAft>
+              <a:buNone/>
+            </a:pPr>
+            <a:r>
+              <a:rPr lang="en-US" sz="1200" b="0">
+                <a:solidFill>
+                  <a:srgbClr val="202b33"/>
+                </a:solidFill>
+                <a:latin typeface="Arial"/>
+                <a:ea typeface="Arial"/>
+                <a:cs typeface="Arial"/>
+              </a:rPr>
+              <a:t xml:space="preserve"/>
+            </a:r>
+            <a:endParaRPr lang="en-US" sz="1200"/>
+          </a:p>
+          <a:p>
+            <a:pPr marL="0" indent="0">
+              <a:lnSpc>
+                <a:spcPts val="1560"/>
+              </a:lnSpc>
+              <a:spcAft>
+                <a:spcPts val="0"/>
+              </a:spcAft>
+              <a:buNone/>
+            </a:pPr>
+            <a:r>
+              <a:rPr lang="en-US" sz="1200" b="0">
+                <a:solidFill>
+                  <a:srgbClr val="202b33"/>
+                </a:solidFill>
+                <a:latin typeface="Arial"/>
+                <a:ea typeface="Arial"/>
+                <a:cs typeface="Arial"/>
+              </a:rPr>
+              <a:t xml:space="preserve">And then do the larger version of the same move. The org chart is a record of earlier tradeoffs; so is the product category you are working inside. You are allowed to make new ones, and the channel is not spoken for yet. Break the mirror on purpose. Automate the right things. Keep the taste.</a:t>
+            </a:r>
+            <a:endParaRPr lang="en-US" sz="1200"/>
+          </a:p>
+          <a:p>
+            <a:pPr marL="0" indent="0">
+              <a:lnSpc>
+                <a:spcPts val="1560"/>
+              </a:lnSpc>
+              <a:spcAft>
+                <a:spcPts val="0"/>
+              </a:spcAft>
+              <a:buNone/>
+            </a:pPr>
+            <a:r>
+              <a:rPr lang="en-US" sz="1200" b="0">
+                <a:solidFill>
+                  <a:srgbClr val="202b33"/>
+                </a:solidFill>
+                <a:latin typeface="Arial"/>
+                <a:ea typeface="Arial"/>
+                <a:cs typeface="Arial"/>
+              </a:rPr>
+              <a:t xml:space="preserve"/>
+            </a:r>
+            <a:endParaRPr lang="en-US" sz="1200"/>
+          </a:p>
+          <a:p>
+            <a:pPr marL="0" indent="0">
+              <a:lnSpc>
+                <a:spcPts val="1560"/>
+              </a:lnSpc>
+              <a:spcAft>
+                <a:spcPts val="0"/>
+              </a:spcAft>
+              <a:buNone/>
+            </a:pPr>
+            <a:r>
+              <a:rPr lang="en-US" sz="1200" b="0">
+                <a:solidFill>
+                  <a:srgbClr val="202b33"/>
+                </a:solidFill>
+                <a:latin typeface="Arial"/>
+                <a:ea typeface="Arial"/>
+                <a:cs typeface="Arial"/>
+              </a:rPr>
+              <a:t xml:space="preserve"/>
+            </a:r>
+            <a:endParaRPr lang="en-US" sz="1200"/>
+          </a:p>
+          <a:p>
+            <a:pPr marL="0" indent="0">
+              <a:lnSpc>
+                <a:spcPts val="1560"/>
+              </a:lnSpc>
+              <a:spcAft>
+                <a:spcPts val="0"/>
+              </a:spcAft>
+              <a:buNone/>
+            </a:pPr>
+            <a:r>
+              <a:rPr lang="en-US" sz="1200" b="0">
+                <a:solidFill>
+                  <a:srgbClr val="202b33"/>
+                </a:solidFill>
+                <a:latin typeface="Arial"/>
+                <a:ea typeface="Arial"/>
+                <a:cs typeface="Arial"/>
+              </a:rPr>
+              <a:t xml:space="preserve"/>
+            </a:r>
+            <a:endParaRPr lang="en-US" sz="1200"/>
+          </a:p>
+          <a:p>
+            <a:pPr marL="0" indent="0">
+              <a:lnSpc>
+                <a:spcPts val="1560"/>
+              </a:lnSpc>
+              <a:spcAft>
+                <a:spcPts val="0"/>
+              </a:spcAft>
+              <a:buNone/>
+            </a:pPr>
+            <a:r>
+              <a:rPr lang="en-US" sz="1200" b="0">
+                <a:solidFill>
+                  <a:srgbClr val="202b33"/>
+                </a:solidFill>
+                <a:latin typeface="Arial"/>
+                <a:ea typeface="Arial"/>
+                <a:cs typeface="Arial"/>
+              </a:rPr>
+              <a:t xml:space="preserve"/>
+            </a:r>
+            <a:endParaRPr lang="en-US" sz="1200"/>
+          </a:p>
+          <a:p>
+            <a:pPr marL="0" indent="0">
+              <a:lnSpc>
+                <a:spcPts val="1560"/>
+              </a:lnSpc>
+              <a:spcAft>
+                <a:spcPts val="0"/>
+              </a:spcAft>
+              <a:buNone/>
+            </a:pPr>
+            <a:r>
+              <a:rPr lang="en-US" sz="1200" b="0">
+                <a:solidFill>
+                  <a:srgbClr val="202b33"/>
+                </a:solidFill>
+                <a:latin typeface="Arial"/>
+                <a:ea typeface="Arial"/>
+                <a:cs typeface="Arial"/>
+              </a:rPr>
+              <a:t xml:space="preserve"/>
+            </a:r>
+            <a:endParaRPr lang="en-US" sz="1200"/>
+          </a:p>
+          <a:p>
+            <a:pPr marL="0" indent="0">
+              <a:lnSpc>
+                <a:spcPts val="1560"/>
+              </a:lnSpc>
+              <a:spcAft>
+                <a:spcPts val="0"/>
+              </a:spcAft>
+              <a:buNone/>
+            </a:pPr>
+            <a:r>
+              <a:rPr lang="en-US" sz="1200" b="0">
+                <a:solidFill>
+                  <a:srgbClr val="202b33"/>
+                </a:solidFill>
+                <a:latin typeface="Arial"/>
+                <a:ea typeface="Arial"/>
+                <a:cs typeface="Arial"/>
+              </a:rPr>
+              <a:t xml:space="preserve"/>
+            </a:r>
+            <a:endParaRPr lang="en-US" sz="1200"/>
+          </a:p>
+        </p:txBody>
+      </p:sp>
+    </p:spTree>
+  </p:cSld>
+  <p:clrMapOvr>
+    <a:masterClrMapping/>
+  </p:clrMapOvr>
+</p:notes>
+</file>
+
+<file path=ppt/notesSlides/notesSlide11.xml><?xml version="1.0" encoding="utf-8"?>
+<p:notes xmlns:a="http://schemas.openxmlformats.org/drawingml/2006/main" xmlns:r="http://schemas.openxmlformats.org/officeDocument/2006/relationships" xmlns:p="http://schemas.openxmlformats.org/presentationml/2006/main">
+  <p:cSld>
+    <p:spTree>
+      <p:nvGrpSpPr>
+        <p:cNvPr id="1" name=""/>
+        <p:cNvGrpSpPr/>
+        <p:nvPr/>
+      </p:nvGrpSpPr>
+      <p:grpSpPr>
+        <a:xfrm>
+          <a:off x="0" y="0"/>
+          <a:ext cx="0" cy="0"/>
+          <a:chOff x="0" y="0"/>
+          <a:chExt cx="0" cy="0"/>
+        </a:xfrm>
+      </p:grpSpPr>
+      <p:sp>
+        <p:nvSpPr>
+          <p:cNvPr id="2" name="Presenter notes"/>
+          <p:cNvSpPr txBox="1"/>
+          <p:nvPr>
+            <p:ph type="body" idx="1"/>
+          </p:nvPr>
+        </p:nvSpPr>
+        <p:spPr>
+          <a:xfrm>
+            <a:off x="457200" y="1428750"/>
+            <a:ext cx="5715000" cy="6667500"/>
+          </a:xfrm>
+        </p:spPr>
+        <p:txBody>
+          <a:bodyPr/>
+          <a:lstStyle/>
+          <a:p>
+            <a:pPr marL="0" indent="0">
+              <a:lnSpc>
+                <a:spcPts val="1560"/>
+              </a:lnSpc>
+              <a:spcAft>
+                <a:spcPts val="0"/>
+              </a:spcAft>
+              <a:buNone/>
+            </a:pPr>
+            <a:r>
+              <a:rPr lang="en-US" sz="1200" b="0">
+                <a:solidFill>
+                  <a:srgbClr val="202b33"/>
+                </a:solidFill>
+                <a:latin typeface="Arial"/>
+                <a:ea typeface="Arial"/>
+                <a:cs typeface="Arial"/>
+              </a:rPr>
+              <a:t xml:space="preserve">Melvin E. Conway (1968), [How Do Committees Invent?](https://melconway.com/Home/pdf/committees.pdf), Datamation, April, 28–31.</a:t>
+            </a:r>
+            <a:endParaRPr lang="en-US" sz="1200"/>
+          </a:p>
+          <a:p>
+            <a:pPr marL="0" indent="0">
+              <a:lnSpc>
+                <a:spcPts val="1560"/>
+              </a:lnSpc>
+              <a:spcAft>
+                <a:spcPts val="0"/>
+              </a:spcAft>
+              <a:buNone/>
+            </a:pPr>
+            <a:r>
+              <a:rPr lang="en-US" sz="1200" b="0">
+                <a:solidFill>
+                  <a:srgbClr val="202b33"/>
+                </a:solidFill>
+                <a:latin typeface="Arial"/>
+                <a:ea typeface="Arial"/>
+                <a:cs typeface="Arial"/>
+              </a:rPr>
+              <a:t xml:space="preserve"/>
+            </a:r>
+            <a:endParaRPr lang="en-US" sz="1200"/>
+          </a:p>
+          <a:p>
+            <a:pPr marL="0" indent="0">
+              <a:lnSpc>
+                <a:spcPts val="1560"/>
+              </a:lnSpc>
+              <a:spcAft>
+                <a:spcPts val="0"/>
+              </a:spcAft>
+              <a:buNone/>
+            </a:pPr>
+            <a:r>
+              <a:rPr lang="en-US" sz="1200" b="0">
+                <a:solidFill>
+                  <a:srgbClr val="202b33"/>
+                </a:solidFill>
+                <a:latin typeface="Arial"/>
+                <a:ea typeface="Arial"/>
+                <a:cs typeface="Arial"/>
+              </a:rPr>
+              <a:t xml:space="preserve">Ronald H. Coase (1937), [The Nature of the Firm](https://onlinelibrary.wiley.com/doi/10.1111/j.1468-0335.1937.tb00002.x), Economica 4(16), 386–405. The agent-design application is the speaker’s argument.</a:t>
+            </a:r>
+            <a:endParaRPr lang="en-US" sz="1200"/>
+          </a:p>
+          <a:p>
+            <a:pPr marL="0" indent="0">
+              <a:lnSpc>
+                <a:spcPts val="1560"/>
+              </a:lnSpc>
+              <a:spcAft>
+                <a:spcPts val="0"/>
+              </a:spcAft>
+              <a:buNone/>
+            </a:pPr>
+            <a:r>
+              <a:rPr lang="en-US" sz="1200" b="0">
+                <a:solidFill>
+                  <a:srgbClr val="202b33"/>
+                </a:solidFill>
+                <a:latin typeface="Arial"/>
+                <a:ea typeface="Arial"/>
+                <a:cs typeface="Arial"/>
+              </a:rPr>
+              <a:t xml:space="preserve"/>
+            </a:r>
+            <a:endParaRPr lang="en-US" sz="1200"/>
+          </a:p>
+          <a:p>
+            <a:pPr marL="0" indent="0">
+              <a:lnSpc>
+                <a:spcPts val="1560"/>
+              </a:lnSpc>
+              <a:spcAft>
+                <a:spcPts val="0"/>
+              </a:spcAft>
+              <a:buNone/>
+            </a:pPr>
+            <a:r>
+              <a:rPr lang="en-US" sz="1200" b="0">
+                <a:solidFill>
+                  <a:srgbClr val="202b33"/>
+                </a:solidFill>
+                <a:latin typeface="Arial"/>
+                <a:ea typeface="Arial"/>
+                <a:cs typeface="Arial"/>
+              </a:rPr>
+              <a:t xml:space="preserve">[Thoughtworks, Inverse Conway Maneuver](https://www.thoughtworks.com/en-br/radar/techniques/inverse-conway-maneuver), 2014/2015. Skelton and Pais, [Team Topologies interaction modes](https://teamtopologies.com/key-concepts).</a:t>
+            </a:r>
+            <a:endParaRPr lang="en-US" sz="1200"/>
+          </a:p>
+          <a:p>
+            <a:pPr marL="0" indent="0">
+              <a:lnSpc>
+                <a:spcPts val="1560"/>
+              </a:lnSpc>
+              <a:spcAft>
+                <a:spcPts val="0"/>
+              </a:spcAft>
+              <a:buNone/>
+            </a:pPr>
+            <a:r>
+              <a:rPr lang="en-US" sz="1200" b="0">
+                <a:solidFill>
+                  <a:srgbClr val="202b33"/>
+                </a:solidFill>
+                <a:latin typeface="Arial"/>
+                <a:ea typeface="Arial"/>
+                <a:cs typeface="Arial"/>
+              </a:rPr>
+              <a:t xml:space="preserve"/>
+            </a:r>
+            <a:endParaRPr lang="en-US" sz="1200"/>
+          </a:p>
+          <a:p>
+            <a:pPr marL="0" indent="0">
+              <a:lnSpc>
+                <a:spcPts val="1560"/>
+              </a:lnSpc>
+              <a:spcAft>
+                <a:spcPts val="0"/>
+              </a:spcAft>
+              <a:buNone/>
+            </a:pPr>
+            <a:r>
+              <a:rPr lang="en-US" sz="1200" b="0">
+                <a:solidFill>
+                  <a:srgbClr val="202b33"/>
+                </a:solidFill>
+                <a:latin typeface="Arial"/>
+                <a:ea typeface="Arial"/>
+                <a:cs typeface="Arial"/>
+              </a:rPr>
+              <a:t xml:space="preserve">Donald T. Campbell (1979), [Assessing the impact of planned social change](https://doi.org/10.1016/0149-7189%2879%2990048-X), Evaluation and Program Planning 2(1), 67–90.</a:t>
             </a:r>
             <a:endParaRPr lang="en-US" sz="1200"/>
           </a:p>
@@ -741,7 +1475,7 @@
                 <a:ea typeface="Arial"/>
                 <a:cs typeface="Arial"/>
               </a:rPr>
-              <a:t xml:space="preserve">Source slide 3. 01:30 to 03:30</a:t>
+              <a:t xml:space="preserve">Source slide 3. 01:30 to 03:00</a:t>
             </a:r>
             <a:endParaRPr lang="en-US" sz="1200"/>
           </a:p>
@@ -1268,7 +2002,7 @@
                 <a:ea typeface="Arial"/>
                 <a:cs typeface="Arial"/>
               </a:rPr>
-              <a:t xml:space="preserve">Source slide 5. 03:30 to 05:30</a:t>
+              <a:t xml:space="preserve">Source slide 5. 03:00 to 05:00</a:t>
             </a:r>
             <a:endParaRPr lang="en-US" sz="1200"/>
           </a:p>
@@ -1841,7 +2575,7 @@
                 <a:ea typeface="Arial"/>
                 <a:cs typeface="Arial"/>
               </a:rPr>
-              <a:t xml:space="preserve">Source slide 10. 05:30 to 07:00</a:t>
+              <a:t xml:space="preserve">Source slide 10. 05:00 to 06:30</a:t>
             </a:r>
             <a:endParaRPr lang="en-US" sz="1200"/>
           </a:p>
@@ -2368,7 +3102,7 @@
                 <a:ea typeface="Arial"/>
                 <a:cs typeface="Arial"/>
               </a:rPr>
-              <a:t xml:space="preserve">Source slide 11. 07:00 to 10:30</a:t>
+              <a:t xml:space="preserve">Source slide 11. 06:30 to 10:00</a:t>
             </a:r>
             <a:endParaRPr lang="en-US" sz="1200"/>
           </a:p>
@@ -2782,7 +3516,7 @@
                 <a:ea typeface="Arial"/>
                 <a:cs typeface="Arial"/>
               </a:rPr>
-              <a:t xml:space="preserve">Five minutes in the 40/30 routes, 3:30 in the 15. Begin with only this slide, never the answer-labelled kit. After the vote open the kit and map B to Pressure copy, C to Clearer first step. Follow economics-product/demo.md. Allow 45 seconds to write the rule.</a:t>
+              <a:t xml:space="preserve">Four and a half minutes in the 40/30 routes, 3:30 in the 15. Begin with only this slide, never the answer-labelled kit. After the vote open the kit and map B to Pressure copy, C to Clearer first step. Follow economics-product/demo.md. Allow 45 seconds to write the rule.</a:t>
             </a:r>
             <a:endParaRPr lang="en-US" sz="1200"/>
           </a:p>
@@ -2941,7 +3675,7 @@
                 <a:ea typeface="Arial"/>
                 <a:cs typeface="Arial"/>
               </a:rPr>
-              <a:t xml:space="preserve">Source slide 12. 10:30 to 13:00</a:t>
+              <a:t xml:space="preserve">Source slide 12. 10:00 to 11:30</a:t>
             </a:r>
             <a:endParaRPr lang="en-US" sz="1200"/>
           </a:p>
@@ -3171,145 +3905,145 @@
                 <a:ea typeface="Arial"/>
                 <a:cs typeface="Arial"/>
               </a:rPr>
-              <a:t xml:space="preserve">Then add the two missing from the old list. Sending a message to a real customer. Deleting their records. Those are consequences for another person, even when the API call costs a fraction of a cent. A person approves them. The system must enforce that permission, not merely mention it in the prompt.</a:t>
-            </a:r>
-            <a:endParaRPr lang="en-US" sz="1200"/>
-          </a:p>
-          <a:p>
-            <a:pPr marL="0" indent="0">
-              <a:lnSpc>
-                <a:spcPts val="1560"/>
-              </a:lnSpc>
-              <a:spcAft>
-                <a:spcPts val="0"/>
-              </a:spcAft>
-              <a:buNone/>
-            </a:pPr>
-            <a:r>
-              <a:rPr lang="en-US" sz="1200" b="0">
-                <a:solidFill>
-                  <a:srgbClr val="202b33"/>
-                </a:solidFill>
-                <a:latin typeface="Arial"/>
-                <a:ea typeface="Arial"/>
-                <a:cs typeface="Arial"/>
-              </a:rPr>
-              <a:t xml:space="preserve"/>
-            </a:r>
-            <a:endParaRPr lang="en-US" sz="1200"/>
-          </a:p>
-          <a:p>
-            <a:pPr marL="0" indent="0">
-              <a:lnSpc>
-                <a:spcPts val="1560"/>
-              </a:lnSpc>
-              <a:spcAft>
-                <a:spcPts val="0"/>
-              </a:spcAft>
-              <a:buNone/>
-            </a:pPr>
-            <a:r>
-              <a:rPr lang="en-US" sz="1200" b="0">
-                <a:solidFill>
-                  <a:srgbClr val="202b33"/>
-                </a:solidFill>
-                <a:latin typeface="Arial"/>
-                <a:ea typeface="Arial"/>
-                <a:cs typeface="Arial"/>
-              </a:rPr>
-              <a:t xml:space="preserve"/>
-            </a:r>
-            <a:endParaRPr lang="en-US" sz="1200"/>
-          </a:p>
-          <a:p>
-            <a:pPr marL="0" indent="0">
-              <a:lnSpc>
-                <a:spcPts val="1560"/>
-              </a:lnSpc>
-              <a:spcAft>
-                <a:spcPts val="0"/>
-              </a:spcAft>
-              <a:buNone/>
-            </a:pPr>
-            <a:r>
-              <a:rPr lang="en-US" sz="1200" b="0">
-                <a:solidFill>
-                  <a:srgbClr val="202b33"/>
-                </a:solidFill>
-                <a:latin typeface="Arial"/>
-                <a:ea typeface="Arial"/>
-                <a:cs typeface="Arial"/>
-              </a:rPr>
-              <a:t xml:space="preserve"/>
-            </a:r>
-            <a:endParaRPr lang="en-US" sz="1200"/>
-          </a:p>
-          <a:p>
-            <a:pPr marL="0" indent="0">
-              <a:lnSpc>
-                <a:spcPts val="1560"/>
-              </a:lnSpc>
-              <a:spcAft>
-                <a:spcPts val="0"/>
-              </a:spcAft>
-              <a:buNone/>
-            </a:pPr>
-            <a:r>
-              <a:rPr lang="en-US" sz="1200" b="0">
-                <a:solidFill>
-                  <a:srgbClr val="202b33"/>
-                </a:solidFill>
-                <a:latin typeface="Arial"/>
-                <a:ea typeface="Arial"/>
-                <a:cs typeface="Arial"/>
-              </a:rPr>
-              <a:t xml:space="preserve"/>
-            </a:r>
-            <a:endParaRPr lang="en-US" sz="1200"/>
-          </a:p>
-          <a:p>
-            <a:pPr marL="0" indent="0">
-              <a:lnSpc>
-                <a:spcPts val="1560"/>
-              </a:lnSpc>
-              <a:spcAft>
-                <a:spcPts val="0"/>
-              </a:spcAft>
-              <a:buNone/>
-            </a:pPr>
-            <a:r>
-              <a:rPr lang="en-US" sz="1200" b="0">
-                <a:solidFill>
-                  <a:srgbClr val="202b33"/>
-                </a:solidFill>
-                <a:latin typeface="Arial"/>
-                <a:ea typeface="Arial"/>
-                <a:cs typeface="Arial"/>
-              </a:rPr>
-              <a:t xml:space="preserve"/>
-            </a:r>
-            <a:endParaRPr lang="en-US" sz="1200"/>
-          </a:p>
-          <a:p>
-            <a:pPr marL="0" indent="0">
-              <a:lnSpc>
-                <a:spcPts val="1560"/>
-              </a:lnSpc>
-              <a:spcAft>
-                <a:spcPts val="0"/>
-              </a:spcAft>
-              <a:buNone/>
-            </a:pPr>
-            <a:r>
-              <a:rPr lang="en-US" sz="1200" b="0">
-                <a:solidFill>
-                  <a:srgbClr val="202b33"/>
-                </a:solidFill>
-                <a:latin typeface="Arial"/>
-                <a:ea typeface="Arial"/>
-                <a:cs typeface="Arial"/>
-              </a:rPr>
-              <a:t xml:space="preserve">Bridge: ownership consumes attention. Limit interfaces, reserve recovery practice, and attach a hypothesis and a report to each experiment.</a:t>
+              <a:t xml:space="preserve">Then add the two missing from the old list. Sending a message to a real customer. Deleting their records. Those are consequences for another person, even when the API call costs a fraction of a cent. A person approves them, and the system enforces that permission rather than mentioning it in a prompt.</a:t>
+            </a:r>
+            <a:endParaRPr lang="en-US" sz="1200"/>
+          </a:p>
+          <a:p>
+            <a:pPr marL="0" indent="0">
+              <a:lnSpc>
+                <a:spcPts val="1560"/>
+              </a:lnSpc>
+              <a:spcAft>
+                <a:spcPts val="0"/>
+              </a:spcAft>
+              <a:buNone/>
+            </a:pPr>
+            <a:r>
+              <a:rPr lang="en-US" sz="1200" b="0">
+                <a:solidFill>
+                  <a:srgbClr val="202b33"/>
+                </a:solidFill>
+                <a:latin typeface="Arial"/>
+                <a:ea typeface="Arial"/>
+                <a:cs typeface="Arial"/>
+              </a:rPr>
+              <a:t xml:space="preserve"/>
+            </a:r>
+            <a:endParaRPr lang="en-US" sz="1200"/>
+          </a:p>
+          <a:p>
+            <a:pPr marL="0" indent="0">
+              <a:lnSpc>
+                <a:spcPts val="1560"/>
+              </a:lnSpc>
+              <a:spcAft>
+                <a:spcPts val="0"/>
+              </a:spcAft>
+              <a:buNone/>
+            </a:pPr>
+            <a:r>
+              <a:rPr lang="en-US" sz="1200" b="0">
+                <a:solidFill>
+                  <a:srgbClr val="202b33"/>
+                </a:solidFill>
+                <a:latin typeface="Arial"/>
+                <a:ea typeface="Arial"/>
+                <a:cs typeface="Arial"/>
+              </a:rPr>
+              <a:t xml:space="preserve"/>
+            </a:r>
+            <a:endParaRPr lang="en-US" sz="1200"/>
+          </a:p>
+          <a:p>
+            <a:pPr marL="0" indent="0">
+              <a:lnSpc>
+                <a:spcPts val="1560"/>
+              </a:lnSpc>
+              <a:spcAft>
+                <a:spcPts val="0"/>
+              </a:spcAft>
+              <a:buNone/>
+            </a:pPr>
+            <a:r>
+              <a:rPr lang="en-US" sz="1200" b="0">
+                <a:solidFill>
+                  <a:srgbClr val="202b33"/>
+                </a:solidFill>
+                <a:latin typeface="Arial"/>
+                <a:ea typeface="Arial"/>
+                <a:cs typeface="Arial"/>
+              </a:rPr>
+              <a:t xml:space="preserve"/>
+            </a:r>
+            <a:endParaRPr lang="en-US" sz="1200"/>
+          </a:p>
+          <a:p>
+            <a:pPr marL="0" indent="0">
+              <a:lnSpc>
+                <a:spcPts val="1560"/>
+              </a:lnSpc>
+              <a:spcAft>
+                <a:spcPts val="0"/>
+              </a:spcAft>
+              <a:buNone/>
+            </a:pPr>
+            <a:r>
+              <a:rPr lang="en-US" sz="1200" b="0">
+                <a:solidFill>
+                  <a:srgbClr val="202b33"/>
+                </a:solidFill>
+                <a:latin typeface="Arial"/>
+                <a:ea typeface="Arial"/>
+                <a:cs typeface="Arial"/>
+              </a:rPr>
+              <a:t xml:space="preserve"/>
+            </a:r>
+            <a:endParaRPr lang="en-US" sz="1200"/>
+          </a:p>
+          <a:p>
+            <a:pPr marL="0" indent="0">
+              <a:lnSpc>
+                <a:spcPts val="1560"/>
+              </a:lnSpc>
+              <a:spcAft>
+                <a:spcPts val="0"/>
+              </a:spcAft>
+              <a:buNone/>
+            </a:pPr>
+            <a:r>
+              <a:rPr lang="en-US" sz="1200" b="0">
+                <a:solidFill>
+                  <a:srgbClr val="202b33"/>
+                </a:solidFill>
+                <a:latin typeface="Arial"/>
+                <a:ea typeface="Arial"/>
+                <a:cs typeface="Arial"/>
+              </a:rPr>
+              <a:t xml:space="preserve"/>
+            </a:r>
+            <a:endParaRPr lang="en-US" sz="1200"/>
+          </a:p>
+          <a:p>
+            <a:pPr marL="0" indent="0">
+              <a:lnSpc>
+                <a:spcPts val="1560"/>
+              </a:lnSpc>
+              <a:spcAft>
+                <a:spcPts val="0"/>
+              </a:spcAft>
+              <a:buNone/>
+            </a:pPr>
+            <a:r>
+              <a:rPr lang="en-US" sz="1200" b="0">
+                <a:solidFill>
+                  <a:srgbClr val="202b33"/>
+                </a:solidFill>
+                <a:latin typeface="Arial"/>
+                <a:ea typeface="Arial"/>
+                <a:cs typeface="Arial"/>
+              </a:rPr>
+              <a:t xml:space="preserve">Bridge: ownership consumes attention, and it is about to consume fuel; limit interfaces, reserve recovery practice, and put the ongoing token burn beside the latency budget.</a:t>
             </a:r>
             <a:endParaRPr lang="en-US" sz="1200"/>
           </a:p>
@@ -3422,421 +4156,421 @@
                 <a:ea typeface="Arial"/>
                 <a:cs typeface="Arial"/>
               </a:rPr>
-              <a:t xml:space="preserve">Source slide 15. 13:00 to 15:00</a:t>
-            </a:r>
-            <a:endParaRPr lang="en-US" sz="1200"/>
-          </a:p>
-          <a:p>
-            <a:pPr marL="0" indent="0">
-              <a:lnSpc>
-                <a:spcPts val="1560"/>
-              </a:lnSpc>
-              <a:spcAft>
-                <a:spcPts val="0"/>
-              </a:spcAft>
-              <a:buNone/>
-            </a:pPr>
-            <a:r>
-              <a:rPr lang="en-US" sz="1200" b="0">
-                <a:solidFill>
-                  <a:srgbClr val="202b33"/>
-                </a:solidFill>
-                <a:latin typeface="Arial"/>
-                <a:ea typeface="Arial"/>
-                <a:cs typeface="Arial"/>
-              </a:rPr>
-              <a:t xml:space="preserve"/>
-            </a:r>
-            <a:endParaRPr lang="en-US" sz="1200"/>
-          </a:p>
-          <a:p>
-            <a:pPr marL="0" indent="0">
-              <a:lnSpc>
-                <a:spcPts val="1560"/>
-              </a:lnSpc>
-              <a:spcAft>
-                <a:spcPts val="0"/>
-              </a:spcAft>
-              <a:buNone/>
-            </a:pPr>
-            <a:r>
-              <a:rPr lang="en-US" sz="1200" b="0">
-                <a:solidFill>
-                  <a:srgbClr val="202b33"/>
-                </a:solidFill>
-                <a:latin typeface="Arial"/>
-                <a:ea typeface="Arial"/>
-                <a:cs typeface="Arial"/>
-              </a:rPr>
-              <a:t xml:space="preserve">Reprice the handoffs. Draw the interfaces.</a:t>
-            </a:r>
-            <a:endParaRPr lang="en-US" sz="1200"/>
-          </a:p>
-          <a:p>
-            <a:pPr marL="0" indent="0">
-              <a:lnSpc>
-                <a:spcPts val="1560"/>
-              </a:lnSpc>
-              <a:spcAft>
-                <a:spcPts val="0"/>
-              </a:spcAft>
-              <a:buNone/>
-            </a:pPr>
-            <a:r>
-              <a:rPr lang="en-US" sz="1200" b="0">
-                <a:solidFill>
-                  <a:srgbClr val="202b33"/>
-                </a:solidFill>
-                <a:latin typeface="Arial"/>
-                <a:ea typeface="Arial"/>
-                <a:cs typeface="Arial"/>
-              </a:rPr>
-              <a:t xml:space="preserve"/>
-            </a:r>
-            <a:endParaRPr lang="en-US" sz="1200"/>
-          </a:p>
-          <a:p>
-            <a:pPr marL="0" indent="0">
-              <a:lnSpc>
-                <a:spcPts val="1560"/>
-              </a:lnSpc>
-              <a:spcAft>
-                <a:spcPts val="0"/>
-              </a:spcAft>
-              <a:buNone/>
-            </a:pPr>
-            <a:r>
-              <a:rPr lang="en-US" sz="1200" b="0">
-                <a:solidFill>
-                  <a:srgbClr val="202b33"/>
-                </a:solidFill>
-                <a:latin typeface="Arial"/>
-                <a:ea typeface="Arial"/>
-                <a:cs typeface="Arial"/>
-              </a:rPr>
-              <a:t xml:space="preserve">Automate the right things. Keep the taste.</a:t>
-            </a:r>
-            <a:endParaRPr lang="en-US" sz="1200"/>
-          </a:p>
-          <a:p>
-            <a:pPr marL="0" indent="0">
-              <a:lnSpc>
-                <a:spcPts val="1560"/>
-              </a:lnSpc>
-              <a:spcAft>
-                <a:spcPts val="0"/>
-              </a:spcAft>
-              <a:buNone/>
-            </a:pPr>
-            <a:r>
-              <a:rPr lang="en-US" sz="1200" b="0">
-                <a:solidFill>
-                  <a:srgbClr val="202b33"/>
-                </a:solidFill>
-                <a:latin typeface="Arial"/>
-                <a:ea typeface="Arial"/>
-                <a:cs typeface="Arial"/>
-              </a:rPr>
-              <a:t xml:space="preserve"/>
-            </a:r>
-            <a:endParaRPr lang="en-US" sz="1200"/>
-          </a:p>
-          <a:p>
-            <a:pPr marL="0" indent="0">
-              <a:lnSpc>
-                <a:spcPts val="1560"/>
-              </a:lnSpc>
-              <a:spcAft>
-                <a:spcPts val="0"/>
-              </a:spcAft>
-              <a:buNone/>
-            </a:pPr>
-            <a:r>
-              <a:rPr lang="en-US" sz="1200" b="0">
-                <a:solidFill>
-                  <a:srgbClr val="202b33"/>
-                </a:solidFill>
-                <a:latin typeface="Arial"/>
-                <a:ea typeface="Arial"/>
-                <a:cs typeface="Arial"/>
-              </a:rPr>
-              <a:t xml:space="preserve">Back to the org chart. Some of those boundaries exist because the work really is different. Some exist because the person with the spreadsheet sat in another department. We should know which before teaching agents to repeat them.</a:t>
-            </a:r>
-            <a:endParaRPr lang="en-US" sz="1200"/>
-          </a:p>
-          <a:p>
-            <a:pPr marL="0" indent="0">
-              <a:lnSpc>
-                <a:spcPts val="1560"/>
-              </a:lnSpc>
-              <a:spcAft>
-                <a:spcPts val="0"/>
-              </a:spcAft>
-              <a:buNone/>
-            </a:pPr>
-            <a:r>
-              <a:rPr lang="en-US" sz="1200" b="0">
-                <a:solidFill>
-                  <a:srgbClr val="202b33"/>
-                </a:solidFill>
-                <a:latin typeface="Arial"/>
-                <a:ea typeface="Arial"/>
-                <a:cs typeface="Arial"/>
-              </a:rPr>
-              <a:t xml:space="preserve"/>
-            </a:r>
-            <a:endParaRPr lang="en-US" sz="1200"/>
-          </a:p>
-          <a:p>
-            <a:pPr marL="0" indent="0">
-              <a:lnSpc>
-                <a:spcPts val="1560"/>
-              </a:lnSpc>
-              <a:spcAft>
-                <a:spcPts val="0"/>
-              </a:spcAft>
-              <a:buNone/>
-            </a:pPr>
-            <a:r>
-              <a:rPr lang="en-US" sz="1200" b="0">
-                <a:solidFill>
-                  <a:srgbClr val="202b33"/>
-                </a:solidFill>
-                <a:latin typeface="Arial"/>
-                <a:ea typeface="Arial"/>
-                <a:cs typeface="Arial"/>
-              </a:rPr>
-              <a:t xml:space="preserve">Take one boundary. What arrives, what leaves, who decides, and what did it cost last week? Make collection cheaper without erasing the disagreement that the handoff used to expose. Keep the product review where the evidence conflicts. Give the resulting decision a durable artifact so the next agent does not have to guess.</a:t>
-            </a:r>
-            <a:endParaRPr lang="en-US" sz="1200"/>
-          </a:p>
-          <a:p>
-            <a:pPr marL="0" indent="0">
-              <a:lnSpc>
-                <a:spcPts val="1560"/>
-              </a:lnSpc>
-              <a:spcAft>
-                <a:spcPts val="0"/>
-              </a:spcAft>
-              <a:buNone/>
-            </a:pPr>
-            <a:r>
-              <a:rPr lang="en-US" sz="1200" b="0">
-                <a:solidFill>
-                  <a:srgbClr val="202b33"/>
-                </a:solidFill>
-                <a:latin typeface="Arial"/>
-                <a:ea typeface="Arial"/>
-                <a:cs typeface="Arial"/>
-              </a:rPr>
-              <a:t xml:space="preserve"/>
-            </a:r>
-            <a:endParaRPr lang="en-US" sz="1200"/>
-          </a:p>
-          <a:p>
-            <a:pPr marL="0" indent="0">
-              <a:lnSpc>
-                <a:spcPts val="1560"/>
-              </a:lnSpc>
-              <a:spcAft>
-                <a:spcPts val="0"/>
-              </a:spcAft>
-              <a:buNone/>
-            </a:pPr>
-            <a:r>
-              <a:rPr lang="en-US" sz="1200" b="0">
-                <a:solidFill>
-                  <a:srgbClr val="202b33"/>
-                </a:solidFill>
-                <a:latin typeface="Arial"/>
-                <a:ea typeface="Arial"/>
-                <a:cs typeface="Arial"/>
-              </a:rPr>
-              <a:t xml:space="preserve">Then price ownership. Six agents do not become free because one person has their names in a config file. Reserve the person's attention and practise the exceptional work. Put permission before customer consequences.</a:t>
-            </a:r>
-            <a:endParaRPr lang="en-US" sz="1200"/>
-          </a:p>
-          <a:p>
-            <a:pPr marL="0" indent="0">
-              <a:lnSpc>
-                <a:spcPts val="1560"/>
-              </a:lnSpc>
-              <a:spcAft>
-                <a:spcPts val="0"/>
-              </a:spcAft>
-              <a:buNone/>
-            </a:pPr>
-            <a:r>
-              <a:rPr lang="en-US" sz="1200" b="0">
-                <a:solidFill>
-                  <a:srgbClr val="202b33"/>
-                </a:solidFill>
-                <a:latin typeface="Arial"/>
-                <a:ea typeface="Arial"/>
-                <a:cs typeface="Arial"/>
-              </a:rPr>
-              <a:t xml:space="preserve"/>
-            </a:r>
-            <a:endParaRPr lang="en-US" sz="1200"/>
-          </a:p>
-          <a:p>
-            <a:pPr marL="0" indent="0">
-              <a:lnSpc>
-                <a:spcPts val="1560"/>
-              </a:lnSpc>
-              <a:spcAft>
-                <a:spcPts val="0"/>
-              </a:spcAft>
-              <a:buNone/>
-            </a:pPr>
-            <a:r>
-              <a:rPr lang="en-US" sz="1200" b="0">
-                <a:solidFill>
-                  <a:srgbClr val="202b33"/>
-                </a:solidFill>
-                <a:latin typeface="Arial"/>
-                <a:ea typeface="Arial"/>
-                <a:cs typeface="Arial"/>
-              </a:rPr>
-              <a:t xml:space="preserve">The org chart is a record of earlier tradeoffs. You are allowed to make new ones. Automate the right things. Keep the taste.</a:t>
-            </a:r>
-            <a:endParaRPr lang="en-US" sz="1200"/>
-          </a:p>
-          <a:p>
-            <a:pPr marL="0" indent="0">
-              <a:lnSpc>
-                <a:spcPts val="1560"/>
-              </a:lnSpc>
-              <a:spcAft>
-                <a:spcPts val="0"/>
-              </a:spcAft>
-              <a:buNone/>
-            </a:pPr>
-            <a:r>
-              <a:rPr lang="en-US" sz="1200" b="0">
-                <a:solidFill>
-                  <a:srgbClr val="202b33"/>
-                </a:solidFill>
-                <a:latin typeface="Arial"/>
-                <a:ea typeface="Arial"/>
-                <a:cs typeface="Arial"/>
-              </a:rPr>
-              <a:t xml:space="preserve"/>
-            </a:r>
-            <a:endParaRPr lang="en-US" sz="1200"/>
-          </a:p>
-          <a:p>
-            <a:pPr marL="0" indent="0">
-              <a:lnSpc>
-                <a:spcPts val="1560"/>
-              </a:lnSpc>
-              <a:spcAft>
-                <a:spcPts val="0"/>
-              </a:spcAft>
-              <a:buNone/>
-            </a:pPr>
-            <a:r>
-              <a:rPr lang="en-US" sz="1200" b="0">
-                <a:solidFill>
-                  <a:srgbClr val="202b33"/>
-                </a:solidFill>
-                <a:latin typeface="Arial"/>
-                <a:ea typeface="Arial"/>
-                <a:cs typeface="Arial"/>
-              </a:rPr>
-              <a:t xml:space="preserve"/>
-            </a:r>
-            <a:endParaRPr lang="en-US" sz="1200"/>
-          </a:p>
-          <a:p>
-            <a:pPr marL="0" indent="0">
-              <a:lnSpc>
-                <a:spcPts val="1560"/>
-              </a:lnSpc>
-              <a:spcAft>
-                <a:spcPts val="0"/>
-              </a:spcAft>
-              <a:buNone/>
-            </a:pPr>
-            <a:r>
-              <a:rPr lang="en-US" sz="1200" b="0">
-                <a:solidFill>
-                  <a:srgbClr val="202b33"/>
-                </a:solidFill>
-                <a:latin typeface="Arial"/>
-                <a:ea typeface="Arial"/>
-                <a:cs typeface="Arial"/>
-              </a:rPr>
-              <a:t xml:space="preserve"/>
-            </a:r>
-            <a:endParaRPr lang="en-US" sz="1200"/>
-          </a:p>
-          <a:p>
-            <a:pPr marL="0" indent="0">
-              <a:lnSpc>
-                <a:spcPts val="1560"/>
-              </a:lnSpc>
-              <a:spcAft>
-                <a:spcPts val="0"/>
-              </a:spcAft>
-              <a:buNone/>
-            </a:pPr>
-            <a:r>
-              <a:rPr lang="en-US" sz="1200" b="0">
-                <a:solidFill>
-                  <a:srgbClr val="202b33"/>
-                </a:solidFill>
-                <a:latin typeface="Arial"/>
-                <a:ea typeface="Arial"/>
-                <a:cs typeface="Arial"/>
-              </a:rPr>
-              <a:t xml:space="preserve"/>
-            </a:r>
-            <a:endParaRPr lang="en-US" sz="1200"/>
-          </a:p>
-          <a:p>
-            <a:pPr marL="0" indent="0">
-              <a:lnSpc>
-                <a:spcPts val="1560"/>
-              </a:lnSpc>
-              <a:spcAft>
-                <a:spcPts val="0"/>
-              </a:spcAft>
-              <a:buNone/>
-            </a:pPr>
-            <a:r>
-              <a:rPr lang="en-US" sz="1200" b="0">
-                <a:solidFill>
-                  <a:srgbClr val="202b33"/>
-                </a:solidFill>
-                <a:latin typeface="Arial"/>
-                <a:ea typeface="Arial"/>
-                <a:cs typeface="Arial"/>
-              </a:rPr>
-              <a:t xml:space="preserve"/>
-            </a:r>
-            <a:endParaRPr lang="en-US" sz="1200"/>
-          </a:p>
-          <a:p>
-            <a:pPr marL="0" indent="0">
-              <a:lnSpc>
-                <a:spcPts val="1560"/>
-              </a:lnSpc>
-              <a:spcAft>
-                <a:spcPts val="0"/>
-              </a:spcAft>
-              <a:buNone/>
-            </a:pPr>
-            <a:r>
-              <a:rPr lang="en-US" sz="1200" b="0">
-                <a:solidFill>
-                  <a:srgbClr val="202b33"/>
-                </a:solidFill>
-                <a:latin typeface="Arial"/>
-                <a:ea typeface="Arial"/>
-                <a:cs typeface="Arial"/>
-              </a:rPr>
-              <a:t xml:space="preserve"/>
+              <a:t xml:space="preserve">Source slide 15. 11:30 to 13:30</a:t>
+            </a:r>
+            <a:endParaRPr lang="en-US" sz="1200"/>
+          </a:p>
+          <a:p>
+            <a:pPr marL="0" indent="0">
+              <a:lnSpc>
+                <a:spcPts val="1560"/>
+              </a:lnSpc>
+              <a:spcAft>
+                <a:spcPts val="0"/>
+              </a:spcAft>
+              <a:buNone/>
+            </a:pPr>
+            <a:r>
+              <a:rPr lang="en-US" sz="1200" b="0">
+                <a:solidFill>
+                  <a:srgbClr val="202b33"/>
+                </a:solidFill>
+                <a:latin typeface="Arial"/>
+                <a:ea typeface="Arial"/>
+                <a:cs typeface="Arial"/>
+              </a:rPr>
+              <a:t xml:space="preserve"/>
+            </a:r>
+            <a:endParaRPr lang="en-US" sz="1200"/>
+          </a:p>
+          <a:p>
+            <a:pPr marL="0" indent="0">
+              <a:lnSpc>
+                <a:spcPts val="1560"/>
+              </a:lnSpc>
+              <a:spcAft>
+                <a:spcPts val="0"/>
+              </a:spcAft>
+              <a:buNone/>
+            </a:pPr>
+            <a:r>
+              <a:rPr lang="en-US" sz="1200" b="0">
+                <a:solidFill>
+                  <a:srgbClr val="202b33"/>
+                </a:solidFill>
+                <a:latin typeface="Arial"/>
+                <a:ea typeface="Arial"/>
+                <a:cs typeface="Arial"/>
+              </a:rPr>
+              <a:t xml:space="preserve">Generated UI, adapting in real time, per person</a:t>
+            </a:r>
+            <a:endParaRPr lang="en-US" sz="1200"/>
+          </a:p>
+          <a:p>
+            <a:pPr marL="0" indent="0">
+              <a:lnSpc>
+                <a:spcPts val="1560"/>
+              </a:lnSpc>
+              <a:spcAft>
+                <a:spcPts val="0"/>
+              </a:spcAft>
+              <a:buNone/>
+            </a:pPr>
+            <a:r>
+              <a:rPr lang="en-US" sz="1200" b="0">
+                <a:solidFill>
+                  <a:srgbClr val="202b33"/>
+                </a:solidFill>
+                <a:latin typeface="Arial"/>
+                <a:ea typeface="Arial"/>
+                <a:cs typeface="Arial"/>
+              </a:rPr>
+              <a:t xml:space="preserve"/>
+            </a:r>
+            <a:endParaRPr lang="en-US" sz="1200"/>
+          </a:p>
+          <a:p>
+            <a:pPr marL="0" indent="0">
+              <a:lnSpc>
+                <a:spcPts val="1560"/>
+              </a:lnSpc>
+              <a:spcAft>
+                <a:spcPts val="0"/>
+              </a:spcAft>
+              <a:buNone/>
+            </a:pPr>
+            <a:r>
+              <a:rPr lang="en-US" sz="1200" b="0">
+                <a:solidFill>
+                  <a:srgbClr val="202b33"/>
+                </a:solidFill>
+                <a:latin typeface="Arial"/>
+                <a:ea typeface="Arial"/>
+                <a:cs typeface="Arial"/>
+              </a:rPr>
+              <a:t xml:space="preserve">Yes, the software you mastered is going away. As you know it.</a:t>
+            </a:r>
+            <a:endParaRPr lang="en-US" sz="1200"/>
+          </a:p>
+          <a:p>
+            <a:pPr marL="0" indent="0">
+              <a:lnSpc>
+                <a:spcPts val="1560"/>
+              </a:lnSpc>
+              <a:spcAft>
+                <a:spcPts val="0"/>
+              </a:spcAft>
+              <a:buNone/>
+            </a:pPr>
+            <a:r>
+              <a:rPr lang="en-US" sz="1200" b="0">
+                <a:solidFill>
+                  <a:srgbClr val="202b33"/>
+                </a:solidFill>
+                <a:latin typeface="Arial"/>
+                <a:ea typeface="Arial"/>
+                <a:cs typeface="Arial"/>
+              </a:rPr>
+              <a:t xml:space="preserve"/>
+            </a:r>
+            <a:endParaRPr lang="en-US" sz="1200"/>
+          </a:p>
+          <a:p>
+            <a:pPr marL="0" indent="0">
+              <a:lnSpc>
+                <a:spcPts val="1560"/>
+              </a:lnSpc>
+              <a:spcAft>
+                <a:spcPts val="0"/>
+              </a:spcAft>
+              <a:buNone/>
+            </a:pPr>
+            <a:r>
+              <a:rPr lang="en-US" sz="1200" b="0">
+                <a:solidFill>
+                  <a:srgbClr val="202b33"/>
+                </a:solidFill>
+                <a:latin typeface="Arial"/>
+                <a:ea typeface="Arial"/>
+                <a:cs typeface="Arial"/>
+              </a:rPr>
+              <a:t xml:space="preserve">The channel is not spoken for.</a:t>
+            </a:r>
+            <a:endParaRPr lang="en-US" sz="1200"/>
+          </a:p>
+          <a:p>
+            <a:pPr marL="0" indent="0">
+              <a:lnSpc>
+                <a:spcPts val="1560"/>
+              </a:lnSpc>
+              <a:spcAft>
+                <a:spcPts val="0"/>
+              </a:spcAft>
+              <a:buNone/>
+            </a:pPr>
+            <a:r>
+              <a:rPr lang="en-US" sz="1200" b="0">
+                <a:solidFill>
+                  <a:srgbClr val="202b33"/>
+                </a:solidFill>
+                <a:latin typeface="Arial"/>
+                <a:ea typeface="Arial"/>
+                <a:cs typeface="Arial"/>
+              </a:rPr>
+              <a:t xml:space="preserve"/>
+            </a:r>
+            <a:endParaRPr lang="en-US" sz="1200"/>
+          </a:p>
+          <a:p>
+            <a:pPr marL="0" indent="0">
+              <a:lnSpc>
+                <a:spcPts val="1560"/>
+              </a:lnSpc>
+              <a:spcAft>
+                <a:spcPts val="0"/>
+              </a:spcAft>
+              <a:buNone/>
+            </a:pPr>
+            <a:r>
+              <a:rPr lang="en-US" sz="1200" b="0">
+                <a:solidFill>
+                  <a:srgbClr val="202b33"/>
+                </a:solidFill>
+                <a:latin typeface="Arial"/>
+                <a:ea typeface="Arial"/>
+                <a:cs typeface="Arial"/>
+              </a:rPr>
+              <a:t xml:space="preserve">Which raises the question this room should actually be arguing about. Should OpenAI and Anthropic end up owning every software channel? Watch what happens when the assistants ship real-time collaboration: who spends less time in email, Slack and Google Docs then? I can already make and edit images and video in ways that make me less likely to open Photoshop or DaVinci. If I need a jingle for the company, I ask Suno and it is done. So is everything you spent a lifetime learning, mastering and fighting with about to be irrelevant? Yes. At least as you know it.</a:t>
+            </a:r>
+            <a:endParaRPr lang="en-US" sz="1200"/>
+          </a:p>
+          <a:p>
+            <a:pPr marL="0" indent="0">
+              <a:lnSpc>
+                <a:spcPts val="1560"/>
+              </a:lnSpc>
+              <a:spcAft>
+                <a:spcPts val="0"/>
+              </a:spcAft>
+              <a:buNone/>
+            </a:pPr>
+            <a:r>
+              <a:rPr lang="en-US" sz="1200" b="0">
+                <a:solidFill>
+                  <a:srgbClr val="202b33"/>
+                </a:solidFill>
+                <a:latin typeface="Arial"/>
+                <a:ea typeface="Arial"/>
+                <a:cs typeface="Arial"/>
+              </a:rPr>
+              <a:t xml:space="preserve"/>
+            </a:r>
+            <a:endParaRPr lang="en-US" sz="1200"/>
+          </a:p>
+          <a:p>
+            <a:pPr marL="0" indent="0">
+              <a:lnSpc>
+                <a:spcPts val="1560"/>
+              </a:lnSpc>
+              <a:spcAft>
+                <a:spcPts val="0"/>
+              </a:spcAft>
+              <a:buNone/>
+            </a:pPr>
+            <a:r>
+              <a:rPr lang="en-US" sz="1200" b="0">
+                <a:solidFill>
+                  <a:srgbClr val="202b33"/>
+                </a:solidFill>
+                <a:latin typeface="Arial"/>
+                <a:ea typeface="Arial"/>
+                <a:cs typeface="Arial"/>
+              </a:rPr>
+              <a:t xml:space="preserve">What replaces it looks less like a grid of apps and more like Minority Report, with a surprise revival of the terminal. Which is a Matrix ending when you think about it. Thanks, AI. Skynet is not so bad if I get to keep my CLIs.</a:t>
+            </a:r>
+            <a:endParaRPr lang="en-US" sz="1200"/>
+          </a:p>
+          <a:p>
+            <a:pPr marL="0" indent="0">
+              <a:lnSpc>
+                <a:spcPts val="1560"/>
+              </a:lnSpc>
+              <a:spcAft>
+                <a:spcPts val="0"/>
+              </a:spcAft>
+              <a:buNone/>
+            </a:pPr>
+            <a:r>
+              <a:rPr lang="en-US" sz="1200" b="0">
+                <a:solidFill>
+                  <a:srgbClr val="202b33"/>
+                </a:solidFill>
+                <a:latin typeface="Arial"/>
+                <a:ea typeface="Arial"/>
+                <a:cs typeface="Arial"/>
+              </a:rPr>
+              <a:t xml:space="preserve"/>
+            </a:r>
+            <a:endParaRPr lang="en-US" sz="1200"/>
+          </a:p>
+          <a:p>
+            <a:pPr marL="0" indent="0">
+              <a:lnSpc>
+                <a:spcPts val="1560"/>
+              </a:lnSpc>
+              <a:spcAft>
+                <a:spcPts val="0"/>
+              </a:spcAft>
+              <a:buNone/>
+            </a:pPr>
+            <a:r>
+              <a:rPr lang="en-US" sz="1200" b="0">
+                <a:solidFill>
+                  <a:srgbClr val="202b33"/>
+                </a:solidFill>
+                <a:latin typeface="Arial"/>
+                <a:ea typeface="Arial"/>
+                <a:cs typeface="Arial"/>
+              </a:rPr>
+              <a:t xml:space="preserve">Here is the part I want you to leave with. That future is not spoken for. GPT image being pretty good does not mean the story of image creation belongs to the big players, and the same is true in whichever industry you work in. Those of us who do not work at a frontier lab, the organic agents in the room, get to rethink any and every app as an AI-native system from the boundary up. That is this whole talk one level higher: do not photocopy today's product categories onto tomorrow's substrate either.</a:t>
+            </a:r>
+            <a:endParaRPr lang="en-US" sz="1200"/>
+          </a:p>
+          <a:p>
+            <a:pPr marL="0" indent="0">
+              <a:lnSpc>
+                <a:spcPts val="1560"/>
+              </a:lnSpc>
+              <a:spcAft>
+                <a:spcPts val="0"/>
+              </a:spcAft>
+              <a:buNone/>
+            </a:pPr>
+            <a:r>
+              <a:rPr lang="en-US" sz="1200" b="0">
+                <a:solidFill>
+                  <a:srgbClr val="202b33"/>
+                </a:solidFill>
+                <a:latin typeface="Arial"/>
+                <a:ea typeface="Arial"/>
+                <a:cs typeface="Arial"/>
+              </a:rPr>
+              <a:t xml:space="preserve"/>
+            </a:r>
+            <a:endParaRPr lang="en-US" sz="1200"/>
+          </a:p>
+          <a:p>
+            <a:pPr marL="0" indent="0">
+              <a:lnSpc>
+                <a:spcPts val="1560"/>
+              </a:lnSpc>
+              <a:spcAft>
+                <a:spcPts val="0"/>
+              </a:spcAft>
+              <a:buNone/>
+            </a:pPr>
+            <a:r>
+              <a:rPr lang="en-US" sz="1200" b="0">
+                <a:solidFill>
+                  <a:srgbClr val="202b33"/>
+                </a:solidFill>
+                <a:latin typeface="Arial"/>
+                <a:ea typeface="Arial"/>
+                <a:cs typeface="Arial"/>
+              </a:rPr>
+              <a:t xml:space="preserve"/>
+            </a:r>
+            <a:endParaRPr lang="en-US" sz="1200"/>
+          </a:p>
+          <a:p>
+            <a:pPr marL="0" indent="0">
+              <a:lnSpc>
+                <a:spcPts val="1560"/>
+              </a:lnSpc>
+              <a:spcAft>
+                <a:spcPts val="0"/>
+              </a:spcAft>
+              <a:buNone/>
+            </a:pPr>
+            <a:r>
+              <a:rPr lang="en-US" sz="1200" b="0">
+                <a:solidFill>
+                  <a:srgbClr val="202b33"/>
+                </a:solidFill>
+                <a:latin typeface="Arial"/>
+                <a:ea typeface="Arial"/>
+                <a:cs typeface="Arial"/>
+              </a:rPr>
+              <a:t xml:space="preserve"/>
+            </a:r>
+            <a:endParaRPr lang="en-US" sz="1200"/>
+          </a:p>
+          <a:p>
+            <a:pPr marL="0" indent="0">
+              <a:lnSpc>
+                <a:spcPts val="1560"/>
+              </a:lnSpc>
+              <a:spcAft>
+                <a:spcPts val="0"/>
+              </a:spcAft>
+              <a:buNone/>
+            </a:pPr>
+            <a:r>
+              <a:rPr lang="en-US" sz="1200" b="0">
+                <a:solidFill>
+                  <a:srgbClr val="202b33"/>
+                </a:solidFill>
+                <a:latin typeface="Arial"/>
+                <a:ea typeface="Arial"/>
+                <a:cs typeface="Arial"/>
+              </a:rPr>
+              <a:t xml:space="preserve">Ask which product they use daily that would not survive somebody else rebuilding it AI-native. Take one answer. Do not resolve it.</a:t>
+            </a:r>
+            <a:endParaRPr lang="en-US" sz="1200"/>
+          </a:p>
+          <a:p>
+            <a:pPr marL="0" indent="0">
+              <a:lnSpc>
+                <a:spcPts val="1560"/>
+              </a:lnSpc>
+              <a:spcAft>
+                <a:spcPts val="0"/>
+              </a:spcAft>
+              <a:buNone/>
+            </a:pPr>
+            <a:r>
+              <a:rPr lang="en-US" sz="1200" b="0">
+                <a:solidFill>
+                  <a:srgbClr val="202b33"/>
+                </a:solidFill>
+                <a:latin typeface="Arial"/>
+                <a:ea typeface="Arial"/>
+                <a:cs typeface="Arial"/>
+              </a:rPr>
+              <a:t xml:space="preserve"/>
+            </a:r>
+            <a:endParaRPr lang="en-US" sz="1200"/>
+          </a:p>
+          <a:p>
+            <a:pPr marL="0" indent="0">
+              <a:lnSpc>
+                <a:spcPts val="1560"/>
+              </a:lnSpc>
+              <a:spcAft>
+                <a:spcPts val="0"/>
+              </a:spcAft>
+              <a:buNone/>
+            </a:pPr>
+            <a:r>
+              <a:rPr lang="en-US" sz="1200" b="0">
+                <a:solidFill>
+                  <a:srgbClr val="202b33"/>
+                </a:solidFill>
+                <a:latin typeface="Arial"/>
+                <a:ea typeface="Arial"/>
+                <a:cs typeface="Arial"/>
+              </a:rPr>
+              <a:t xml:space="preserve">Bridge: every experiment still reports its hypothesis, its exposure count and its owner.</a:t>
             </a:r>
             <a:endParaRPr lang="en-US" sz="1200"/>
           </a:p>
@@ -3903,145 +4637,467 @@
                 <a:ea typeface="Arial"/>
                 <a:cs typeface="Arial"/>
               </a:rPr>
-              <a:t xml:space="preserve">Melvin E. Conway (1968), [How Do Committees Invent?](https://melconway.com/Home/pdf/committees.pdf), Datamation, April, 28–31.</a:t>
-            </a:r>
-            <a:endParaRPr lang="en-US" sz="1200"/>
-          </a:p>
-          <a:p>
-            <a:pPr marL="0" indent="0">
-              <a:lnSpc>
-                <a:spcPts val="1560"/>
-              </a:lnSpc>
-              <a:spcAft>
-                <a:spcPts val="0"/>
-              </a:spcAft>
-              <a:buNone/>
-            </a:pPr>
-            <a:r>
-              <a:rPr lang="en-US" sz="1200" b="0">
-                <a:solidFill>
-                  <a:srgbClr val="202b33"/>
-                </a:solidFill>
-                <a:latin typeface="Arial"/>
-                <a:ea typeface="Arial"/>
-                <a:cs typeface="Arial"/>
-              </a:rPr>
-              <a:t xml:space="preserve"/>
-            </a:r>
-            <a:endParaRPr lang="en-US" sz="1200"/>
-          </a:p>
-          <a:p>
-            <a:pPr marL="0" indent="0">
-              <a:lnSpc>
-                <a:spcPts val="1560"/>
-              </a:lnSpc>
-              <a:spcAft>
-                <a:spcPts val="0"/>
-              </a:spcAft>
-              <a:buNone/>
-            </a:pPr>
-            <a:r>
-              <a:rPr lang="en-US" sz="1200" b="0">
-                <a:solidFill>
-                  <a:srgbClr val="202b33"/>
-                </a:solidFill>
-                <a:latin typeface="Arial"/>
-                <a:ea typeface="Arial"/>
-                <a:cs typeface="Arial"/>
-              </a:rPr>
-              <a:t xml:space="preserve">Ronald H. Coase (1937), [The Nature of the Firm](https://onlinelibrary.wiley.com/doi/10.1111/j.1468-0335.1937.tb00002.x), Economica 4(16), 386–405. The agent-design application is the speaker’s argument.</a:t>
-            </a:r>
-            <a:endParaRPr lang="en-US" sz="1200"/>
-          </a:p>
-          <a:p>
-            <a:pPr marL="0" indent="0">
-              <a:lnSpc>
-                <a:spcPts val="1560"/>
-              </a:lnSpc>
-              <a:spcAft>
-                <a:spcPts val="0"/>
-              </a:spcAft>
-              <a:buNone/>
-            </a:pPr>
-            <a:r>
-              <a:rPr lang="en-US" sz="1200" b="0">
-                <a:solidFill>
-                  <a:srgbClr val="202b33"/>
-                </a:solidFill>
-                <a:latin typeface="Arial"/>
-                <a:ea typeface="Arial"/>
-                <a:cs typeface="Arial"/>
-              </a:rPr>
-              <a:t xml:space="preserve"/>
-            </a:r>
-            <a:endParaRPr lang="en-US" sz="1200"/>
-          </a:p>
-          <a:p>
-            <a:pPr marL="0" indent="0">
-              <a:lnSpc>
-                <a:spcPts val="1560"/>
-              </a:lnSpc>
-              <a:spcAft>
-                <a:spcPts val="0"/>
-              </a:spcAft>
-              <a:buNone/>
-            </a:pPr>
-            <a:r>
-              <a:rPr lang="en-US" sz="1200" b="0">
-                <a:solidFill>
-                  <a:srgbClr val="202b33"/>
-                </a:solidFill>
-                <a:latin typeface="Arial"/>
-                <a:ea typeface="Arial"/>
-                <a:cs typeface="Arial"/>
-              </a:rPr>
-              <a:t xml:space="preserve">[Thoughtworks, Inverse Conway Maneuver](https://www.thoughtworks.com/en-br/radar/techniques/inverse-conway-maneuver), 2014/2015. Skelton and Pais, [Team Topologies interaction modes](https://teamtopologies.com/key-concepts).</a:t>
-            </a:r>
-            <a:endParaRPr lang="en-US" sz="1200"/>
-          </a:p>
-          <a:p>
-            <a:pPr marL="0" indent="0">
-              <a:lnSpc>
-                <a:spcPts val="1560"/>
-              </a:lnSpc>
-              <a:spcAft>
-                <a:spcPts val="0"/>
-              </a:spcAft>
-              <a:buNone/>
-            </a:pPr>
-            <a:r>
-              <a:rPr lang="en-US" sz="1200" b="0">
-                <a:solidFill>
-                  <a:srgbClr val="202b33"/>
-                </a:solidFill>
-                <a:latin typeface="Arial"/>
-                <a:ea typeface="Arial"/>
-                <a:cs typeface="Arial"/>
-              </a:rPr>
-              <a:t xml:space="preserve"/>
-            </a:r>
-            <a:endParaRPr lang="en-US" sz="1200"/>
-          </a:p>
-          <a:p>
-            <a:pPr marL="0" indent="0">
-              <a:lnSpc>
-                <a:spcPts val="1560"/>
-              </a:lnSpc>
-              <a:spcAft>
-                <a:spcPts val="0"/>
-              </a:spcAft>
-              <a:buNone/>
-            </a:pPr>
-            <a:r>
-              <a:rPr lang="en-US" sz="1200" b="0">
-                <a:solidFill>
-                  <a:srgbClr val="202b33"/>
-                </a:solidFill>
-                <a:latin typeface="Arial"/>
-                <a:ea typeface="Arial"/>
-                <a:cs typeface="Arial"/>
-              </a:rPr>
-              <a:t xml:space="preserve">Donald T. Campbell (1979), [Assessing the impact of planned social change](https://doi.org/10.1016/0149-7189%2879%2990048-X), Evaluation and Program Planning 2(1), 67–90.</a:t>
+              <a:t xml:space="preserve">The Future of Product Engineering: Break the Mirror on Purpose</a:t>
+            </a:r>
+            <a:endParaRPr lang="en-US" sz="1200"/>
+          </a:p>
+          <a:p>
+            <a:pPr marL="0" indent="0">
+              <a:lnSpc>
+                <a:spcPts val="1560"/>
+              </a:lnSpc>
+              <a:spcAft>
+                <a:spcPts val="0"/>
+              </a:spcAft>
+              <a:buNone/>
+            </a:pPr>
+            <a:r>
+              <a:rPr lang="en-US" sz="1200" b="0">
+                <a:solidFill>
+                  <a:srgbClr val="202b33"/>
+                </a:solidFill>
+                <a:latin typeface="Arial"/>
+                <a:ea typeface="Arial"/>
+                <a:cs typeface="Arial"/>
+              </a:rPr>
+              <a:t xml:space="preserve"/>
+            </a:r>
+            <a:endParaRPr lang="en-US" sz="1200"/>
+          </a:p>
+          <a:p>
+            <a:pPr marL="0" indent="0">
+              <a:lnSpc>
+                <a:spcPts val="1560"/>
+              </a:lnSpc>
+              <a:spcAft>
+                <a:spcPts val="0"/>
+              </a:spcAft>
+              <a:buNone/>
+            </a:pPr>
+            <a:r>
+              <a:rPr lang="en-US" sz="1200" b="0">
+                <a:solidFill>
+                  <a:srgbClr val="202b33"/>
+                </a:solidFill>
+                <a:latin typeface="Arial"/>
+                <a:ea typeface="Arial"/>
+                <a:cs typeface="Arial"/>
+              </a:rPr>
+              <a:t xml:space="preserve">Source slide 15. 11:30 to 13:30</a:t>
+            </a:r>
+            <a:endParaRPr lang="en-US" sz="1200"/>
+          </a:p>
+          <a:p>
+            <a:pPr marL="0" indent="0">
+              <a:lnSpc>
+                <a:spcPts val="1560"/>
+              </a:lnSpc>
+              <a:spcAft>
+                <a:spcPts val="0"/>
+              </a:spcAft>
+              <a:buNone/>
+            </a:pPr>
+            <a:r>
+              <a:rPr lang="en-US" sz="1200" b="0">
+                <a:solidFill>
+                  <a:srgbClr val="202b33"/>
+                </a:solidFill>
+                <a:latin typeface="Arial"/>
+                <a:ea typeface="Arial"/>
+                <a:cs typeface="Arial"/>
+              </a:rPr>
+              <a:t xml:space="preserve"/>
+            </a:r>
+            <a:endParaRPr lang="en-US" sz="1200"/>
+          </a:p>
+          <a:p>
+            <a:pPr marL="0" indent="0">
+              <a:lnSpc>
+                <a:spcPts val="1560"/>
+              </a:lnSpc>
+              <a:spcAft>
+                <a:spcPts val="0"/>
+              </a:spcAft>
+              <a:buNone/>
+            </a:pPr>
+            <a:r>
+              <a:rPr lang="en-US" sz="1200" b="0">
+                <a:solidFill>
+                  <a:srgbClr val="202b33"/>
+                </a:solidFill>
+                <a:latin typeface="Arial"/>
+                <a:ea typeface="Arial"/>
+                <a:cs typeface="Arial"/>
+              </a:rPr>
+              <a:t xml:space="preserve">Generated UI, adapting in real time, per person</a:t>
+            </a:r>
+            <a:endParaRPr lang="en-US" sz="1200"/>
+          </a:p>
+          <a:p>
+            <a:pPr marL="0" indent="0">
+              <a:lnSpc>
+                <a:spcPts val="1560"/>
+              </a:lnSpc>
+              <a:spcAft>
+                <a:spcPts val="0"/>
+              </a:spcAft>
+              <a:buNone/>
+            </a:pPr>
+            <a:r>
+              <a:rPr lang="en-US" sz="1200" b="0">
+                <a:solidFill>
+                  <a:srgbClr val="202b33"/>
+                </a:solidFill>
+                <a:latin typeface="Arial"/>
+                <a:ea typeface="Arial"/>
+                <a:cs typeface="Arial"/>
+              </a:rPr>
+              <a:t xml:space="preserve"/>
+            </a:r>
+            <a:endParaRPr lang="en-US" sz="1200"/>
+          </a:p>
+          <a:p>
+            <a:pPr marL="0" indent="0">
+              <a:lnSpc>
+                <a:spcPts val="1560"/>
+              </a:lnSpc>
+              <a:spcAft>
+                <a:spcPts val="0"/>
+              </a:spcAft>
+              <a:buNone/>
+            </a:pPr>
+            <a:r>
+              <a:rPr lang="en-US" sz="1200" b="0">
+                <a:solidFill>
+                  <a:srgbClr val="202b33"/>
+                </a:solidFill>
+                <a:latin typeface="Arial"/>
+                <a:ea typeface="Arial"/>
+                <a:cs typeface="Arial"/>
+              </a:rPr>
+              <a:t xml:space="preserve">Yes, the software you mastered is going away. As you know it.</a:t>
+            </a:r>
+            <a:endParaRPr lang="en-US" sz="1200"/>
+          </a:p>
+          <a:p>
+            <a:pPr marL="0" indent="0">
+              <a:lnSpc>
+                <a:spcPts val="1560"/>
+              </a:lnSpc>
+              <a:spcAft>
+                <a:spcPts val="0"/>
+              </a:spcAft>
+              <a:buNone/>
+            </a:pPr>
+            <a:r>
+              <a:rPr lang="en-US" sz="1200" b="0">
+                <a:solidFill>
+                  <a:srgbClr val="202b33"/>
+                </a:solidFill>
+                <a:latin typeface="Arial"/>
+                <a:ea typeface="Arial"/>
+                <a:cs typeface="Arial"/>
+              </a:rPr>
+              <a:t xml:space="preserve"/>
+            </a:r>
+            <a:endParaRPr lang="en-US" sz="1200"/>
+          </a:p>
+          <a:p>
+            <a:pPr marL="0" indent="0">
+              <a:lnSpc>
+                <a:spcPts val="1560"/>
+              </a:lnSpc>
+              <a:spcAft>
+                <a:spcPts val="0"/>
+              </a:spcAft>
+              <a:buNone/>
+            </a:pPr>
+            <a:r>
+              <a:rPr lang="en-US" sz="1200" b="0">
+                <a:solidFill>
+                  <a:srgbClr val="202b33"/>
+                </a:solidFill>
+                <a:latin typeface="Arial"/>
+                <a:ea typeface="Arial"/>
+                <a:cs typeface="Arial"/>
+              </a:rPr>
+              <a:t xml:space="preserve">The channel is not spoken for.</a:t>
+            </a:r>
+            <a:endParaRPr lang="en-US" sz="1200"/>
+          </a:p>
+          <a:p>
+            <a:pPr marL="0" indent="0">
+              <a:lnSpc>
+                <a:spcPts val="1560"/>
+              </a:lnSpc>
+              <a:spcAft>
+                <a:spcPts val="0"/>
+              </a:spcAft>
+              <a:buNone/>
+            </a:pPr>
+            <a:r>
+              <a:rPr lang="en-US" sz="1200" b="0">
+                <a:solidFill>
+                  <a:srgbClr val="202b33"/>
+                </a:solidFill>
+                <a:latin typeface="Arial"/>
+                <a:ea typeface="Arial"/>
+                <a:cs typeface="Arial"/>
+              </a:rPr>
+              <a:t xml:space="preserve"/>
+            </a:r>
+            <a:endParaRPr lang="en-US" sz="1200"/>
+          </a:p>
+          <a:p>
+            <a:pPr marL="0" indent="0">
+              <a:lnSpc>
+                <a:spcPts val="1560"/>
+              </a:lnSpc>
+              <a:spcAft>
+                <a:spcPts val="0"/>
+              </a:spcAft>
+              <a:buNone/>
+            </a:pPr>
+            <a:r>
+              <a:rPr lang="en-US" sz="1200" b="0">
+                <a:solidFill>
+                  <a:srgbClr val="202b33"/>
+                </a:solidFill>
+                <a:latin typeface="Arial"/>
+                <a:ea typeface="Arial"/>
+                <a:cs typeface="Arial"/>
+              </a:rPr>
+              <a:t xml:space="preserve">Which raises the question this room should actually be arguing about. Should OpenAI and Anthropic end up owning every software channel? Watch what happens when the assistants ship real-time collaboration: who spends less time in email, Slack and Google Docs then? I can already make and edit images and video in ways that make me less likely to open Photoshop or DaVinci. If I need a jingle for the company, I ask Suno and it is done. So is everything you spent a lifetime learning, mastering and fighting with about to be irrelevant? Yes. At least as you know it.</a:t>
+            </a:r>
+            <a:endParaRPr lang="en-US" sz="1200"/>
+          </a:p>
+          <a:p>
+            <a:pPr marL="0" indent="0">
+              <a:lnSpc>
+                <a:spcPts val="1560"/>
+              </a:lnSpc>
+              <a:spcAft>
+                <a:spcPts val="0"/>
+              </a:spcAft>
+              <a:buNone/>
+            </a:pPr>
+            <a:r>
+              <a:rPr lang="en-US" sz="1200" b="0">
+                <a:solidFill>
+                  <a:srgbClr val="202b33"/>
+                </a:solidFill>
+                <a:latin typeface="Arial"/>
+                <a:ea typeface="Arial"/>
+                <a:cs typeface="Arial"/>
+              </a:rPr>
+              <a:t xml:space="preserve"/>
+            </a:r>
+            <a:endParaRPr lang="en-US" sz="1200"/>
+          </a:p>
+          <a:p>
+            <a:pPr marL="0" indent="0">
+              <a:lnSpc>
+                <a:spcPts val="1560"/>
+              </a:lnSpc>
+              <a:spcAft>
+                <a:spcPts val="0"/>
+              </a:spcAft>
+              <a:buNone/>
+            </a:pPr>
+            <a:r>
+              <a:rPr lang="en-US" sz="1200" b="0">
+                <a:solidFill>
+                  <a:srgbClr val="202b33"/>
+                </a:solidFill>
+                <a:latin typeface="Arial"/>
+                <a:ea typeface="Arial"/>
+                <a:cs typeface="Arial"/>
+              </a:rPr>
+              <a:t xml:space="preserve">What replaces it looks less like a grid of apps and more like Minority Report, with a surprise revival of the terminal. Which is a Matrix ending when you think about it. Thanks, AI. Skynet is not so bad if I get to keep my CLIs.</a:t>
+            </a:r>
+            <a:endParaRPr lang="en-US" sz="1200"/>
+          </a:p>
+          <a:p>
+            <a:pPr marL="0" indent="0">
+              <a:lnSpc>
+                <a:spcPts val="1560"/>
+              </a:lnSpc>
+              <a:spcAft>
+                <a:spcPts val="0"/>
+              </a:spcAft>
+              <a:buNone/>
+            </a:pPr>
+            <a:r>
+              <a:rPr lang="en-US" sz="1200" b="0">
+                <a:solidFill>
+                  <a:srgbClr val="202b33"/>
+                </a:solidFill>
+                <a:latin typeface="Arial"/>
+                <a:ea typeface="Arial"/>
+                <a:cs typeface="Arial"/>
+              </a:rPr>
+              <a:t xml:space="preserve"/>
+            </a:r>
+            <a:endParaRPr lang="en-US" sz="1200"/>
+          </a:p>
+          <a:p>
+            <a:pPr marL="0" indent="0">
+              <a:lnSpc>
+                <a:spcPts val="1560"/>
+              </a:lnSpc>
+              <a:spcAft>
+                <a:spcPts val="0"/>
+              </a:spcAft>
+              <a:buNone/>
+            </a:pPr>
+            <a:r>
+              <a:rPr lang="en-US" sz="1200" b="0">
+                <a:solidFill>
+                  <a:srgbClr val="202b33"/>
+                </a:solidFill>
+                <a:latin typeface="Arial"/>
+                <a:ea typeface="Arial"/>
+                <a:cs typeface="Arial"/>
+              </a:rPr>
+              <a:t xml:space="preserve">Here is the part I want you to leave with. That future is not spoken for. GPT image being pretty good does not mean the story of image creation belongs to the big players, and the same is true in whichever industry you work in. Those of us who do not work at a frontier lab, the organic agents in the room, get to rethink any and every app as an AI-native system from the boundary up. That is this whole talk one level higher: do not photocopy today's product categories onto tomorrow's substrate either.</a:t>
+            </a:r>
+            <a:endParaRPr lang="en-US" sz="1200"/>
+          </a:p>
+          <a:p>
+            <a:pPr marL="0" indent="0">
+              <a:lnSpc>
+                <a:spcPts val="1560"/>
+              </a:lnSpc>
+              <a:spcAft>
+                <a:spcPts val="0"/>
+              </a:spcAft>
+              <a:buNone/>
+            </a:pPr>
+            <a:r>
+              <a:rPr lang="en-US" sz="1200" b="0">
+                <a:solidFill>
+                  <a:srgbClr val="202b33"/>
+                </a:solidFill>
+                <a:latin typeface="Arial"/>
+                <a:ea typeface="Arial"/>
+                <a:cs typeface="Arial"/>
+              </a:rPr>
+              <a:t xml:space="preserve"/>
+            </a:r>
+            <a:endParaRPr lang="en-US" sz="1200"/>
+          </a:p>
+          <a:p>
+            <a:pPr marL="0" indent="0">
+              <a:lnSpc>
+                <a:spcPts val="1560"/>
+              </a:lnSpc>
+              <a:spcAft>
+                <a:spcPts val="0"/>
+              </a:spcAft>
+              <a:buNone/>
+            </a:pPr>
+            <a:r>
+              <a:rPr lang="en-US" sz="1200" b="0">
+                <a:solidFill>
+                  <a:srgbClr val="202b33"/>
+                </a:solidFill>
+                <a:latin typeface="Arial"/>
+                <a:ea typeface="Arial"/>
+                <a:cs typeface="Arial"/>
+              </a:rPr>
+              <a:t xml:space="preserve"/>
+            </a:r>
+            <a:endParaRPr lang="en-US" sz="1200"/>
+          </a:p>
+          <a:p>
+            <a:pPr marL="0" indent="0">
+              <a:lnSpc>
+                <a:spcPts val="1560"/>
+              </a:lnSpc>
+              <a:spcAft>
+                <a:spcPts val="0"/>
+              </a:spcAft>
+              <a:buNone/>
+            </a:pPr>
+            <a:r>
+              <a:rPr lang="en-US" sz="1200" b="0">
+                <a:solidFill>
+                  <a:srgbClr val="202b33"/>
+                </a:solidFill>
+                <a:latin typeface="Arial"/>
+                <a:ea typeface="Arial"/>
+                <a:cs typeface="Arial"/>
+              </a:rPr>
+              <a:t xml:space="preserve"/>
+            </a:r>
+            <a:endParaRPr lang="en-US" sz="1200"/>
+          </a:p>
+          <a:p>
+            <a:pPr marL="0" indent="0">
+              <a:lnSpc>
+                <a:spcPts val="1560"/>
+              </a:lnSpc>
+              <a:spcAft>
+                <a:spcPts val="0"/>
+              </a:spcAft>
+              <a:buNone/>
+            </a:pPr>
+            <a:r>
+              <a:rPr lang="en-US" sz="1200" b="0">
+                <a:solidFill>
+                  <a:srgbClr val="202b33"/>
+                </a:solidFill>
+                <a:latin typeface="Arial"/>
+                <a:ea typeface="Arial"/>
+                <a:cs typeface="Arial"/>
+              </a:rPr>
+              <a:t xml:space="preserve">Ask which product they use daily that would not survive somebody else rebuilding it AI-native. Take one answer. Do not resolve it.</a:t>
+            </a:r>
+            <a:endParaRPr lang="en-US" sz="1200"/>
+          </a:p>
+          <a:p>
+            <a:pPr marL="0" indent="0">
+              <a:lnSpc>
+                <a:spcPts val="1560"/>
+              </a:lnSpc>
+              <a:spcAft>
+                <a:spcPts val="0"/>
+              </a:spcAft>
+              <a:buNone/>
+            </a:pPr>
+            <a:r>
+              <a:rPr lang="en-US" sz="1200" b="0">
+                <a:solidFill>
+                  <a:srgbClr val="202b33"/>
+                </a:solidFill>
+                <a:latin typeface="Arial"/>
+                <a:ea typeface="Arial"/>
+                <a:cs typeface="Arial"/>
+              </a:rPr>
+              <a:t xml:space="preserve"/>
+            </a:r>
+            <a:endParaRPr lang="en-US" sz="1200"/>
+          </a:p>
+          <a:p>
+            <a:pPr marL="0" indent="0">
+              <a:lnSpc>
+                <a:spcPts val="1560"/>
+              </a:lnSpc>
+              <a:spcAft>
+                <a:spcPts val="0"/>
+              </a:spcAft>
+              <a:buNone/>
+            </a:pPr>
+            <a:r>
+              <a:rPr lang="en-US" sz="1200" b="0">
+                <a:solidFill>
+                  <a:srgbClr val="202b33"/>
+                </a:solidFill>
+                <a:latin typeface="Arial"/>
+                <a:ea typeface="Arial"/>
+                <a:cs typeface="Arial"/>
+              </a:rPr>
+              <a:t xml:space="preserve">Bridge: every experiment still reports its hypothesis, its exposure count and its owner.</a:t>
             </a:r>
             <a:endParaRPr lang="en-US" sz="1200"/>
           </a:p>
@@ -4349,7 +5405,7 @@
                 <a:ea typeface="Arial"/>
                 <a:cs typeface="Arial"/>
               </a:rPr>
-              <a:t xml:space="preserve">7 source sections</a:t>
+              <a:t xml:space="preserve">8 source sections</a:t>
             </a:r>
             <a:endParaRPr lang="en-US" sz="1575"/>
           </a:p>
@@ -4471,6 +5527,1833 @@
                 <a:cs typeface="Arial"/>
               </a:rPr>
               <a:t xml:space="preserve">1</a:t>
+            </a:r>
+            <a:endParaRPr lang="en-US" sz="975"/>
+          </a:p>
+        </p:txBody>
+      </p:sp>
+    </p:spTree>
+  </p:cSld>
+  <p:clrMapOvr>
+    <a:masterClrMapping/>
+  </p:clrMapOvr>
+</p:sld>
+</file>
+
+<file path=ppt/slides/slide10.xml><?xml version="1.0" encoding="utf-8"?>
+<p:sld xmlns:a="http://schemas.openxmlformats.org/drawingml/2006/main" xmlns:r="http://schemas.openxmlformats.org/officeDocument/2006/relationships" xmlns:p="http://schemas.openxmlformats.org/presentationml/2006/main">
+  <p:cSld name="Slide 10">
+    <p:bg>
+      <p:bgPr>
+        <a:solidFill>
+          <a:srgbClr val="FAFAF7"/>
+        </a:solidFill>
+        <a:effectLst/>
+      </p:bgPr>
+    </p:bg>
+    <p:spTree>
+      <p:nvGrpSpPr>
+        <p:cNvPr id="1" name=""/>
+        <p:cNvGrpSpPr/>
+        <p:nvPr/>
+      </p:nvGrpSpPr>
+      <p:grpSpPr>
+        <a:xfrm>
+          <a:off x="0" y="0"/>
+          <a:ext cx="0" cy="0"/>
+          <a:chOff x="0" y="0"/>
+          <a:chExt cx="0" cy="0"/>
+        </a:xfrm>
+      </p:grpSpPr>
+      <p:sp>
+        <p:nvSpPr>
+          <p:cNvPr id="2" name="Text 2"/>
+          <p:cNvSpPr txBox="1"/>
+          <p:nvPr/>
+        </p:nvSpPr>
+        <p:spPr>
+          <a:xfrm>
+            <a:off x="457200" y="266700"/>
+            <a:ext cx="9144000" cy="228600"/>
+          </a:xfrm>
+          <a:prstGeom prst="rect">
+            <a:avLst/>
+          </a:prstGeom>
+          <a:noFill/>
+          <a:ln>
+            <a:noFill/>
+          </a:ln>
+        </p:spPr>
+        <p:txBody>
+          <a:bodyPr wrap="none" lIns="0" tIns="0" rIns="0" bIns="0" anchor="t">
+            <a:noAutofit/>
+          </a:bodyPr>
+          <a:lstStyle/>
+          <a:p>
+            <a:pPr marL="0" indent="0">
+              <a:lnSpc>
+                <a:spcPts val="1365"/>
+              </a:lnSpc>
+              <a:spcAft>
+                <a:spcPts val="0"/>
+              </a:spcAft>
+              <a:buNone/>
+            </a:pPr>
+            <a:r>
+              <a:rPr lang="en-US" sz="1050" b="1">
+                <a:solidFill>
+                  <a:srgbClr val="246957"/>
+                </a:solidFill>
+                <a:latin typeface="Arial"/>
+                <a:ea typeface="Arial"/>
+                <a:cs typeface="Arial"/>
+              </a:rPr>
+              <a:t xml:space="preserve">08 / 08    SOURCE SLIDE 17</a:t>
+            </a:r>
+            <a:endParaRPr lang="en-US" sz="1050"/>
+          </a:p>
+        </p:txBody>
+      </p:sp>
+      <p:sp>
+        <p:nvSpPr>
+          <p:cNvPr id="3" name="Text 3"/>
+          <p:cNvSpPr txBox="1"/>
+          <p:nvPr/>
+        </p:nvSpPr>
+        <p:spPr>
+          <a:xfrm>
+            <a:off x="457200" y="657225"/>
+            <a:ext cx="9144000" cy="1104900"/>
+          </a:xfrm>
+          <a:prstGeom prst="rect">
+            <a:avLst/>
+          </a:prstGeom>
+          <a:noFill/>
+          <a:ln>
+            <a:noFill/>
+          </a:ln>
+        </p:spPr>
+        <p:txBody>
+          <a:bodyPr wrap="none" lIns="0" tIns="0" rIns="0" bIns="0" anchor="t">
+            <a:noAutofit/>
+          </a:bodyPr>
+          <a:lstStyle/>
+          <a:p>
+            <a:pPr marL="0" indent="0">
+              <a:lnSpc>
+                <a:spcPts val="3060"/>
+              </a:lnSpc>
+              <a:spcAft>
+                <a:spcPts val="0"/>
+              </a:spcAft>
+              <a:buNone/>
+            </a:pPr>
+            <a:r>
+              <a:rPr lang="en-US" sz="2550" b="1">
+                <a:solidFill>
+                  <a:srgbClr val="202B33"/>
+                </a:solidFill>
+                <a:latin typeface="Arial"/>
+                <a:ea typeface="Arial"/>
+                <a:cs typeface="Arial"/>
+              </a:rPr>
+              <a:t xml:space="preserve">Break the mirror on purpose</a:t>
+            </a:r>
+            <a:endParaRPr lang="en-US" sz="2550"/>
+          </a:p>
+        </p:txBody>
+      </p:sp>
+      <p:sp>
+        <p:nvSpPr>
+          <p:cNvPr id="4" name="Text 4"/>
+          <p:cNvSpPr txBox="1"/>
+          <p:nvPr/>
+        </p:nvSpPr>
+        <p:spPr>
+          <a:xfrm>
+            <a:off x="457200" y="1971675"/>
+            <a:ext cx="4352925" cy="5314950"/>
+          </a:xfrm>
+          <a:prstGeom prst="rect">
+            <a:avLst/>
+          </a:prstGeom>
+          <a:noFill/>
+          <a:ln>
+            <a:noFill/>
+          </a:ln>
+        </p:spPr>
+        <p:txBody>
+          <a:bodyPr wrap="none" lIns="0" tIns="0" rIns="0" bIns="0" anchor="t">
+            <a:noAutofit/>
+          </a:bodyPr>
+          <a:lstStyle/>
+          <a:p>
+            <a:pPr marL="0" indent="0">
+              <a:lnSpc>
+                <a:spcPts val="1950"/>
+              </a:lnSpc>
+              <a:spcAft>
+                <a:spcPts val="0"/>
+              </a:spcAft>
+              <a:buNone/>
+            </a:pPr>
+            <a:r>
+              <a:rPr lang="en-US" sz="1500" b="0">
+                <a:solidFill>
+                  <a:srgbClr val="202B33"/>
+                </a:solidFill>
+                <a:latin typeface="Arial"/>
+                <a:ea typeface="Arial"/>
+                <a:cs typeface="Arial"/>
+              </a:rPr>
+              <a:t xml:space="preserve">Reprice the handoffs. Draw the interfaces.</a:t>
+            </a:r>
+            <a:endParaRPr lang="en-US" sz="1500"/>
+          </a:p>
+          <a:p>
+            <a:pPr marL="0" indent="0">
+              <a:lnSpc>
+                <a:spcPts val="1950"/>
+              </a:lnSpc>
+              <a:spcAft>
+                <a:spcPts val="0"/>
+              </a:spcAft>
+              <a:buNone/>
+            </a:pPr>
+            <a:r>
+              <a:rPr lang="en-US" sz="1500" b="0">
+                <a:solidFill>
+                  <a:srgbClr val="202B33"/>
+                </a:solidFill>
+                <a:latin typeface="Arial"/>
+                <a:ea typeface="Arial"/>
+                <a:cs typeface="Arial"/>
+              </a:rPr>
+              <a:t xml:space="preserve"/>
+            </a:r>
+            <a:endParaRPr lang="en-US" sz="1500"/>
+          </a:p>
+          <a:p>
+            <a:pPr marL="0" indent="0">
+              <a:lnSpc>
+                <a:spcPts val="1950"/>
+              </a:lnSpc>
+              <a:spcAft>
+                <a:spcPts val="0"/>
+              </a:spcAft>
+              <a:buNone/>
+            </a:pPr>
+            <a:r>
+              <a:rPr lang="en-US" sz="1500" b="0">
+                <a:solidFill>
+                  <a:srgbClr val="202B33"/>
+                </a:solidFill>
+                <a:latin typeface="Arial"/>
+                <a:ea typeface="Arial"/>
+                <a:cs typeface="Arial"/>
+              </a:rPr>
+              <a:t xml:space="preserve">Automate the right things. Keep the taste.</a:t>
+            </a:r>
+            <a:endParaRPr lang="en-US" sz="1500"/>
+          </a:p>
+          <a:p>
+            <a:pPr marL="0" indent="0">
+              <a:lnSpc>
+                <a:spcPts val="1950"/>
+              </a:lnSpc>
+              <a:spcAft>
+                <a:spcPts val="0"/>
+              </a:spcAft>
+              <a:buNone/>
+            </a:pPr>
+            <a:r>
+              <a:rPr lang="en-US" sz="1500" b="0">
+                <a:solidFill>
+                  <a:srgbClr val="202B33"/>
+                </a:solidFill>
+                <a:latin typeface="Arial"/>
+                <a:ea typeface="Arial"/>
+                <a:cs typeface="Arial"/>
+              </a:rPr>
+              <a:t xml:space="preserve"/>
+            </a:r>
+            <a:endParaRPr lang="en-US" sz="1500"/>
+          </a:p>
+          <a:p>
+            <a:pPr marL="0" indent="0">
+              <a:lnSpc>
+                <a:spcPts val="1950"/>
+              </a:lnSpc>
+              <a:spcAft>
+                <a:spcPts val="0"/>
+              </a:spcAft>
+              <a:buNone/>
+            </a:pPr>
+            <a:r>
+              <a:rPr lang="en-US" sz="1500" b="0">
+                <a:solidFill>
+                  <a:srgbClr val="202B33"/>
+                </a:solidFill>
+                <a:latin typeface="Arial"/>
+                <a:ea typeface="Arial"/>
+                <a:cs typeface="Arial"/>
+              </a:rPr>
+              <a:t xml:space="preserve">Back to the org chart. Some of those</a:t>
+            </a:r>
+            <a:endParaRPr lang="en-US" sz="1500"/>
+          </a:p>
+          <a:p>
+            <a:pPr marL="0" indent="0">
+              <a:lnSpc>
+                <a:spcPts val="1950"/>
+              </a:lnSpc>
+              <a:spcAft>
+                <a:spcPts val="0"/>
+              </a:spcAft>
+              <a:buNone/>
+            </a:pPr>
+            <a:r>
+              <a:rPr lang="en-US" sz="1500" b="0">
+                <a:solidFill>
+                  <a:srgbClr val="202B33"/>
+                </a:solidFill>
+                <a:latin typeface="Arial"/>
+                <a:ea typeface="Arial"/>
+                <a:cs typeface="Arial"/>
+              </a:rPr>
+              <a:t xml:space="preserve">boundaries exist because the work really is</a:t>
+            </a:r>
+            <a:endParaRPr lang="en-US" sz="1500"/>
+          </a:p>
+          <a:p>
+            <a:pPr marL="0" indent="0">
+              <a:lnSpc>
+                <a:spcPts val="1950"/>
+              </a:lnSpc>
+              <a:spcAft>
+                <a:spcPts val="0"/>
+              </a:spcAft>
+              <a:buNone/>
+            </a:pPr>
+            <a:r>
+              <a:rPr lang="en-US" sz="1500" b="0">
+                <a:solidFill>
+                  <a:srgbClr val="202B33"/>
+                </a:solidFill>
+                <a:latin typeface="Arial"/>
+                <a:ea typeface="Arial"/>
+                <a:cs typeface="Arial"/>
+              </a:rPr>
+              <a:t xml:space="preserve">different. Some exist because the person</a:t>
+            </a:r>
+            <a:endParaRPr lang="en-US" sz="1500"/>
+          </a:p>
+          <a:p>
+            <a:pPr marL="0" indent="0">
+              <a:lnSpc>
+                <a:spcPts val="1950"/>
+              </a:lnSpc>
+              <a:spcAft>
+                <a:spcPts val="0"/>
+              </a:spcAft>
+              <a:buNone/>
+            </a:pPr>
+            <a:r>
+              <a:rPr lang="en-US" sz="1500" b="0">
+                <a:solidFill>
+                  <a:srgbClr val="202B33"/>
+                </a:solidFill>
+                <a:latin typeface="Arial"/>
+                <a:ea typeface="Arial"/>
+                <a:cs typeface="Arial"/>
+              </a:rPr>
+              <a:t xml:space="preserve">with the spreadsheet sat in another</a:t>
+            </a:r>
+            <a:endParaRPr lang="en-US" sz="1500"/>
+          </a:p>
+          <a:p>
+            <a:pPr marL="0" indent="0">
+              <a:lnSpc>
+                <a:spcPts val="1950"/>
+              </a:lnSpc>
+              <a:spcAft>
+                <a:spcPts val="0"/>
+              </a:spcAft>
+              <a:buNone/>
+            </a:pPr>
+            <a:r>
+              <a:rPr lang="en-US" sz="1500" b="0">
+                <a:solidFill>
+                  <a:srgbClr val="202B33"/>
+                </a:solidFill>
+                <a:latin typeface="Arial"/>
+                <a:ea typeface="Arial"/>
+                <a:cs typeface="Arial"/>
+              </a:rPr>
+              <a:t xml:space="preserve">department. We should know which before</a:t>
+            </a:r>
+            <a:endParaRPr lang="en-US" sz="1500"/>
+          </a:p>
+          <a:p>
+            <a:pPr marL="0" indent="0">
+              <a:lnSpc>
+                <a:spcPts val="1950"/>
+              </a:lnSpc>
+              <a:spcAft>
+                <a:spcPts val="0"/>
+              </a:spcAft>
+              <a:buNone/>
+            </a:pPr>
+            <a:r>
+              <a:rPr lang="en-US" sz="1500" b="0">
+                <a:solidFill>
+                  <a:srgbClr val="202B33"/>
+                </a:solidFill>
+                <a:latin typeface="Arial"/>
+                <a:ea typeface="Arial"/>
+                <a:cs typeface="Arial"/>
+              </a:rPr>
+              <a:t xml:space="preserve">teaching agents to repeat them.</a:t>
+            </a:r>
+            <a:endParaRPr lang="en-US" sz="1500"/>
+          </a:p>
+          <a:p>
+            <a:pPr marL="0" indent="0">
+              <a:lnSpc>
+                <a:spcPts val="1950"/>
+              </a:lnSpc>
+              <a:spcAft>
+                <a:spcPts val="0"/>
+              </a:spcAft>
+              <a:buNone/>
+            </a:pPr>
+            <a:r>
+              <a:rPr lang="en-US" sz="1500" b="0">
+                <a:solidFill>
+                  <a:srgbClr val="202B33"/>
+                </a:solidFill>
+                <a:latin typeface="Arial"/>
+                <a:ea typeface="Arial"/>
+                <a:cs typeface="Arial"/>
+              </a:rPr>
+              <a:t xml:space="preserve"/>
+            </a:r>
+            <a:endParaRPr lang="en-US" sz="1500"/>
+          </a:p>
+          <a:p>
+            <a:pPr marL="0" indent="0">
+              <a:lnSpc>
+                <a:spcPts val="1950"/>
+              </a:lnSpc>
+              <a:spcAft>
+                <a:spcPts val="0"/>
+              </a:spcAft>
+              <a:buNone/>
+            </a:pPr>
+            <a:r>
+              <a:rPr lang="en-US" sz="1500" b="0">
+                <a:solidFill>
+                  <a:srgbClr val="202B33"/>
+                </a:solidFill>
+                <a:latin typeface="Arial"/>
+                <a:ea typeface="Arial"/>
+                <a:cs typeface="Arial"/>
+              </a:rPr>
+              <a:t xml:space="preserve">Take one boundary. What arrives, what</a:t>
+            </a:r>
+            <a:endParaRPr lang="en-US" sz="1500"/>
+          </a:p>
+          <a:p>
+            <a:pPr marL="0" indent="0">
+              <a:lnSpc>
+                <a:spcPts val="1950"/>
+              </a:lnSpc>
+              <a:spcAft>
+                <a:spcPts val="0"/>
+              </a:spcAft>
+              <a:buNone/>
+            </a:pPr>
+            <a:r>
+              <a:rPr lang="en-US" sz="1500" b="0">
+                <a:solidFill>
+                  <a:srgbClr val="202B33"/>
+                </a:solidFill>
+                <a:latin typeface="Arial"/>
+                <a:ea typeface="Arial"/>
+                <a:cs typeface="Arial"/>
+              </a:rPr>
+              <a:t xml:space="preserve">leaves, who decides, and what did it cost</a:t>
+            </a:r>
+            <a:endParaRPr lang="en-US" sz="1500"/>
+          </a:p>
+          <a:p>
+            <a:pPr marL="0" indent="0">
+              <a:lnSpc>
+                <a:spcPts val="1950"/>
+              </a:lnSpc>
+              <a:spcAft>
+                <a:spcPts val="0"/>
+              </a:spcAft>
+              <a:buNone/>
+            </a:pPr>
+            <a:r>
+              <a:rPr lang="en-US" sz="1500" b="0">
+                <a:solidFill>
+                  <a:srgbClr val="202B33"/>
+                </a:solidFill>
+                <a:latin typeface="Arial"/>
+                <a:ea typeface="Arial"/>
+                <a:cs typeface="Arial"/>
+              </a:rPr>
+              <a:t xml:space="preserve">last week? Make collection cheaper without</a:t>
+            </a:r>
+            <a:endParaRPr lang="en-US" sz="1500"/>
+          </a:p>
+          <a:p>
+            <a:pPr marL="0" indent="0">
+              <a:lnSpc>
+                <a:spcPts val="1950"/>
+              </a:lnSpc>
+              <a:spcAft>
+                <a:spcPts val="0"/>
+              </a:spcAft>
+              <a:buNone/>
+            </a:pPr>
+            <a:r>
+              <a:rPr lang="en-US" sz="1500" b="0">
+                <a:solidFill>
+                  <a:srgbClr val="202B33"/>
+                </a:solidFill>
+                <a:latin typeface="Arial"/>
+                <a:ea typeface="Arial"/>
+                <a:cs typeface="Arial"/>
+              </a:rPr>
+              <a:t xml:space="preserve">erasing the disagreement the handoff used</a:t>
+            </a:r>
+            <a:endParaRPr lang="en-US" sz="1500"/>
+          </a:p>
+          <a:p>
+            <a:pPr marL="0" indent="0">
+              <a:lnSpc>
+                <a:spcPts val="1950"/>
+              </a:lnSpc>
+              <a:spcAft>
+                <a:spcPts val="0"/>
+              </a:spcAft>
+              <a:buNone/>
+            </a:pPr>
+            <a:r>
+              <a:rPr lang="en-US" sz="1500" b="0">
+                <a:solidFill>
+                  <a:srgbClr val="202B33"/>
+                </a:solidFill>
+                <a:latin typeface="Arial"/>
+                <a:ea typeface="Arial"/>
+                <a:cs typeface="Arial"/>
+              </a:rPr>
+              <a:t xml:space="preserve">to expose. Keep the product review where</a:t>
+            </a:r>
+            <a:endParaRPr lang="en-US" sz="1500"/>
+          </a:p>
+          <a:p>
+            <a:pPr marL="0" indent="0">
+              <a:lnSpc>
+                <a:spcPts val="1950"/>
+              </a:lnSpc>
+              <a:spcAft>
+                <a:spcPts val="0"/>
+              </a:spcAft>
+              <a:buNone/>
+            </a:pPr>
+            <a:r>
+              <a:rPr lang="en-US" sz="1500" b="0">
+                <a:solidFill>
+                  <a:srgbClr val="202B33"/>
+                </a:solidFill>
+                <a:latin typeface="Arial"/>
+                <a:ea typeface="Arial"/>
+                <a:cs typeface="Arial"/>
+              </a:rPr>
+              <a:t xml:space="preserve">the evidence conflicts, and give the</a:t>
+            </a:r>
+            <a:endParaRPr lang="en-US" sz="1500"/>
+          </a:p>
+        </p:txBody>
+      </p:sp>
+      <p:sp>
+        <p:nvSpPr>
+          <p:cNvPr id="5" name="Text 5"/>
+          <p:cNvSpPr txBox="1"/>
+          <p:nvPr/>
+        </p:nvSpPr>
+        <p:spPr>
+          <a:xfrm>
+            <a:off x="5238750" y="1971675"/>
+            <a:ext cx="4362450" cy="5314950"/>
+          </a:xfrm>
+          <a:prstGeom prst="rect">
+            <a:avLst/>
+          </a:prstGeom>
+          <a:noFill/>
+          <a:ln>
+            <a:noFill/>
+          </a:ln>
+        </p:spPr>
+        <p:txBody>
+          <a:bodyPr wrap="none" lIns="0" tIns="0" rIns="0" bIns="0" anchor="t">
+            <a:noAutofit/>
+          </a:bodyPr>
+          <a:lstStyle/>
+          <a:p>
+            <a:pPr marL="0" indent="0">
+              <a:lnSpc>
+                <a:spcPts val="1950"/>
+              </a:lnSpc>
+              <a:spcAft>
+                <a:spcPts val="0"/>
+              </a:spcAft>
+              <a:buNone/>
+            </a:pPr>
+            <a:r>
+              <a:rPr lang="en-US" sz="1500" b="0">
+                <a:solidFill>
+                  <a:srgbClr val="202B33"/>
+                </a:solidFill>
+                <a:latin typeface="Arial"/>
+                <a:ea typeface="Arial"/>
+                <a:cs typeface="Arial"/>
+              </a:rPr>
+              <a:t xml:space="preserve">decision a durable artifact so the next</a:t>
+            </a:r>
+            <a:endParaRPr lang="en-US" sz="1500"/>
+          </a:p>
+          <a:p>
+            <a:pPr marL="0" indent="0">
+              <a:lnSpc>
+                <a:spcPts val="1950"/>
+              </a:lnSpc>
+              <a:spcAft>
+                <a:spcPts val="0"/>
+              </a:spcAft>
+              <a:buNone/>
+            </a:pPr>
+            <a:r>
+              <a:rPr lang="en-US" sz="1500" b="0">
+                <a:solidFill>
+                  <a:srgbClr val="202B33"/>
+                </a:solidFill>
+                <a:latin typeface="Arial"/>
+                <a:ea typeface="Arial"/>
+                <a:cs typeface="Arial"/>
+              </a:rPr>
+              <a:t xml:space="preserve">agent does not have to guess.</a:t>
+            </a:r>
+            <a:endParaRPr lang="en-US" sz="1500"/>
+          </a:p>
+          <a:p>
+            <a:pPr marL="0" indent="0">
+              <a:lnSpc>
+                <a:spcPts val="1950"/>
+              </a:lnSpc>
+              <a:spcAft>
+                <a:spcPts val="0"/>
+              </a:spcAft>
+              <a:buNone/>
+            </a:pPr>
+            <a:r>
+              <a:rPr lang="en-US" sz="1500" b="0">
+                <a:solidFill>
+                  <a:srgbClr val="202B33"/>
+                </a:solidFill>
+                <a:latin typeface="Arial"/>
+                <a:ea typeface="Arial"/>
+                <a:cs typeface="Arial"/>
+              </a:rPr>
+              <a:t xml:space="preserve"/>
+            </a:r>
+            <a:endParaRPr lang="en-US" sz="1500"/>
+          </a:p>
+          <a:p>
+            <a:pPr marL="0" indent="0">
+              <a:lnSpc>
+                <a:spcPts val="1950"/>
+              </a:lnSpc>
+              <a:spcAft>
+                <a:spcPts val="0"/>
+              </a:spcAft>
+              <a:buNone/>
+            </a:pPr>
+            <a:r>
+              <a:rPr lang="en-US" sz="1500" b="0">
+                <a:solidFill>
+                  <a:srgbClr val="202B33"/>
+                </a:solidFill>
+                <a:latin typeface="Arial"/>
+                <a:ea typeface="Arial"/>
+                <a:cs typeface="Arial"/>
+              </a:rPr>
+              <a:t xml:space="preserve">Then price ownership, and price the fuel.</a:t>
+            </a:r>
+            <a:endParaRPr lang="en-US" sz="1500"/>
+          </a:p>
+          <a:p>
+            <a:pPr marL="0" indent="0">
+              <a:lnSpc>
+                <a:spcPts val="1950"/>
+              </a:lnSpc>
+              <a:spcAft>
+                <a:spcPts val="0"/>
+              </a:spcAft>
+              <a:buNone/>
+            </a:pPr>
+            <a:r>
+              <a:rPr lang="en-US" sz="1500" b="0">
+                <a:solidFill>
+                  <a:srgbClr val="202B33"/>
+                </a:solidFill>
+                <a:latin typeface="Arial"/>
+                <a:ea typeface="Arial"/>
+                <a:cs typeface="Arial"/>
+              </a:rPr>
+              <a:t xml:space="preserve">Six agents do not become free because one</a:t>
+            </a:r>
+            <a:endParaRPr lang="en-US" sz="1500"/>
+          </a:p>
+          <a:p>
+            <a:pPr marL="0" indent="0">
+              <a:lnSpc>
+                <a:spcPts val="1950"/>
+              </a:lnSpc>
+              <a:spcAft>
+                <a:spcPts val="0"/>
+              </a:spcAft>
+              <a:buNone/>
+            </a:pPr>
+            <a:r>
+              <a:rPr lang="en-US" sz="1500" b="0">
+                <a:solidFill>
+                  <a:srgbClr val="202B33"/>
+                </a:solidFill>
+                <a:latin typeface="Arial"/>
+                <a:ea typeface="Arial"/>
+                <a:cs typeface="Arial"/>
+              </a:rPr>
+              <a:t xml:space="preserve">person has their names in a config file,</a:t>
+            </a:r>
+            <a:endParaRPr lang="en-US" sz="1500"/>
+          </a:p>
+          <a:p>
+            <a:pPr marL="0" indent="0">
+              <a:lnSpc>
+                <a:spcPts val="1950"/>
+              </a:lnSpc>
+              <a:spcAft>
+                <a:spcPts val="0"/>
+              </a:spcAft>
+              <a:buNone/>
+            </a:pPr>
+            <a:r>
+              <a:rPr lang="en-US" sz="1500" b="0">
+                <a:solidFill>
+                  <a:srgbClr val="202B33"/>
+                </a:solidFill>
+                <a:latin typeface="Arial"/>
+                <a:ea typeface="Arial"/>
+                <a:cs typeface="Arial"/>
+              </a:rPr>
+              <a:t xml:space="preserve">and neither does the burn that keeps them</a:t>
+            </a:r>
+            <a:endParaRPr lang="en-US" sz="1500"/>
+          </a:p>
+          <a:p>
+            <a:pPr marL="0" indent="0">
+              <a:lnSpc>
+                <a:spcPts val="1950"/>
+              </a:lnSpc>
+              <a:spcAft>
+                <a:spcPts val="0"/>
+              </a:spcAft>
+              <a:buNone/>
+            </a:pPr>
+            <a:r>
+              <a:rPr lang="en-US" sz="1500" b="0">
+                <a:solidFill>
+                  <a:srgbClr val="202B33"/>
+                </a:solidFill>
+                <a:latin typeface="Arial"/>
+                <a:ea typeface="Arial"/>
+                <a:cs typeface="Arial"/>
+              </a:rPr>
+              <a:t xml:space="preserve">running. Put permission before customer</a:t>
+            </a:r>
+            <a:endParaRPr lang="en-US" sz="1500"/>
+          </a:p>
+          <a:p>
+            <a:pPr marL="0" indent="0">
+              <a:lnSpc>
+                <a:spcPts val="1950"/>
+              </a:lnSpc>
+              <a:spcAft>
+                <a:spcPts val="0"/>
+              </a:spcAft>
+              <a:buNone/>
+            </a:pPr>
+            <a:r>
+              <a:rPr lang="en-US" sz="1500" b="0">
+                <a:solidFill>
+                  <a:srgbClr val="202B33"/>
+                </a:solidFill>
+                <a:latin typeface="Arial"/>
+                <a:ea typeface="Arial"/>
+                <a:cs typeface="Arial"/>
+              </a:rPr>
+              <a:t xml:space="preserve">consequences.</a:t>
+            </a:r>
+            <a:endParaRPr lang="en-US" sz="1500"/>
+          </a:p>
+          <a:p>
+            <a:pPr marL="0" indent="0">
+              <a:lnSpc>
+                <a:spcPts val="1950"/>
+              </a:lnSpc>
+              <a:spcAft>
+                <a:spcPts val="0"/>
+              </a:spcAft>
+              <a:buNone/>
+            </a:pPr>
+            <a:r>
+              <a:rPr lang="en-US" sz="1500" b="0">
+                <a:solidFill>
+                  <a:srgbClr val="202B33"/>
+                </a:solidFill>
+                <a:latin typeface="Arial"/>
+                <a:ea typeface="Arial"/>
+                <a:cs typeface="Arial"/>
+              </a:rPr>
+              <a:t xml:space="preserve"/>
+            </a:r>
+            <a:endParaRPr lang="en-US" sz="1500"/>
+          </a:p>
+          <a:p>
+            <a:pPr marL="0" indent="0">
+              <a:lnSpc>
+                <a:spcPts val="1950"/>
+              </a:lnSpc>
+              <a:spcAft>
+                <a:spcPts val="0"/>
+              </a:spcAft>
+              <a:buNone/>
+            </a:pPr>
+            <a:r>
+              <a:rPr lang="en-US" sz="1500" b="0">
+                <a:solidFill>
+                  <a:srgbClr val="202B33"/>
+                </a:solidFill>
+                <a:latin typeface="Arial"/>
+                <a:ea typeface="Arial"/>
+                <a:cs typeface="Arial"/>
+              </a:rPr>
+              <a:t xml:space="preserve">And then do the larger version of the same</a:t>
+            </a:r>
+            <a:endParaRPr lang="en-US" sz="1500"/>
+          </a:p>
+          <a:p>
+            <a:pPr marL="0" indent="0">
+              <a:lnSpc>
+                <a:spcPts val="1950"/>
+              </a:lnSpc>
+              <a:spcAft>
+                <a:spcPts val="0"/>
+              </a:spcAft>
+              <a:buNone/>
+            </a:pPr>
+            <a:r>
+              <a:rPr lang="en-US" sz="1500" b="0">
+                <a:solidFill>
+                  <a:srgbClr val="202B33"/>
+                </a:solidFill>
+                <a:latin typeface="Arial"/>
+                <a:ea typeface="Arial"/>
+                <a:cs typeface="Arial"/>
+              </a:rPr>
+              <a:t xml:space="preserve">move. The org chart is a record of earlier</a:t>
+            </a:r>
+            <a:endParaRPr lang="en-US" sz="1500"/>
+          </a:p>
+          <a:p>
+            <a:pPr marL="0" indent="0">
+              <a:lnSpc>
+                <a:spcPts val="1950"/>
+              </a:lnSpc>
+              <a:spcAft>
+                <a:spcPts val="0"/>
+              </a:spcAft>
+              <a:buNone/>
+            </a:pPr>
+            <a:r>
+              <a:rPr lang="en-US" sz="1500" b="0">
+                <a:solidFill>
+                  <a:srgbClr val="202B33"/>
+                </a:solidFill>
+                <a:latin typeface="Arial"/>
+                <a:ea typeface="Arial"/>
+                <a:cs typeface="Arial"/>
+              </a:rPr>
+              <a:t xml:space="preserve">tradeoffs; so is the product category you</a:t>
+            </a:r>
+            <a:endParaRPr lang="en-US" sz="1500"/>
+          </a:p>
+          <a:p>
+            <a:pPr marL="0" indent="0">
+              <a:lnSpc>
+                <a:spcPts val="1950"/>
+              </a:lnSpc>
+              <a:spcAft>
+                <a:spcPts val="0"/>
+              </a:spcAft>
+              <a:buNone/>
+            </a:pPr>
+            <a:r>
+              <a:rPr lang="en-US" sz="1500" b="0">
+                <a:solidFill>
+                  <a:srgbClr val="202B33"/>
+                </a:solidFill>
+                <a:latin typeface="Arial"/>
+                <a:ea typeface="Arial"/>
+                <a:cs typeface="Arial"/>
+              </a:rPr>
+              <a:t xml:space="preserve">are working inside. You are allowed to make</a:t>
+            </a:r>
+            <a:endParaRPr lang="en-US" sz="1500"/>
+          </a:p>
+          <a:p>
+            <a:pPr marL="0" indent="0">
+              <a:lnSpc>
+                <a:spcPts val="1950"/>
+              </a:lnSpc>
+              <a:spcAft>
+                <a:spcPts val="0"/>
+              </a:spcAft>
+              <a:buNone/>
+            </a:pPr>
+            <a:r>
+              <a:rPr lang="en-US" sz="1500" b="0">
+                <a:solidFill>
+                  <a:srgbClr val="202B33"/>
+                </a:solidFill>
+                <a:latin typeface="Arial"/>
+                <a:ea typeface="Arial"/>
+                <a:cs typeface="Arial"/>
+              </a:rPr>
+              <a:t xml:space="preserve">new ones, and the channel is not spoken for</a:t>
+            </a:r>
+            <a:endParaRPr lang="en-US" sz="1500"/>
+          </a:p>
+          <a:p>
+            <a:pPr marL="0" indent="0">
+              <a:lnSpc>
+                <a:spcPts val="1950"/>
+              </a:lnSpc>
+              <a:spcAft>
+                <a:spcPts val="0"/>
+              </a:spcAft>
+              <a:buNone/>
+            </a:pPr>
+            <a:r>
+              <a:rPr lang="en-US" sz="1500" b="0">
+                <a:solidFill>
+                  <a:srgbClr val="202B33"/>
+                </a:solidFill>
+                <a:latin typeface="Arial"/>
+                <a:ea typeface="Arial"/>
+                <a:cs typeface="Arial"/>
+              </a:rPr>
+              <a:t xml:space="preserve">yet. Break the mirror on purpose. Automate</a:t>
+            </a:r>
+            <a:endParaRPr lang="en-US" sz="1500"/>
+          </a:p>
+          <a:p>
+            <a:pPr marL="0" indent="0">
+              <a:lnSpc>
+                <a:spcPts val="1950"/>
+              </a:lnSpc>
+              <a:spcAft>
+                <a:spcPts val="0"/>
+              </a:spcAft>
+              <a:buNone/>
+            </a:pPr>
+            <a:r>
+              <a:rPr lang="en-US" sz="1500" b="0">
+                <a:solidFill>
+                  <a:srgbClr val="202B33"/>
+                </a:solidFill>
+                <a:latin typeface="Arial"/>
+                <a:ea typeface="Arial"/>
+                <a:cs typeface="Arial"/>
+              </a:rPr>
+              <a:t xml:space="preserve">the right things. Keep the taste.</a:t>
+            </a:r>
+            <a:endParaRPr lang="en-US" sz="1500"/>
+          </a:p>
+        </p:txBody>
+      </p:sp>
+      <p:sp>
+        <p:nvSpPr>
+          <p:cNvPr id="6" name="Text 6"/>
+          <p:cNvSpPr txBox="1"/>
+          <p:nvPr/>
+        </p:nvSpPr>
+        <p:spPr>
+          <a:xfrm>
+            <a:off x="457200" y="7486650"/>
+            <a:ext cx="8820150" cy="190500"/>
+          </a:xfrm>
+          <a:prstGeom prst="rect">
+            <a:avLst/>
+          </a:prstGeom>
+          <a:noFill/>
+          <a:ln>
+            <a:noFill/>
+          </a:ln>
+        </p:spPr>
+        <p:txBody>
+          <a:bodyPr wrap="none" lIns="0" tIns="0" rIns="0" bIns="0" anchor="t">
+            <a:noAutofit/>
+          </a:bodyPr>
+          <a:lstStyle/>
+          <a:p>
+            <a:pPr marL="0" indent="0">
+              <a:lnSpc>
+                <a:spcPts val="1268"/>
+              </a:lnSpc>
+              <a:spcAft>
+                <a:spcPts val="0"/>
+              </a:spcAft>
+              <a:buNone/>
+            </a:pPr>
+            <a:r>
+              <a:rPr lang="en-US" sz="975" b="0">
+                <a:solidFill>
+                  <a:srgbClr val="48555B"/>
+                </a:solidFill>
+                <a:latin typeface="Arial"/>
+                <a:ea typeface="Arial"/>
+                <a:cs typeface="Arial"/>
+              </a:rPr>
+              <a:t xml:space="preserve">The Future of Product Engineering: Break the Mirror on Purpose</a:t>
+            </a:r>
+            <a:endParaRPr lang="en-US" sz="975"/>
+          </a:p>
+        </p:txBody>
+      </p:sp>
+      <p:sp>
+        <p:nvSpPr>
+          <p:cNvPr id="7" name="Text 7"/>
+          <p:cNvSpPr txBox="1"/>
+          <p:nvPr/>
+        </p:nvSpPr>
+        <p:spPr>
+          <a:xfrm>
+            <a:off x="9391650" y="7486650"/>
+            <a:ext cx="238125" cy="190500"/>
+          </a:xfrm>
+          <a:prstGeom prst="rect">
+            <a:avLst/>
+          </a:prstGeom>
+          <a:noFill/>
+          <a:ln>
+            <a:noFill/>
+          </a:ln>
+        </p:spPr>
+        <p:txBody>
+          <a:bodyPr wrap="none" lIns="0" tIns="0" rIns="0" bIns="0" anchor="t">
+            <a:noAutofit/>
+          </a:bodyPr>
+          <a:lstStyle/>
+          <a:p>
+            <a:pPr marL="0" indent="0">
+              <a:lnSpc>
+                <a:spcPts val="1268"/>
+              </a:lnSpc>
+              <a:spcAft>
+                <a:spcPts val="0"/>
+              </a:spcAft>
+              <a:buNone/>
+            </a:pPr>
+            <a:r>
+              <a:rPr lang="en-US" sz="975" b="0">
+                <a:solidFill>
+                  <a:srgbClr val="48555B"/>
+                </a:solidFill>
+                <a:latin typeface="Arial"/>
+                <a:ea typeface="Arial"/>
+                <a:cs typeface="Arial"/>
+              </a:rPr>
+              <a:t xml:space="preserve">10</a:t>
+            </a:r>
+            <a:endParaRPr lang="en-US" sz="975"/>
+          </a:p>
+        </p:txBody>
+      </p:sp>
+    </p:spTree>
+  </p:cSld>
+  <p:clrMapOvr>
+    <a:masterClrMapping/>
+  </p:clrMapOvr>
+</p:sld>
+</file>
+
+<file path=ppt/slides/slide11.xml><?xml version="1.0" encoding="utf-8"?>
+<p:sld xmlns:a="http://schemas.openxmlformats.org/drawingml/2006/main" xmlns:r="http://schemas.openxmlformats.org/officeDocument/2006/relationships" xmlns:p="http://schemas.openxmlformats.org/presentationml/2006/main">
+  <p:cSld name="Slide 11">
+    <p:bg>
+      <p:bgPr>
+        <a:solidFill>
+          <a:srgbClr val="FAFAF7"/>
+        </a:solidFill>
+        <a:effectLst/>
+      </p:bgPr>
+    </p:bg>
+    <p:spTree>
+      <p:nvGrpSpPr>
+        <p:cNvPr id="1" name=""/>
+        <p:cNvGrpSpPr/>
+        <p:nvPr/>
+      </p:nvGrpSpPr>
+      <p:grpSpPr>
+        <a:xfrm>
+          <a:off x="0" y="0"/>
+          <a:ext cx="0" cy="0"/>
+          <a:chOff x="0" y="0"/>
+          <a:chExt cx="0" cy="0"/>
+        </a:xfrm>
+      </p:grpSpPr>
+      <p:sp>
+        <p:nvSpPr>
+          <p:cNvPr id="2" name="Text 2"/>
+          <p:cNvSpPr txBox="1"/>
+          <p:nvPr/>
+        </p:nvSpPr>
+        <p:spPr>
+          <a:xfrm>
+            <a:off x="457200" y="266700"/>
+            <a:ext cx="9144000" cy="228600"/>
+          </a:xfrm>
+          <a:prstGeom prst="rect">
+            <a:avLst/>
+          </a:prstGeom>
+          <a:noFill/>
+          <a:ln>
+            <a:noFill/>
+          </a:ln>
+        </p:spPr>
+        <p:txBody>
+          <a:bodyPr wrap="none" lIns="0" tIns="0" rIns="0" bIns="0" anchor="t">
+            <a:noAutofit/>
+          </a:bodyPr>
+          <a:lstStyle/>
+          <a:p>
+            <a:pPr marL="0" indent="0">
+              <a:lnSpc>
+                <a:spcPts val="1365"/>
+              </a:lnSpc>
+              <a:spcAft>
+                <a:spcPts val="0"/>
+              </a:spcAft>
+              <a:buNone/>
+            </a:pPr>
+            <a:r>
+              <a:rPr lang="en-US" sz="1050" b="1">
+                <a:solidFill>
+                  <a:srgbClr val="246957"/>
+                </a:solidFill>
+                <a:latin typeface="Arial"/>
+                <a:ea typeface="Arial"/>
+                <a:cs typeface="Arial"/>
+              </a:rPr>
+              <a:t xml:space="preserve">SOURCE REFERENCES</a:t>
+            </a:r>
+            <a:endParaRPr lang="en-US" sz="1050"/>
+          </a:p>
+        </p:txBody>
+      </p:sp>
+      <p:sp>
+        <p:nvSpPr>
+          <p:cNvPr id="3" name="Text 3"/>
+          <p:cNvSpPr txBox="1"/>
+          <p:nvPr/>
+        </p:nvSpPr>
+        <p:spPr>
+          <a:xfrm>
+            <a:off x="457200" y="657225"/>
+            <a:ext cx="9144000" cy="1104900"/>
+          </a:xfrm>
+          <a:prstGeom prst="rect">
+            <a:avLst/>
+          </a:prstGeom>
+          <a:noFill/>
+          <a:ln>
+            <a:noFill/>
+          </a:ln>
+        </p:spPr>
+        <p:txBody>
+          <a:bodyPr wrap="none" lIns="0" tIns="0" rIns="0" bIns="0" anchor="t">
+            <a:noAutofit/>
+          </a:bodyPr>
+          <a:lstStyle/>
+          <a:p>
+            <a:pPr marL="0" indent="0">
+              <a:lnSpc>
+                <a:spcPts val="3060"/>
+              </a:lnSpc>
+              <a:spcAft>
+                <a:spcPts val="0"/>
+              </a:spcAft>
+              <a:buNone/>
+            </a:pPr>
+            <a:r>
+              <a:rPr lang="en-US" sz="2550" b="1">
+                <a:solidFill>
+                  <a:srgbClr val="202B33"/>
+                </a:solidFill>
+                <a:latin typeface="Arial"/>
+                <a:ea typeface="Arial"/>
+                <a:cs typeface="Arial"/>
+              </a:rPr>
+              <a:t xml:space="preserve">References</a:t>
+            </a:r>
+            <a:endParaRPr lang="en-US" sz="2550"/>
+          </a:p>
+        </p:txBody>
+      </p:sp>
+      <p:sp>
+        <p:nvSpPr>
+          <p:cNvPr id="4" name="Text 4"/>
+          <p:cNvSpPr txBox="1"/>
+          <p:nvPr/>
+        </p:nvSpPr>
+        <p:spPr>
+          <a:xfrm>
+            <a:off x="457200" y="1971675"/>
+            <a:ext cx="4352925" cy="5314950"/>
+          </a:xfrm>
+          <a:prstGeom prst="rect">
+            <a:avLst/>
+          </a:prstGeom>
+          <a:noFill/>
+          <a:ln>
+            <a:noFill/>
+          </a:ln>
+        </p:spPr>
+        <p:txBody>
+          <a:bodyPr wrap="none" lIns="0" tIns="0" rIns="0" bIns="0" anchor="t">
+            <a:noAutofit/>
+          </a:bodyPr>
+          <a:lstStyle/>
+          <a:p>
+            <a:pPr marL="0" indent="0">
+              <a:lnSpc>
+                <a:spcPts val="1950"/>
+              </a:lnSpc>
+              <a:spcAft>
+                <a:spcPts val="0"/>
+              </a:spcAft>
+              <a:buNone/>
+            </a:pPr>
+            <a:r>
+              <a:rPr lang="en-US" sz="1500" b="0">
+                <a:solidFill>
+                  <a:srgbClr val="202B33"/>
+                </a:solidFill>
+                <a:latin typeface="Arial"/>
+                <a:ea typeface="Arial"/>
+                <a:cs typeface="Arial"/>
+              </a:rPr>
+              <a:t xml:space="preserve">Melvin E. Conway (1968), How Do Committees</a:t>
+            </a:r>
+            <a:endParaRPr lang="en-US" sz="1500"/>
+          </a:p>
+          <a:p>
+            <a:pPr marL="0" indent="0">
+              <a:lnSpc>
+                <a:spcPts val="1950"/>
+              </a:lnSpc>
+              <a:spcAft>
+                <a:spcPts val="0"/>
+              </a:spcAft>
+              <a:buNone/>
+            </a:pPr>
+            <a:r>
+              <a:rPr lang="en-US" sz="1500" b="0">
+                <a:solidFill>
+                  <a:srgbClr val="202B33"/>
+                </a:solidFill>
+                <a:latin typeface="Arial"/>
+                <a:ea typeface="Arial"/>
+                <a:cs typeface="Arial"/>
+              </a:rPr>
+              <a:t xml:space="preserve">Invent? —</a:t>
+            </a:r>
+            <a:endParaRPr lang="en-US" sz="1500"/>
+          </a:p>
+          <a:p>
+            <a:pPr marL="0" indent="0">
+              <a:lnSpc>
+                <a:spcPts val="1950"/>
+              </a:lnSpc>
+              <a:spcAft>
+                <a:spcPts val="0"/>
+              </a:spcAft>
+              <a:buNone/>
+            </a:pPr>
+            <a:r>
+              <a:rPr lang="en-US" sz="1500" b="0">
+                <a:solidFill>
+                  <a:srgbClr val="202B33"/>
+                </a:solidFill>
+                <a:latin typeface="Arial"/>
+                <a:ea typeface="Arial"/>
+                <a:cs typeface="Arial"/>
+              </a:rPr>
+              <a:t xml:space="preserve">https://melconway.com/Home/pdf/committees.pdf,</a:t>
+            </a:r>
+            <a:endParaRPr lang="en-US" sz="1500"/>
+          </a:p>
+          <a:p>
+            <a:pPr marL="0" indent="0">
+              <a:lnSpc>
+                <a:spcPts val="1950"/>
+              </a:lnSpc>
+              <a:spcAft>
+                <a:spcPts val="0"/>
+              </a:spcAft>
+              <a:buNone/>
+            </a:pPr>
+            <a:r>
+              <a:rPr lang="en-US" sz="1500" b="0">
+                <a:solidFill>
+                  <a:srgbClr val="202B33"/>
+                </a:solidFill>
+                <a:latin typeface="Arial"/>
+                <a:ea typeface="Arial"/>
+                <a:cs typeface="Arial"/>
+              </a:rPr>
+              <a:t xml:space="preserve">Datamation, April, 28–31.</a:t>
+            </a:r>
+            <a:endParaRPr lang="en-US" sz="1500"/>
+          </a:p>
+          <a:p>
+            <a:pPr marL="0" indent="0">
+              <a:lnSpc>
+                <a:spcPts val="1950"/>
+              </a:lnSpc>
+              <a:spcAft>
+                <a:spcPts val="0"/>
+              </a:spcAft>
+              <a:buNone/>
+            </a:pPr>
+            <a:r>
+              <a:rPr lang="en-US" sz="1500" b="0">
+                <a:solidFill>
+                  <a:srgbClr val="202B33"/>
+                </a:solidFill>
+                <a:latin typeface="Arial"/>
+                <a:ea typeface="Arial"/>
+                <a:cs typeface="Arial"/>
+              </a:rPr>
+              <a:t xml:space="preserve"/>
+            </a:r>
+            <a:endParaRPr lang="en-US" sz="1500"/>
+          </a:p>
+          <a:p>
+            <a:pPr marL="0" indent="0">
+              <a:lnSpc>
+                <a:spcPts val="1950"/>
+              </a:lnSpc>
+              <a:spcAft>
+                <a:spcPts val="0"/>
+              </a:spcAft>
+              <a:buNone/>
+            </a:pPr>
+            <a:r>
+              <a:rPr lang="en-US" sz="1500" b="0">
+                <a:solidFill>
+                  <a:srgbClr val="202B33"/>
+                </a:solidFill>
+                <a:latin typeface="Arial"/>
+                <a:ea typeface="Arial"/>
+                <a:cs typeface="Arial"/>
+              </a:rPr>
+              <a:t xml:space="preserve">Ronald H. Coase (1937), The Nature of the</a:t>
+            </a:r>
+            <a:endParaRPr lang="en-US" sz="1500"/>
+          </a:p>
+          <a:p>
+            <a:pPr marL="0" indent="0">
+              <a:lnSpc>
+                <a:spcPts val="1950"/>
+              </a:lnSpc>
+              <a:spcAft>
+                <a:spcPts val="0"/>
+              </a:spcAft>
+              <a:buNone/>
+            </a:pPr>
+            <a:r>
+              <a:rPr lang="en-US" sz="1500" b="0">
+                <a:solidFill>
+                  <a:srgbClr val="202B33"/>
+                </a:solidFill>
+                <a:latin typeface="Arial"/>
+                <a:ea typeface="Arial"/>
+                <a:cs typeface="Arial"/>
+              </a:rPr>
+              <a:t xml:space="preserve">Firm —</a:t>
+            </a:r>
+            <a:endParaRPr lang="en-US" sz="1500"/>
+          </a:p>
+          <a:p>
+            <a:pPr marL="0" indent="0">
+              <a:lnSpc>
+                <a:spcPts val="1950"/>
+              </a:lnSpc>
+              <a:spcAft>
+                <a:spcPts val="0"/>
+              </a:spcAft>
+              <a:buNone/>
+            </a:pPr>
+            <a:r>
+              <a:rPr lang="en-US" sz="1500" b="0">
+                <a:solidFill>
+                  <a:srgbClr val="202B33"/>
+                </a:solidFill>
+                <a:latin typeface="Arial"/>
+                <a:ea typeface="Arial"/>
+                <a:cs typeface="Arial"/>
+              </a:rPr>
+              <a:t xml:space="preserve">https://onlinelibrary.wiley.com/doi/10.1111/j.1468-0335.1937.tb00002.x),</a:t>
+            </a:r>
+            <a:endParaRPr lang="en-US" sz="1500"/>
+          </a:p>
+          <a:p>
+            <a:pPr marL="0" indent="0">
+              <a:lnSpc>
+                <a:spcPts val="1950"/>
+              </a:lnSpc>
+              <a:spcAft>
+                <a:spcPts val="0"/>
+              </a:spcAft>
+              <a:buNone/>
+            </a:pPr>
+            <a:r>
+              <a:rPr lang="en-US" sz="1500" b="0">
+                <a:solidFill>
+                  <a:srgbClr val="202B33"/>
+                </a:solidFill>
+                <a:latin typeface="Arial"/>
+                <a:ea typeface="Arial"/>
+                <a:cs typeface="Arial"/>
+              </a:rPr>
+              <a:t xml:space="preserve">Economica 4(16, 386–405. The agent-design</a:t>
+            </a:r>
+            <a:endParaRPr lang="en-US" sz="1500"/>
+          </a:p>
+          <a:p>
+            <a:pPr marL="0" indent="0">
+              <a:lnSpc>
+                <a:spcPts val="1950"/>
+              </a:lnSpc>
+              <a:spcAft>
+                <a:spcPts val="0"/>
+              </a:spcAft>
+              <a:buNone/>
+            </a:pPr>
+            <a:r>
+              <a:rPr lang="en-US" sz="1500" b="0">
+                <a:solidFill>
+                  <a:srgbClr val="202B33"/>
+                </a:solidFill>
+                <a:latin typeface="Arial"/>
+                <a:ea typeface="Arial"/>
+                <a:cs typeface="Arial"/>
+              </a:rPr>
+              <a:t xml:space="preserve">application is the speaker’s argument.</a:t>
+            </a:r>
+            <a:endParaRPr lang="en-US" sz="1500"/>
+          </a:p>
+          <a:p>
+            <a:pPr marL="0" indent="0">
+              <a:lnSpc>
+                <a:spcPts val="1950"/>
+              </a:lnSpc>
+              <a:spcAft>
+                <a:spcPts val="0"/>
+              </a:spcAft>
+              <a:buNone/>
+            </a:pPr>
+            <a:r>
+              <a:rPr lang="en-US" sz="1500" b="0">
+                <a:solidFill>
+                  <a:srgbClr val="202B33"/>
+                </a:solidFill>
+                <a:latin typeface="Arial"/>
+                <a:ea typeface="Arial"/>
+                <a:cs typeface="Arial"/>
+              </a:rPr>
+              <a:t xml:space="preserve"/>
+            </a:r>
+            <a:endParaRPr lang="en-US" sz="1500"/>
+          </a:p>
+        </p:txBody>
+      </p:sp>
+      <p:sp>
+        <p:nvSpPr>
+          <p:cNvPr id="5" name="Text 5"/>
+          <p:cNvSpPr txBox="1"/>
+          <p:nvPr/>
+        </p:nvSpPr>
+        <p:spPr>
+          <a:xfrm>
+            <a:off x="5238750" y="1971675"/>
+            <a:ext cx="4362450" cy="5314950"/>
+          </a:xfrm>
+          <a:prstGeom prst="rect">
+            <a:avLst/>
+          </a:prstGeom>
+          <a:noFill/>
+          <a:ln>
+            <a:noFill/>
+          </a:ln>
+        </p:spPr>
+        <p:txBody>
+          <a:bodyPr wrap="none" lIns="0" tIns="0" rIns="0" bIns="0" anchor="t">
+            <a:noAutofit/>
+          </a:bodyPr>
+          <a:lstStyle/>
+          <a:p>
+            <a:pPr marL="0" indent="0">
+              <a:lnSpc>
+                <a:spcPts val="1950"/>
+              </a:lnSpc>
+              <a:spcAft>
+                <a:spcPts val="0"/>
+              </a:spcAft>
+              <a:buNone/>
+            </a:pPr>
+            <a:r>
+              <a:rPr lang="en-US" sz="1500" b="0">
+                <a:solidFill>
+                  <a:srgbClr val="202B33"/>
+                </a:solidFill>
+                <a:latin typeface="Arial"/>
+                <a:ea typeface="Arial"/>
+                <a:cs typeface="Arial"/>
+              </a:rPr>
+              <a:t xml:space="preserve">Thoughtworks, Inverse Conway Maneuver —</a:t>
+            </a:r>
+            <a:endParaRPr lang="en-US" sz="1500"/>
+          </a:p>
+          <a:p>
+            <a:pPr marL="0" indent="0">
+              <a:lnSpc>
+                <a:spcPts val="1950"/>
+              </a:lnSpc>
+              <a:spcAft>
+                <a:spcPts val="0"/>
+              </a:spcAft>
+              <a:buNone/>
+            </a:pPr>
+            <a:r>
+              <a:rPr lang="en-US" sz="1500" b="0">
+                <a:solidFill>
+                  <a:srgbClr val="202B33"/>
+                </a:solidFill>
+                <a:latin typeface="Arial"/>
+                <a:ea typeface="Arial"/>
+                <a:cs typeface="Arial"/>
+              </a:rPr>
+              <a:t xml:space="preserve">https://www.thoughtworks.com/en-br/radar/techniques/inverse-conway-maneuver),</a:t>
+            </a:r>
+            <a:endParaRPr lang="en-US" sz="1500"/>
+          </a:p>
+          <a:p>
+            <a:pPr marL="0" indent="0">
+              <a:lnSpc>
+                <a:spcPts val="1950"/>
+              </a:lnSpc>
+              <a:spcAft>
+                <a:spcPts val="0"/>
+              </a:spcAft>
+              <a:buNone/>
+            </a:pPr>
+            <a:r>
+              <a:rPr lang="en-US" sz="1500" b="0">
+                <a:solidFill>
+                  <a:srgbClr val="202B33"/>
+                </a:solidFill>
+                <a:latin typeface="Arial"/>
+                <a:ea typeface="Arial"/>
+                <a:cs typeface="Arial"/>
+              </a:rPr>
+              <a:t xml:space="preserve">2014/2015. Skelton and Pais, [Team</a:t>
+            </a:r>
+            <a:endParaRPr lang="en-US" sz="1500"/>
+          </a:p>
+          <a:p>
+            <a:pPr marL="0" indent="0">
+              <a:lnSpc>
+                <a:spcPts val="1950"/>
+              </a:lnSpc>
+              <a:spcAft>
+                <a:spcPts val="0"/>
+              </a:spcAft>
+              <a:buNone/>
+            </a:pPr>
+            <a:r>
+              <a:rPr lang="en-US" sz="1500" b="0">
+                <a:solidFill>
+                  <a:srgbClr val="202B33"/>
+                </a:solidFill>
+                <a:latin typeface="Arial"/>
+                <a:ea typeface="Arial"/>
+                <a:cs typeface="Arial"/>
+              </a:rPr>
+              <a:t xml:space="preserve">Topologies interaction</a:t>
+            </a:r>
+            <a:endParaRPr lang="en-US" sz="1500"/>
+          </a:p>
+          <a:p>
+            <a:pPr marL="0" indent="0">
+              <a:lnSpc>
+                <a:spcPts val="1950"/>
+              </a:lnSpc>
+              <a:spcAft>
+                <a:spcPts val="0"/>
+              </a:spcAft>
+              <a:buNone/>
+            </a:pPr>
+            <a:r>
+              <a:rPr lang="en-US" sz="1500" b="0">
+                <a:solidFill>
+                  <a:srgbClr val="202B33"/>
+                </a:solidFill>
+                <a:latin typeface="Arial"/>
+                <a:ea typeface="Arial"/>
+                <a:cs typeface="Arial"/>
+              </a:rPr>
+              <a:t xml:space="preserve">modes](https://teamtopologies.com/key-concepts.</a:t>
+            </a:r>
+            <a:endParaRPr lang="en-US" sz="1500"/>
+          </a:p>
+          <a:p>
+            <a:pPr marL="0" indent="0">
+              <a:lnSpc>
+                <a:spcPts val="1950"/>
+              </a:lnSpc>
+              <a:spcAft>
+                <a:spcPts val="0"/>
+              </a:spcAft>
+              <a:buNone/>
+            </a:pPr>
+            <a:r>
+              <a:rPr lang="en-US" sz="1500" b="0">
+                <a:solidFill>
+                  <a:srgbClr val="202B33"/>
+                </a:solidFill>
+                <a:latin typeface="Arial"/>
+                <a:ea typeface="Arial"/>
+                <a:cs typeface="Arial"/>
+              </a:rPr>
+              <a:t xml:space="preserve"/>
+            </a:r>
+            <a:endParaRPr lang="en-US" sz="1500"/>
+          </a:p>
+          <a:p>
+            <a:pPr marL="0" indent="0">
+              <a:lnSpc>
+                <a:spcPts val="1950"/>
+              </a:lnSpc>
+              <a:spcAft>
+                <a:spcPts val="0"/>
+              </a:spcAft>
+              <a:buNone/>
+            </a:pPr>
+            <a:r>
+              <a:rPr lang="en-US" sz="1500" b="0">
+                <a:solidFill>
+                  <a:srgbClr val="202B33"/>
+                </a:solidFill>
+                <a:latin typeface="Arial"/>
+                <a:ea typeface="Arial"/>
+                <a:cs typeface="Arial"/>
+              </a:rPr>
+              <a:t xml:space="preserve">Donald T. Campbell (1979), Assessing the</a:t>
+            </a:r>
+            <a:endParaRPr lang="en-US" sz="1500"/>
+          </a:p>
+          <a:p>
+            <a:pPr marL="0" indent="0">
+              <a:lnSpc>
+                <a:spcPts val="1950"/>
+              </a:lnSpc>
+              <a:spcAft>
+                <a:spcPts val="0"/>
+              </a:spcAft>
+              <a:buNone/>
+            </a:pPr>
+            <a:r>
+              <a:rPr lang="en-US" sz="1500" b="0">
+                <a:solidFill>
+                  <a:srgbClr val="202B33"/>
+                </a:solidFill>
+                <a:latin typeface="Arial"/>
+                <a:ea typeface="Arial"/>
+                <a:cs typeface="Arial"/>
+              </a:rPr>
+              <a:t xml:space="preserve">impact of planned social change —</a:t>
+            </a:r>
+            <a:endParaRPr lang="en-US" sz="1500"/>
+          </a:p>
+          <a:p>
+            <a:pPr marL="0" indent="0">
+              <a:lnSpc>
+                <a:spcPts val="1950"/>
+              </a:lnSpc>
+              <a:spcAft>
+                <a:spcPts val="0"/>
+              </a:spcAft>
+              <a:buNone/>
+            </a:pPr>
+            <a:r>
+              <a:rPr lang="en-US" sz="1500" b="0">
+                <a:solidFill>
+                  <a:srgbClr val="202B33"/>
+                </a:solidFill>
+                <a:latin typeface="Arial"/>
+                <a:ea typeface="Arial"/>
+                <a:cs typeface="Arial"/>
+              </a:rPr>
+              <a:t xml:space="preserve">https://doi.org/10.1016/0149-7189%2879%2990048-X),</a:t>
+            </a:r>
+            <a:endParaRPr lang="en-US" sz="1500"/>
+          </a:p>
+          <a:p>
+            <a:pPr marL="0" indent="0">
+              <a:lnSpc>
+                <a:spcPts val="1950"/>
+              </a:lnSpc>
+              <a:spcAft>
+                <a:spcPts val="0"/>
+              </a:spcAft>
+              <a:buNone/>
+            </a:pPr>
+            <a:r>
+              <a:rPr lang="en-US" sz="1500" b="0">
+                <a:solidFill>
+                  <a:srgbClr val="202B33"/>
+                </a:solidFill>
+                <a:latin typeface="Arial"/>
+                <a:ea typeface="Arial"/>
+                <a:cs typeface="Arial"/>
+              </a:rPr>
+              <a:t xml:space="preserve">Evaluation and Program Planning 2(1, 67–90.</a:t>
+            </a:r>
+            <a:endParaRPr lang="en-US" sz="1500"/>
+          </a:p>
+        </p:txBody>
+      </p:sp>
+      <p:sp>
+        <p:nvSpPr>
+          <p:cNvPr id="6" name="Text 6"/>
+          <p:cNvSpPr txBox="1"/>
+          <p:nvPr/>
+        </p:nvSpPr>
+        <p:spPr>
+          <a:xfrm>
+            <a:off x="457200" y="7486650"/>
+            <a:ext cx="8820150" cy="190500"/>
+          </a:xfrm>
+          <a:prstGeom prst="rect">
+            <a:avLst/>
+          </a:prstGeom>
+          <a:noFill/>
+          <a:ln>
+            <a:noFill/>
+          </a:ln>
+        </p:spPr>
+        <p:txBody>
+          <a:bodyPr wrap="none" lIns="0" tIns="0" rIns="0" bIns="0" anchor="t">
+            <a:noAutofit/>
+          </a:bodyPr>
+          <a:lstStyle/>
+          <a:p>
+            <a:pPr marL="0" indent="0">
+              <a:lnSpc>
+                <a:spcPts val="1268"/>
+              </a:lnSpc>
+              <a:spcAft>
+                <a:spcPts val="0"/>
+              </a:spcAft>
+              <a:buNone/>
+            </a:pPr>
+            <a:r>
+              <a:rPr lang="en-US" sz="975" b="0">
+                <a:solidFill>
+                  <a:srgbClr val="48555B"/>
+                </a:solidFill>
+                <a:latin typeface="Arial"/>
+                <a:ea typeface="Arial"/>
+                <a:cs typeface="Arial"/>
+              </a:rPr>
+              <a:t xml:space="preserve">The Future of Product Engineering: Break the Mirror on Purpose</a:t>
+            </a:r>
+            <a:endParaRPr lang="en-US" sz="975"/>
+          </a:p>
+        </p:txBody>
+      </p:sp>
+      <p:sp>
+        <p:nvSpPr>
+          <p:cNvPr id="7" name="Text 7"/>
+          <p:cNvSpPr txBox="1"/>
+          <p:nvPr/>
+        </p:nvSpPr>
+        <p:spPr>
+          <a:xfrm>
+            <a:off x="9391650" y="7486650"/>
+            <a:ext cx="238125" cy="190500"/>
+          </a:xfrm>
+          <a:prstGeom prst="rect">
+            <a:avLst/>
+          </a:prstGeom>
+          <a:noFill/>
+          <a:ln>
+            <a:noFill/>
+          </a:ln>
+        </p:spPr>
+        <p:txBody>
+          <a:bodyPr wrap="none" lIns="0" tIns="0" rIns="0" bIns="0" anchor="t">
+            <a:noAutofit/>
+          </a:bodyPr>
+          <a:lstStyle/>
+          <a:p>
+            <a:pPr marL="0" indent="0">
+              <a:lnSpc>
+                <a:spcPts val="1268"/>
+              </a:lnSpc>
+              <a:spcAft>
+                <a:spcPts val="0"/>
+              </a:spcAft>
+              <a:buNone/>
+            </a:pPr>
+            <a:r>
+              <a:rPr lang="en-US" sz="975" b="0">
+                <a:solidFill>
+                  <a:srgbClr val="48555B"/>
+                </a:solidFill>
+                <a:latin typeface="Arial"/>
+                <a:ea typeface="Arial"/>
+                <a:cs typeface="Arial"/>
+              </a:rPr>
+              <a:t xml:space="preserve">11</a:t>
             </a:r>
             <a:endParaRPr lang="en-US" sz="975"/>
           </a:p>
@@ -4552,7 +7435,7 @@
                 <a:ea typeface="Arial"/>
                 <a:cs typeface="Arial"/>
               </a:rPr>
-              <a:t xml:space="preserve">01 / 07    SOURCE SLIDE 1</a:t>
+              <a:t xml:space="preserve">01 / 08    SOURCE SLIDE 1</a:t>
             </a:r>
             <a:endParaRPr lang="en-US" sz="1050"/>
           </a:p>
@@ -5477,7 +8360,7 @@
                 <a:ea typeface="Arial"/>
                 <a:cs typeface="Arial"/>
               </a:rPr>
-              <a:t xml:space="preserve">02 / 07    SOURCE SLIDE 3</a:t>
+              <a:t xml:space="preserve">02 / 08    SOURCE SLIDE 3</a:t>
             </a:r>
             <a:endParaRPr lang="en-US" sz="1050"/>
           </a:p>
@@ -6379,7 +9262,7 @@
                 <a:ea typeface="Arial"/>
                 <a:cs typeface="Arial"/>
               </a:rPr>
-              <a:t xml:space="preserve">03 / 07    SOURCE SLIDE 5</a:t>
+              <a:t xml:space="preserve">03 / 08    SOURCE SLIDE 5</a:t>
             </a:r>
             <a:endParaRPr lang="en-US" sz="1050"/>
           </a:p>
@@ -7313,7 +10196,7 @@
                 <a:ea typeface="Arial"/>
                 <a:cs typeface="Arial"/>
               </a:rPr>
-              <a:t xml:space="preserve">04 / 07    SOURCE SLIDE 10</a:t>
+              <a:t xml:space="preserve">04 / 08    SOURCE SLIDE 10</a:t>
             </a:r>
             <a:endParaRPr lang="en-US" sz="1050"/>
           </a:p>
@@ -8123,7 +11006,7 @@
                 <a:ea typeface="Arial"/>
                 <a:cs typeface="Arial"/>
               </a:rPr>
-              <a:t xml:space="preserve">05 / 07    SOURCE SLIDE 11</a:t>
+              <a:t xml:space="preserve">05 / 08    SOURCE SLIDE 11</a:t>
             </a:r>
             <a:endParaRPr lang="en-US" sz="1050"/>
           </a:p>
@@ -9048,7 +11931,7 @@
                 <a:ea typeface="Arial"/>
                 <a:cs typeface="Arial"/>
               </a:rPr>
-              <a:t xml:space="preserve">06 / 07    SOURCE SLIDE 12</a:t>
+              <a:t xml:space="preserve">06 / 08    SOURCE SLIDE 12</a:t>
             </a:r>
             <a:endParaRPr lang="en-US" sz="1050"/>
           </a:p>
@@ -9678,53 +12561,53 @@
                 <a:ea typeface="Arial"/>
                 <a:cs typeface="Arial"/>
               </a:rPr>
-              <a:t xml:space="preserve">person approves them. The system must</a:t>
-            </a:r>
-            <a:endParaRPr lang="en-US" sz="1500"/>
-          </a:p>
-          <a:p>
-            <a:pPr marL="0" indent="0">
-              <a:lnSpc>
-                <a:spcPts val="1950"/>
-              </a:lnSpc>
-              <a:spcAft>
-                <a:spcPts val="0"/>
-              </a:spcAft>
-              <a:buNone/>
-            </a:pPr>
-            <a:r>
-              <a:rPr lang="en-US" sz="1500" b="0">
-                <a:solidFill>
-                  <a:srgbClr val="202B33"/>
-                </a:solidFill>
-                <a:latin typeface="Arial"/>
-                <a:ea typeface="Arial"/>
-                <a:cs typeface="Arial"/>
-              </a:rPr>
-              <a:t xml:space="preserve">enforce that permission, not merely mention</a:t>
-            </a:r>
-            <a:endParaRPr lang="en-US" sz="1500"/>
-          </a:p>
-          <a:p>
-            <a:pPr marL="0" indent="0">
-              <a:lnSpc>
-                <a:spcPts val="1950"/>
-              </a:lnSpc>
-              <a:spcAft>
-                <a:spcPts val="0"/>
-              </a:spcAft>
-              <a:buNone/>
-            </a:pPr>
-            <a:r>
-              <a:rPr lang="en-US" sz="1500" b="0">
-                <a:solidFill>
-                  <a:srgbClr val="202B33"/>
-                </a:solidFill>
-                <a:latin typeface="Arial"/>
-                <a:ea typeface="Arial"/>
-                <a:cs typeface="Arial"/>
-              </a:rPr>
-              <a:t xml:space="preserve">it in the prompt.</a:t>
+              <a:t xml:space="preserve">person approves them, and the system</a:t>
+            </a:r>
+            <a:endParaRPr lang="en-US" sz="1500"/>
+          </a:p>
+          <a:p>
+            <a:pPr marL="0" indent="0">
+              <a:lnSpc>
+                <a:spcPts val="1950"/>
+              </a:lnSpc>
+              <a:spcAft>
+                <a:spcPts val="0"/>
+              </a:spcAft>
+              <a:buNone/>
+            </a:pPr>
+            <a:r>
+              <a:rPr lang="en-US" sz="1500" b="0">
+                <a:solidFill>
+                  <a:srgbClr val="202B33"/>
+                </a:solidFill>
+                <a:latin typeface="Arial"/>
+                <a:ea typeface="Arial"/>
+                <a:cs typeface="Arial"/>
+              </a:rPr>
+              <a:t xml:space="preserve">enforces that permission rather than</a:t>
+            </a:r>
+            <a:endParaRPr lang="en-US" sz="1500"/>
+          </a:p>
+          <a:p>
+            <a:pPr marL="0" indent="0">
+              <a:lnSpc>
+                <a:spcPts val="1950"/>
+              </a:lnSpc>
+              <a:spcAft>
+                <a:spcPts val="0"/>
+              </a:spcAft>
+              <a:buNone/>
+            </a:pPr>
+            <a:r>
+              <a:rPr lang="en-US" sz="1500" b="0">
+                <a:solidFill>
+                  <a:srgbClr val="202B33"/>
+                </a:solidFill>
+                <a:latin typeface="Arial"/>
+                <a:ea typeface="Arial"/>
+                <a:cs typeface="Arial"/>
+              </a:rPr>
+              <a:t xml:space="preserve">mentioning it in a prompt.</a:t>
             </a:r>
             <a:endParaRPr lang="en-US" sz="1500"/>
           </a:p>
@@ -9904,7 +12787,7 @@
                 <a:ea typeface="Arial"/>
                 <a:cs typeface="Arial"/>
               </a:rPr>
-              <a:t xml:space="preserve">07 / 07    SOURCE SLIDE 15</a:t>
+              <a:t xml:space="preserve">07 / 08    SOURCE SLIDE 15</a:t>
             </a:r>
             <a:endParaRPr lang="en-US" sz="1050"/>
           </a:p>
@@ -9953,7 +12836,7 @@
                 <a:ea typeface="Arial"/>
                 <a:cs typeface="Arial"/>
               </a:rPr>
-              <a:t xml:space="preserve">Break the mirror on purpose</a:t>
+              <a:t xml:space="preserve">Minority Report, With Terminals</a:t>
             </a:r>
             <a:endParaRPr lang="en-US" sz="2550"/>
           </a:p>
@@ -10002,352 +12885,329 @@
                 <a:ea typeface="Arial"/>
                 <a:cs typeface="Arial"/>
               </a:rPr>
-              <a:t xml:space="preserve">Reprice the handoffs. Draw the interfaces.</a:t>
-            </a:r>
-            <a:endParaRPr lang="en-US" sz="1500"/>
-          </a:p>
-          <a:p>
-            <a:pPr marL="0" indent="0">
-              <a:lnSpc>
-                <a:spcPts val="1950"/>
-              </a:lnSpc>
-              <a:spcAft>
-                <a:spcPts val="0"/>
-              </a:spcAft>
-              <a:buNone/>
-            </a:pPr>
-            <a:r>
-              <a:rPr lang="en-US" sz="1500" b="0">
-                <a:solidFill>
-                  <a:srgbClr val="202B33"/>
-                </a:solidFill>
-                <a:latin typeface="Arial"/>
-                <a:ea typeface="Arial"/>
-                <a:cs typeface="Arial"/>
-              </a:rPr>
-              <a:t xml:space="preserve"/>
-            </a:r>
-            <a:endParaRPr lang="en-US" sz="1500"/>
-          </a:p>
-          <a:p>
-            <a:pPr marL="0" indent="0">
-              <a:lnSpc>
-                <a:spcPts val="1950"/>
-              </a:lnSpc>
-              <a:spcAft>
-                <a:spcPts val="0"/>
-              </a:spcAft>
-              <a:buNone/>
-            </a:pPr>
-            <a:r>
-              <a:rPr lang="en-US" sz="1500" b="0">
-                <a:solidFill>
-                  <a:srgbClr val="202B33"/>
-                </a:solidFill>
-                <a:latin typeface="Arial"/>
-                <a:ea typeface="Arial"/>
-                <a:cs typeface="Arial"/>
-              </a:rPr>
-              <a:t xml:space="preserve">Automate the right things. Keep the taste.</a:t>
-            </a:r>
-            <a:endParaRPr lang="en-US" sz="1500"/>
-          </a:p>
-          <a:p>
-            <a:pPr marL="0" indent="0">
-              <a:lnSpc>
-                <a:spcPts val="1950"/>
-              </a:lnSpc>
-              <a:spcAft>
-                <a:spcPts val="0"/>
-              </a:spcAft>
-              <a:buNone/>
-            </a:pPr>
-            <a:r>
-              <a:rPr lang="en-US" sz="1500" b="0">
-                <a:solidFill>
-                  <a:srgbClr val="202B33"/>
-                </a:solidFill>
-                <a:latin typeface="Arial"/>
-                <a:ea typeface="Arial"/>
-                <a:cs typeface="Arial"/>
-              </a:rPr>
-              <a:t xml:space="preserve"/>
-            </a:r>
-            <a:endParaRPr lang="en-US" sz="1500"/>
-          </a:p>
-          <a:p>
-            <a:pPr marL="0" indent="0">
-              <a:lnSpc>
-                <a:spcPts val="1950"/>
-              </a:lnSpc>
-              <a:spcAft>
-                <a:spcPts val="0"/>
-              </a:spcAft>
-              <a:buNone/>
-            </a:pPr>
-            <a:r>
-              <a:rPr lang="en-US" sz="1500" b="0">
-                <a:solidFill>
-                  <a:srgbClr val="202B33"/>
-                </a:solidFill>
-                <a:latin typeface="Arial"/>
-                <a:ea typeface="Arial"/>
-                <a:cs typeface="Arial"/>
-              </a:rPr>
-              <a:t xml:space="preserve">Back to the org chart. Some of those</a:t>
-            </a:r>
-            <a:endParaRPr lang="en-US" sz="1500"/>
-          </a:p>
-          <a:p>
-            <a:pPr marL="0" indent="0">
-              <a:lnSpc>
-                <a:spcPts val="1950"/>
-              </a:lnSpc>
-              <a:spcAft>
-                <a:spcPts val="0"/>
-              </a:spcAft>
-              <a:buNone/>
-            </a:pPr>
-            <a:r>
-              <a:rPr lang="en-US" sz="1500" b="0">
-                <a:solidFill>
-                  <a:srgbClr val="202B33"/>
-                </a:solidFill>
-                <a:latin typeface="Arial"/>
-                <a:ea typeface="Arial"/>
-                <a:cs typeface="Arial"/>
-              </a:rPr>
-              <a:t xml:space="preserve">boundaries exist because the work really is</a:t>
-            </a:r>
-            <a:endParaRPr lang="en-US" sz="1500"/>
-          </a:p>
-          <a:p>
-            <a:pPr marL="0" indent="0">
-              <a:lnSpc>
-                <a:spcPts val="1950"/>
-              </a:lnSpc>
-              <a:spcAft>
-                <a:spcPts val="0"/>
-              </a:spcAft>
-              <a:buNone/>
-            </a:pPr>
-            <a:r>
-              <a:rPr lang="en-US" sz="1500" b="0">
-                <a:solidFill>
-                  <a:srgbClr val="202B33"/>
-                </a:solidFill>
-                <a:latin typeface="Arial"/>
-                <a:ea typeface="Arial"/>
-                <a:cs typeface="Arial"/>
-              </a:rPr>
-              <a:t xml:space="preserve">different. Some exist because the person</a:t>
-            </a:r>
-            <a:endParaRPr lang="en-US" sz="1500"/>
-          </a:p>
-          <a:p>
-            <a:pPr marL="0" indent="0">
-              <a:lnSpc>
-                <a:spcPts val="1950"/>
-              </a:lnSpc>
-              <a:spcAft>
-                <a:spcPts val="0"/>
-              </a:spcAft>
-              <a:buNone/>
-            </a:pPr>
-            <a:r>
-              <a:rPr lang="en-US" sz="1500" b="0">
-                <a:solidFill>
-                  <a:srgbClr val="202B33"/>
-                </a:solidFill>
-                <a:latin typeface="Arial"/>
-                <a:ea typeface="Arial"/>
-                <a:cs typeface="Arial"/>
-              </a:rPr>
-              <a:t xml:space="preserve">with the spreadsheet sat in another</a:t>
-            </a:r>
-            <a:endParaRPr lang="en-US" sz="1500"/>
-          </a:p>
-          <a:p>
-            <a:pPr marL="0" indent="0">
-              <a:lnSpc>
-                <a:spcPts val="1950"/>
-              </a:lnSpc>
-              <a:spcAft>
-                <a:spcPts val="0"/>
-              </a:spcAft>
-              <a:buNone/>
-            </a:pPr>
-            <a:r>
-              <a:rPr lang="en-US" sz="1500" b="0">
-                <a:solidFill>
-                  <a:srgbClr val="202B33"/>
-                </a:solidFill>
-                <a:latin typeface="Arial"/>
-                <a:ea typeface="Arial"/>
-                <a:cs typeface="Arial"/>
-              </a:rPr>
-              <a:t xml:space="preserve">department. We should know which before</a:t>
-            </a:r>
-            <a:endParaRPr lang="en-US" sz="1500"/>
-          </a:p>
-          <a:p>
-            <a:pPr marL="0" indent="0">
-              <a:lnSpc>
-                <a:spcPts val="1950"/>
-              </a:lnSpc>
-              <a:spcAft>
-                <a:spcPts val="0"/>
-              </a:spcAft>
-              <a:buNone/>
-            </a:pPr>
-            <a:r>
-              <a:rPr lang="en-US" sz="1500" b="0">
-                <a:solidFill>
-                  <a:srgbClr val="202B33"/>
-                </a:solidFill>
-                <a:latin typeface="Arial"/>
-                <a:ea typeface="Arial"/>
-                <a:cs typeface="Arial"/>
-              </a:rPr>
-              <a:t xml:space="preserve">teaching agents to repeat them.</a:t>
-            </a:r>
-            <a:endParaRPr lang="en-US" sz="1500"/>
-          </a:p>
-          <a:p>
-            <a:pPr marL="0" indent="0">
-              <a:lnSpc>
-                <a:spcPts val="1950"/>
-              </a:lnSpc>
-              <a:spcAft>
-                <a:spcPts val="0"/>
-              </a:spcAft>
-              <a:buNone/>
-            </a:pPr>
-            <a:r>
-              <a:rPr lang="en-US" sz="1500" b="0">
-                <a:solidFill>
-                  <a:srgbClr val="202B33"/>
-                </a:solidFill>
-                <a:latin typeface="Arial"/>
-                <a:ea typeface="Arial"/>
-                <a:cs typeface="Arial"/>
-              </a:rPr>
-              <a:t xml:space="preserve"/>
-            </a:r>
-            <a:endParaRPr lang="en-US" sz="1500"/>
-          </a:p>
-          <a:p>
-            <a:pPr marL="0" indent="0">
-              <a:lnSpc>
-                <a:spcPts val="1950"/>
-              </a:lnSpc>
-              <a:spcAft>
-                <a:spcPts val="0"/>
-              </a:spcAft>
-              <a:buNone/>
-            </a:pPr>
-            <a:r>
-              <a:rPr lang="en-US" sz="1500" b="0">
-                <a:solidFill>
-                  <a:srgbClr val="202B33"/>
-                </a:solidFill>
-                <a:latin typeface="Arial"/>
-                <a:ea typeface="Arial"/>
-                <a:cs typeface="Arial"/>
-              </a:rPr>
-              <a:t xml:space="preserve">Take one boundary. What arrives, what</a:t>
-            </a:r>
-            <a:endParaRPr lang="en-US" sz="1500"/>
-          </a:p>
-          <a:p>
-            <a:pPr marL="0" indent="0">
-              <a:lnSpc>
-                <a:spcPts val="1950"/>
-              </a:lnSpc>
-              <a:spcAft>
-                <a:spcPts val="0"/>
-              </a:spcAft>
-              <a:buNone/>
-            </a:pPr>
-            <a:r>
-              <a:rPr lang="en-US" sz="1500" b="0">
-                <a:solidFill>
-                  <a:srgbClr val="202B33"/>
-                </a:solidFill>
-                <a:latin typeface="Arial"/>
-                <a:ea typeface="Arial"/>
-                <a:cs typeface="Arial"/>
-              </a:rPr>
-              <a:t xml:space="preserve">leaves, who decides, and what did it cost</a:t>
-            </a:r>
-            <a:endParaRPr lang="en-US" sz="1500"/>
-          </a:p>
-          <a:p>
-            <a:pPr marL="0" indent="0">
-              <a:lnSpc>
-                <a:spcPts val="1950"/>
-              </a:lnSpc>
-              <a:spcAft>
-                <a:spcPts val="0"/>
-              </a:spcAft>
-              <a:buNone/>
-            </a:pPr>
-            <a:r>
-              <a:rPr lang="en-US" sz="1500" b="0">
-                <a:solidFill>
-                  <a:srgbClr val="202B33"/>
-                </a:solidFill>
-                <a:latin typeface="Arial"/>
-                <a:ea typeface="Arial"/>
-                <a:cs typeface="Arial"/>
-              </a:rPr>
-              <a:t xml:space="preserve">last week? Make collection cheaper without</a:t>
-            </a:r>
-            <a:endParaRPr lang="en-US" sz="1500"/>
-          </a:p>
-          <a:p>
-            <a:pPr marL="0" indent="0">
-              <a:lnSpc>
-                <a:spcPts val="1950"/>
-              </a:lnSpc>
-              <a:spcAft>
-                <a:spcPts val="0"/>
-              </a:spcAft>
-              <a:buNone/>
-            </a:pPr>
-            <a:r>
-              <a:rPr lang="en-US" sz="1500" b="0">
-                <a:solidFill>
-                  <a:srgbClr val="202B33"/>
-                </a:solidFill>
-                <a:latin typeface="Arial"/>
-                <a:ea typeface="Arial"/>
-                <a:cs typeface="Arial"/>
-              </a:rPr>
-              <a:t xml:space="preserve">erasing the disagreement that the handoff</a:t>
-            </a:r>
-            <a:endParaRPr lang="en-US" sz="1500"/>
-          </a:p>
-          <a:p>
-            <a:pPr marL="0" indent="0">
-              <a:lnSpc>
-                <a:spcPts val="1950"/>
-              </a:lnSpc>
-              <a:spcAft>
-                <a:spcPts val="0"/>
-              </a:spcAft>
-              <a:buNone/>
-            </a:pPr>
-            <a:r>
-              <a:rPr lang="en-US" sz="1500" b="0">
-                <a:solidFill>
-                  <a:srgbClr val="202B33"/>
-                </a:solidFill>
-                <a:latin typeface="Arial"/>
-                <a:ea typeface="Arial"/>
-                <a:cs typeface="Arial"/>
-              </a:rPr>
-              <a:t xml:space="preserve">used to expose. Keep the product review</a:t>
+              <a:t xml:space="preserve">Generated UI, adapting in real time, per</a:t>
+            </a:r>
+            <a:endParaRPr lang="en-US" sz="1500"/>
+          </a:p>
+          <a:p>
+            <a:pPr marL="0" indent="0">
+              <a:lnSpc>
+                <a:spcPts val="1950"/>
+              </a:lnSpc>
+              <a:spcAft>
+                <a:spcPts val="0"/>
+              </a:spcAft>
+              <a:buNone/>
+            </a:pPr>
+            <a:r>
+              <a:rPr lang="en-US" sz="1500" b="0">
+                <a:solidFill>
+                  <a:srgbClr val="202B33"/>
+                </a:solidFill>
+                <a:latin typeface="Arial"/>
+                <a:ea typeface="Arial"/>
+                <a:cs typeface="Arial"/>
+              </a:rPr>
+              <a:t xml:space="preserve">person</a:t>
+            </a:r>
+            <a:endParaRPr lang="en-US" sz="1500"/>
+          </a:p>
+          <a:p>
+            <a:pPr marL="0" indent="0">
+              <a:lnSpc>
+                <a:spcPts val="1950"/>
+              </a:lnSpc>
+              <a:spcAft>
+                <a:spcPts val="0"/>
+              </a:spcAft>
+              <a:buNone/>
+            </a:pPr>
+            <a:r>
+              <a:rPr lang="en-US" sz="1500" b="0">
+                <a:solidFill>
+                  <a:srgbClr val="202B33"/>
+                </a:solidFill>
+                <a:latin typeface="Arial"/>
+                <a:ea typeface="Arial"/>
+                <a:cs typeface="Arial"/>
+              </a:rPr>
+              <a:t xml:space="preserve"/>
+            </a:r>
+            <a:endParaRPr lang="en-US" sz="1500"/>
+          </a:p>
+          <a:p>
+            <a:pPr marL="0" indent="0">
+              <a:lnSpc>
+                <a:spcPts val="1950"/>
+              </a:lnSpc>
+              <a:spcAft>
+                <a:spcPts val="0"/>
+              </a:spcAft>
+              <a:buNone/>
+            </a:pPr>
+            <a:r>
+              <a:rPr lang="en-US" sz="1500" b="0">
+                <a:solidFill>
+                  <a:srgbClr val="202B33"/>
+                </a:solidFill>
+                <a:latin typeface="Arial"/>
+                <a:ea typeface="Arial"/>
+                <a:cs typeface="Arial"/>
+              </a:rPr>
+              <a:t xml:space="preserve">Yes, the software you mastered is going</a:t>
+            </a:r>
+            <a:endParaRPr lang="en-US" sz="1500"/>
+          </a:p>
+          <a:p>
+            <a:pPr marL="0" indent="0">
+              <a:lnSpc>
+                <a:spcPts val="1950"/>
+              </a:lnSpc>
+              <a:spcAft>
+                <a:spcPts val="0"/>
+              </a:spcAft>
+              <a:buNone/>
+            </a:pPr>
+            <a:r>
+              <a:rPr lang="en-US" sz="1500" b="0">
+                <a:solidFill>
+                  <a:srgbClr val="202B33"/>
+                </a:solidFill>
+                <a:latin typeface="Arial"/>
+                <a:ea typeface="Arial"/>
+                <a:cs typeface="Arial"/>
+              </a:rPr>
+              <a:t xml:space="preserve">away. As you know it.</a:t>
+            </a:r>
+            <a:endParaRPr lang="en-US" sz="1500"/>
+          </a:p>
+          <a:p>
+            <a:pPr marL="0" indent="0">
+              <a:lnSpc>
+                <a:spcPts val="1950"/>
+              </a:lnSpc>
+              <a:spcAft>
+                <a:spcPts val="0"/>
+              </a:spcAft>
+              <a:buNone/>
+            </a:pPr>
+            <a:r>
+              <a:rPr lang="en-US" sz="1500" b="0">
+                <a:solidFill>
+                  <a:srgbClr val="202B33"/>
+                </a:solidFill>
+                <a:latin typeface="Arial"/>
+                <a:ea typeface="Arial"/>
+                <a:cs typeface="Arial"/>
+              </a:rPr>
+              <a:t xml:space="preserve"/>
+            </a:r>
+            <a:endParaRPr lang="en-US" sz="1500"/>
+          </a:p>
+          <a:p>
+            <a:pPr marL="0" indent="0">
+              <a:lnSpc>
+                <a:spcPts val="1950"/>
+              </a:lnSpc>
+              <a:spcAft>
+                <a:spcPts val="0"/>
+              </a:spcAft>
+              <a:buNone/>
+            </a:pPr>
+            <a:r>
+              <a:rPr lang="en-US" sz="1500" b="0">
+                <a:solidFill>
+                  <a:srgbClr val="202B33"/>
+                </a:solidFill>
+                <a:latin typeface="Arial"/>
+                <a:ea typeface="Arial"/>
+                <a:cs typeface="Arial"/>
+              </a:rPr>
+              <a:t xml:space="preserve">The channel is not spoken for.</a:t>
+            </a:r>
+            <a:endParaRPr lang="en-US" sz="1500"/>
+          </a:p>
+          <a:p>
+            <a:pPr marL="0" indent="0">
+              <a:lnSpc>
+                <a:spcPts val="1950"/>
+              </a:lnSpc>
+              <a:spcAft>
+                <a:spcPts val="0"/>
+              </a:spcAft>
+              <a:buNone/>
+            </a:pPr>
+            <a:r>
+              <a:rPr lang="en-US" sz="1500" b="0">
+                <a:solidFill>
+                  <a:srgbClr val="202B33"/>
+                </a:solidFill>
+                <a:latin typeface="Arial"/>
+                <a:ea typeface="Arial"/>
+                <a:cs typeface="Arial"/>
+              </a:rPr>
+              <a:t xml:space="preserve"/>
+            </a:r>
+            <a:endParaRPr lang="en-US" sz="1500"/>
+          </a:p>
+          <a:p>
+            <a:pPr marL="0" indent="0">
+              <a:lnSpc>
+                <a:spcPts val="1950"/>
+              </a:lnSpc>
+              <a:spcAft>
+                <a:spcPts val="0"/>
+              </a:spcAft>
+              <a:buNone/>
+            </a:pPr>
+            <a:r>
+              <a:rPr lang="en-US" sz="1500" b="0">
+                <a:solidFill>
+                  <a:srgbClr val="202B33"/>
+                </a:solidFill>
+                <a:latin typeface="Arial"/>
+                <a:ea typeface="Arial"/>
+                <a:cs typeface="Arial"/>
+              </a:rPr>
+              <a:t xml:space="preserve">Which raises the question this room should</a:t>
+            </a:r>
+            <a:endParaRPr lang="en-US" sz="1500"/>
+          </a:p>
+          <a:p>
+            <a:pPr marL="0" indent="0">
+              <a:lnSpc>
+                <a:spcPts val="1950"/>
+              </a:lnSpc>
+              <a:spcAft>
+                <a:spcPts val="0"/>
+              </a:spcAft>
+              <a:buNone/>
+            </a:pPr>
+            <a:r>
+              <a:rPr lang="en-US" sz="1500" b="0">
+                <a:solidFill>
+                  <a:srgbClr val="202B33"/>
+                </a:solidFill>
+                <a:latin typeface="Arial"/>
+                <a:ea typeface="Arial"/>
+                <a:cs typeface="Arial"/>
+              </a:rPr>
+              <a:t xml:space="preserve">actually be arguing about. Should OpenAI</a:t>
+            </a:r>
+            <a:endParaRPr lang="en-US" sz="1500"/>
+          </a:p>
+          <a:p>
+            <a:pPr marL="0" indent="0">
+              <a:lnSpc>
+                <a:spcPts val="1950"/>
+              </a:lnSpc>
+              <a:spcAft>
+                <a:spcPts val="0"/>
+              </a:spcAft>
+              <a:buNone/>
+            </a:pPr>
+            <a:r>
+              <a:rPr lang="en-US" sz="1500" b="0">
+                <a:solidFill>
+                  <a:srgbClr val="202B33"/>
+                </a:solidFill>
+                <a:latin typeface="Arial"/>
+                <a:ea typeface="Arial"/>
+                <a:cs typeface="Arial"/>
+              </a:rPr>
+              <a:t xml:space="preserve">and Anthropic end up owning every software</a:t>
+            </a:r>
+            <a:endParaRPr lang="en-US" sz="1500"/>
+          </a:p>
+          <a:p>
+            <a:pPr marL="0" indent="0">
+              <a:lnSpc>
+                <a:spcPts val="1950"/>
+              </a:lnSpc>
+              <a:spcAft>
+                <a:spcPts val="0"/>
+              </a:spcAft>
+              <a:buNone/>
+            </a:pPr>
+            <a:r>
+              <a:rPr lang="en-US" sz="1500" b="0">
+                <a:solidFill>
+                  <a:srgbClr val="202B33"/>
+                </a:solidFill>
+                <a:latin typeface="Arial"/>
+                <a:ea typeface="Arial"/>
+                <a:cs typeface="Arial"/>
+              </a:rPr>
+              <a:t xml:space="preserve">channel? Watch what happens when the</a:t>
+            </a:r>
+            <a:endParaRPr lang="en-US" sz="1500"/>
+          </a:p>
+          <a:p>
+            <a:pPr marL="0" indent="0">
+              <a:lnSpc>
+                <a:spcPts val="1950"/>
+              </a:lnSpc>
+              <a:spcAft>
+                <a:spcPts val="0"/>
+              </a:spcAft>
+              <a:buNone/>
+            </a:pPr>
+            <a:r>
+              <a:rPr lang="en-US" sz="1500" b="0">
+                <a:solidFill>
+                  <a:srgbClr val="202B33"/>
+                </a:solidFill>
+                <a:latin typeface="Arial"/>
+                <a:ea typeface="Arial"/>
+                <a:cs typeface="Arial"/>
+              </a:rPr>
+              <a:t xml:space="preserve">assistants ship real-time collaboration:</a:t>
+            </a:r>
+            <a:endParaRPr lang="en-US" sz="1500"/>
+          </a:p>
+          <a:p>
+            <a:pPr marL="0" indent="0">
+              <a:lnSpc>
+                <a:spcPts val="1950"/>
+              </a:lnSpc>
+              <a:spcAft>
+                <a:spcPts val="0"/>
+              </a:spcAft>
+              <a:buNone/>
+            </a:pPr>
+            <a:r>
+              <a:rPr lang="en-US" sz="1500" b="0">
+                <a:solidFill>
+                  <a:srgbClr val="202B33"/>
+                </a:solidFill>
+                <a:latin typeface="Arial"/>
+                <a:ea typeface="Arial"/>
+                <a:cs typeface="Arial"/>
+              </a:rPr>
+              <a:t xml:space="preserve">who spends less time in email, Slack and</a:t>
+            </a:r>
+            <a:endParaRPr lang="en-US" sz="1500"/>
+          </a:p>
+          <a:p>
+            <a:pPr marL="0" indent="0">
+              <a:lnSpc>
+                <a:spcPts val="1950"/>
+              </a:lnSpc>
+              <a:spcAft>
+                <a:spcPts val="0"/>
+              </a:spcAft>
+              <a:buNone/>
+            </a:pPr>
+            <a:r>
+              <a:rPr lang="en-US" sz="1500" b="0">
+                <a:solidFill>
+                  <a:srgbClr val="202B33"/>
+                </a:solidFill>
+                <a:latin typeface="Arial"/>
+                <a:ea typeface="Arial"/>
+                <a:cs typeface="Arial"/>
+              </a:rPr>
+              <a:t xml:space="preserve">Google Docs then? I can already make and</a:t>
             </a:r>
             <a:endParaRPr lang="en-US" sz="1500"/>
           </a:p>
@@ -10396,329 +13256,306 @@
                 <a:ea typeface="Arial"/>
                 <a:cs typeface="Arial"/>
               </a:rPr>
-              <a:t xml:space="preserve">where the evidence conflicts. Give the</a:t>
-            </a:r>
-            <a:endParaRPr lang="en-US" sz="1500"/>
-          </a:p>
-          <a:p>
-            <a:pPr marL="0" indent="0">
-              <a:lnSpc>
-                <a:spcPts val="1950"/>
-              </a:lnSpc>
-              <a:spcAft>
-                <a:spcPts val="0"/>
-              </a:spcAft>
-              <a:buNone/>
-            </a:pPr>
-            <a:r>
-              <a:rPr lang="en-US" sz="1500" b="0">
-                <a:solidFill>
-                  <a:srgbClr val="202B33"/>
-                </a:solidFill>
-                <a:latin typeface="Arial"/>
-                <a:ea typeface="Arial"/>
-                <a:cs typeface="Arial"/>
-              </a:rPr>
-              <a:t xml:space="preserve">resulting decision a durable artifact so</a:t>
-            </a:r>
-            <a:endParaRPr lang="en-US" sz="1500"/>
-          </a:p>
-          <a:p>
-            <a:pPr marL="0" indent="0">
-              <a:lnSpc>
-                <a:spcPts val="1950"/>
-              </a:lnSpc>
-              <a:spcAft>
-                <a:spcPts val="0"/>
-              </a:spcAft>
-              <a:buNone/>
-            </a:pPr>
-            <a:r>
-              <a:rPr lang="en-US" sz="1500" b="0">
-                <a:solidFill>
-                  <a:srgbClr val="202B33"/>
-                </a:solidFill>
-                <a:latin typeface="Arial"/>
-                <a:ea typeface="Arial"/>
-                <a:cs typeface="Arial"/>
-              </a:rPr>
-              <a:t xml:space="preserve">the next agent does not have to guess.</a:t>
-            </a:r>
-            <a:endParaRPr lang="en-US" sz="1500"/>
-          </a:p>
-          <a:p>
-            <a:pPr marL="0" indent="0">
-              <a:lnSpc>
-                <a:spcPts val="1950"/>
-              </a:lnSpc>
-              <a:spcAft>
-                <a:spcPts val="0"/>
-              </a:spcAft>
-              <a:buNone/>
-            </a:pPr>
-            <a:r>
-              <a:rPr lang="en-US" sz="1500" b="0">
-                <a:solidFill>
-                  <a:srgbClr val="202B33"/>
-                </a:solidFill>
-                <a:latin typeface="Arial"/>
-                <a:ea typeface="Arial"/>
-                <a:cs typeface="Arial"/>
-              </a:rPr>
-              <a:t xml:space="preserve"/>
-            </a:r>
-            <a:endParaRPr lang="en-US" sz="1500"/>
-          </a:p>
-          <a:p>
-            <a:pPr marL="0" indent="0">
-              <a:lnSpc>
-                <a:spcPts val="1950"/>
-              </a:lnSpc>
-              <a:spcAft>
-                <a:spcPts val="0"/>
-              </a:spcAft>
-              <a:buNone/>
-            </a:pPr>
-            <a:r>
-              <a:rPr lang="en-US" sz="1500" b="0">
-                <a:solidFill>
-                  <a:srgbClr val="202B33"/>
-                </a:solidFill>
-                <a:latin typeface="Arial"/>
-                <a:ea typeface="Arial"/>
-                <a:cs typeface="Arial"/>
-              </a:rPr>
-              <a:t xml:space="preserve">Then price ownership. Six agents do not</a:t>
-            </a:r>
-            <a:endParaRPr lang="en-US" sz="1500"/>
-          </a:p>
-          <a:p>
-            <a:pPr marL="0" indent="0">
-              <a:lnSpc>
-                <a:spcPts val="1950"/>
-              </a:lnSpc>
-              <a:spcAft>
-                <a:spcPts val="0"/>
-              </a:spcAft>
-              <a:buNone/>
-            </a:pPr>
-            <a:r>
-              <a:rPr lang="en-US" sz="1500" b="0">
-                <a:solidFill>
-                  <a:srgbClr val="202B33"/>
-                </a:solidFill>
-                <a:latin typeface="Arial"/>
-                <a:ea typeface="Arial"/>
-                <a:cs typeface="Arial"/>
-              </a:rPr>
-              <a:t xml:space="preserve">become free because one person has their</a:t>
-            </a:r>
-            <a:endParaRPr lang="en-US" sz="1500"/>
-          </a:p>
-          <a:p>
-            <a:pPr marL="0" indent="0">
-              <a:lnSpc>
-                <a:spcPts val="1950"/>
-              </a:lnSpc>
-              <a:spcAft>
-                <a:spcPts val="0"/>
-              </a:spcAft>
-              <a:buNone/>
-            </a:pPr>
-            <a:r>
-              <a:rPr lang="en-US" sz="1500" b="0">
-                <a:solidFill>
-                  <a:srgbClr val="202B33"/>
-                </a:solidFill>
-                <a:latin typeface="Arial"/>
-                <a:ea typeface="Arial"/>
-                <a:cs typeface="Arial"/>
-              </a:rPr>
-              <a:t xml:space="preserve">names in a config file. Reserve the</a:t>
-            </a:r>
-            <a:endParaRPr lang="en-US" sz="1500"/>
-          </a:p>
-          <a:p>
-            <a:pPr marL="0" indent="0">
-              <a:lnSpc>
-                <a:spcPts val="1950"/>
-              </a:lnSpc>
-              <a:spcAft>
-                <a:spcPts val="0"/>
-              </a:spcAft>
-              <a:buNone/>
-            </a:pPr>
-            <a:r>
-              <a:rPr lang="en-US" sz="1500" b="0">
-                <a:solidFill>
-                  <a:srgbClr val="202B33"/>
-                </a:solidFill>
-                <a:latin typeface="Arial"/>
-                <a:ea typeface="Arial"/>
-                <a:cs typeface="Arial"/>
-              </a:rPr>
-              <a:t xml:space="preserve">person's attention and practise the</a:t>
-            </a:r>
-            <a:endParaRPr lang="en-US" sz="1500"/>
-          </a:p>
-          <a:p>
-            <a:pPr marL="0" indent="0">
-              <a:lnSpc>
-                <a:spcPts val="1950"/>
-              </a:lnSpc>
-              <a:spcAft>
-                <a:spcPts val="0"/>
-              </a:spcAft>
-              <a:buNone/>
-            </a:pPr>
-            <a:r>
-              <a:rPr lang="en-US" sz="1500" b="0">
-                <a:solidFill>
-                  <a:srgbClr val="202B33"/>
-                </a:solidFill>
-                <a:latin typeface="Arial"/>
-                <a:ea typeface="Arial"/>
-                <a:cs typeface="Arial"/>
-              </a:rPr>
-              <a:t xml:space="preserve">exceptional work. Put permission before</a:t>
-            </a:r>
-            <a:endParaRPr lang="en-US" sz="1500"/>
-          </a:p>
-          <a:p>
-            <a:pPr marL="0" indent="0">
-              <a:lnSpc>
-                <a:spcPts val="1950"/>
-              </a:lnSpc>
-              <a:spcAft>
-                <a:spcPts val="0"/>
-              </a:spcAft>
-              <a:buNone/>
-            </a:pPr>
-            <a:r>
-              <a:rPr lang="en-US" sz="1500" b="0">
-                <a:solidFill>
-                  <a:srgbClr val="202B33"/>
-                </a:solidFill>
-                <a:latin typeface="Arial"/>
-                <a:ea typeface="Arial"/>
-                <a:cs typeface="Arial"/>
-              </a:rPr>
-              <a:t xml:space="preserve">customer consequences.</a:t>
-            </a:r>
-            <a:endParaRPr lang="en-US" sz="1500"/>
-          </a:p>
-          <a:p>
-            <a:pPr marL="0" indent="0">
-              <a:lnSpc>
-                <a:spcPts val="1950"/>
-              </a:lnSpc>
-              <a:spcAft>
-                <a:spcPts val="0"/>
-              </a:spcAft>
-              <a:buNone/>
-            </a:pPr>
-            <a:r>
-              <a:rPr lang="en-US" sz="1500" b="0">
-                <a:solidFill>
-                  <a:srgbClr val="202B33"/>
-                </a:solidFill>
-                <a:latin typeface="Arial"/>
-                <a:ea typeface="Arial"/>
-                <a:cs typeface="Arial"/>
-              </a:rPr>
-              <a:t xml:space="preserve"/>
-            </a:r>
-            <a:endParaRPr lang="en-US" sz="1500"/>
-          </a:p>
-          <a:p>
-            <a:pPr marL="0" indent="0">
-              <a:lnSpc>
-                <a:spcPts val="1950"/>
-              </a:lnSpc>
-              <a:spcAft>
-                <a:spcPts val="0"/>
-              </a:spcAft>
-              <a:buNone/>
-            </a:pPr>
-            <a:r>
-              <a:rPr lang="en-US" sz="1500" b="0">
-                <a:solidFill>
-                  <a:srgbClr val="202B33"/>
-                </a:solidFill>
-                <a:latin typeface="Arial"/>
-                <a:ea typeface="Arial"/>
-                <a:cs typeface="Arial"/>
-              </a:rPr>
-              <a:t xml:space="preserve">The org chart is a record of earlier</a:t>
-            </a:r>
-            <a:endParaRPr lang="en-US" sz="1500"/>
-          </a:p>
-          <a:p>
-            <a:pPr marL="0" indent="0">
-              <a:lnSpc>
-                <a:spcPts val="1950"/>
-              </a:lnSpc>
-              <a:spcAft>
-                <a:spcPts val="0"/>
-              </a:spcAft>
-              <a:buNone/>
-            </a:pPr>
-            <a:r>
-              <a:rPr lang="en-US" sz="1500" b="0">
-                <a:solidFill>
-                  <a:srgbClr val="202B33"/>
-                </a:solidFill>
-                <a:latin typeface="Arial"/>
-                <a:ea typeface="Arial"/>
-                <a:cs typeface="Arial"/>
-              </a:rPr>
-              <a:t xml:space="preserve">tradeoffs. You are allowed to make new</a:t>
-            </a:r>
-            <a:endParaRPr lang="en-US" sz="1500"/>
-          </a:p>
-          <a:p>
-            <a:pPr marL="0" indent="0">
-              <a:lnSpc>
-                <a:spcPts val="1950"/>
-              </a:lnSpc>
-              <a:spcAft>
-                <a:spcPts val="0"/>
-              </a:spcAft>
-              <a:buNone/>
-            </a:pPr>
-            <a:r>
-              <a:rPr lang="en-US" sz="1500" b="0">
-                <a:solidFill>
-                  <a:srgbClr val="202B33"/>
-                </a:solidFill>
-                <a:latin typeface="Arial"/>
-                <a:ea typeface="Arial"/>
-                <a:cs typeface="Arial"/>
-              </a:rPr>
-              <a:t xml:space="preserve">ones. Automate the right things. Keep the</a:t>
-            </a:r>
-            <a:endParaRPr lang="en-US" sz="1500"/>
-          </a:p>
-          <a:p>
-            <a:pPr marL="0" indent="0">
-              <a:lnSpc>
-                <a:spcPts val="1950"/>
-              </a:lnSpc>
-              <a:spcAft>
-                <a:spcPts val="0"/>
-              </a:spcAft>
-              <a:buNone/>
-            </a:pPr>
-            <a:r>
-              <a:rPr lang="en-US" sz="1500" b="0">
-                <a:solidFill>
-                  <a:srgbClr val="202B33"/>
-                </a:solidFill>
-                <a:latin typeface="Arial"/>
-                <a:ea typeface="Arial"/>
-                <a:cs typeface="Arial"/>
-              </a:rPr>
-              <a:t xml:space="preserve">taste.</a:t>
+              <a:t xml:space="preserve">edit images and video in ways that make me</a:t>
+            </a:r>
+            <a:endParaRPr lang="en-US" sz="1500"/>
+          </a:p>
+          <a:p>
+            <a:pPr marL="0" indent="0">
+              <a:lnSpc>
+                <a:spcPts val="1950"/>
+              </a:lnSpc>
+              <a:spcAft>
+                <a:spcPts val="0"/>
+              </a:spcAft>
+              <a:buNone/>
+            </a:pPr>
+            <a:r>
+              <a:rPr lang="en-US" sz="1500" b="0">
+                <a:solidFill>
+                  <a:srgbClr val="202B33"/>
+                </a:solidFill>
+                <a:latin typeface="Arial"/>
+                <a:ea typeface="Arial"/>
+                <a:cs typeface="Arial"/>
+              </a:rPr>
+              <a:t xml:space="preserve">less likely to open Photoshop or DaVinci.</a:t>
+            </a:r>
+            <a:endParaRPr lang="en-US" sz="1500"/>
+          </a:p>
+          <a:p>
+            <a:pPr marL="0" indent="0">
+              <a:lnSpc>
+                <a:spcPts val="1950"/>
+              </a:lnSpc>
+              <a:spcAft>
+                <a:spcPts val="0"/>
+              </a:spcAft>
+              <a:buNone/>
+            </a:pPr>
+            <a:r>
+              <a:rPr lang="en-US" sz="1500" b="0">
+                <a:solidFill>
+                  <a:srgbClr val="202B33"/>
+                </a:solidFill>
+                <a:latin typeface="Arial"/>
+                <a:ea typeface="Arial"/>
+                <a:cs typeface="Arial"/>
+              </a:rPr>
+              <a:t xml:space="preserve">If I need a jingle for the company, I ask</a:t>
+            </a:r>
+            <a:endParaRPr lang="en-US" sz="1500"/>
+          </a:p>
+          <a:p>
+            <a:pPr marL="0" indent="0">
+              <a:lnSpc>
+                <a:spcPts val="1950"/>
+              </a:lnSpc>
+              <a:spcAft>
+                <a:spcPts val="0"/>
+              </a:spcAft>
+              <a:buNone/>
+            </a:pPr>
+            <a:r>
+              <a:rPr lang="en-US" sz="1500" b="0">
+                <a:solidFill>
+                  <a:srgbClr val="202B33"/>
+                </a:solidFill>
+                <a:latin typeface="Arial"/>
+                <a:ea typeface="Arial"/>
+                <a:cs typeface="Arial"/>
+              </a:rPr>
+              <a:t xml:space="preserve">Suno and it is done. So is everything you</a:t>
+            </a:r>
+            <a:endParaRPr lang="en-US" sz="1500"/>
+          </a:p>
+          <a:p>
+            <a:pPr marL="0" indent="0">
+              <a:lnSpc>
+                <a:spcPts val="1950"/>
+              </a:lnSpc>
+              <a:spcAft>
+                <a:spcPts val="0"/>
+              </a:spcAft>
+              <a:buNone/>
+            </a:pPr>
+            <a:r>
+              <a:rPr lang="en-US" sz="1500" b="0">
+                <a:solidFill>
+                  <a:srgbClr val="202B33"/>
+                </a:solidFill>
+                <a:latin typeface="Arial"/>
+                <a:ea typeface="Arial"/>
+                <a:cs typeface="Arial"/>
+              </a:rPr>
+              <a:t xml:space="preserve">spent a lifetime learning, mastering and</a:t>
+            </a:r>
+            <a:endParaRPr lang="en-US" sz="1500"/>
+          </a:p>
+          <a:p>
+            <a:pPr marL="0" indent="0">
+              <a:lnSpc>
+                <a:spcPts val="1950"/>
+              </a:lnSpc>
+              <a:spcAft>
+                <a:spcPts val="0"/>
+              </a:spcAft>
+              <a:buNone/>
+            </a:pPr>
+            <a:r>
+              <a:rPr lang="en-US" sz="1500" b="0">
+                <a:solidFill>
+                  <a:srgbClr val="202B33"/>
+                </a:solidFill>
+                <a:latin typeface="Arial"/>
+                <a:ea typeface="Arial"/>
+                <a:cs typeface="Arial"/>
+              </a:rPr>
+              <a:t xml:space="preserve">fighting with about to be irrelevant? Yes.</a:t>
+            </a:r>
+            <a:endParaRPr lang="en-US" sz="1500"/>
+          </a:p>
+          <a:p>
+            <a:pPr marL="0" indent="0">
+              <a:lnSpc>
+                <a:spcPts val="1950"/>
+              </a:lnSpc>
+              <a:spcAft>
+                <a:spcPts val="0"/>
+              </a:spcAft>
+              <a:buNone/>
+            </a:pPr>
+            <a:r>
+              <a:rPr lang="en-US" sz="1500" b="0">
+                <a:solidFill>
+                  <a:srgbClr val="202B33"/>
+                </a:solidFill>
+                <a:latin typeface="Arial"/>
+                <a:ea typeface="Arial"/>
+                <a:cs typeface="Arial"/>
+              </a:rPr>
+              <a:t xml:space="preserve">At least as you know it.</a:t>
+            </a:r>
+            <a:endParaRPr lang="en-US" sz="1500"/>
+          </a:p>
+          <a:p>
+            <a:pPr marL="0" indent="0">
+              <a:lnSpc>
+                <a:spcPts val="1950"/>
+              </a:lnSpc>
+              <a:spcAft>
+                <a:spcPts val="0"/>
+              </a:spcAft>
+              <a:buNone/>
+            </a:pPr>
+            <a:r>
+              <a:rPr lang="en-US" sz="1500" b="0">
+                <a:solidFill>
+                  <a:srgbClr val="202B33"/>
+                </a:solidFill>
+                <a:latin typeface="Arial"/>
+                <a:ea typeface="Arial"/>
+                <a:cs typeface="Arial"/>
+              </a:rPr>
+              <a:t xml:space="preserve"/>
+            </a:r>
+            <a:endParaRPr lang="en-US" sz="1500"/>
+          </a:p>
+          <a:p>
+            <a:pPr marL="0" indent="0">
+              <a:lnSpc>
+                <a:spcPts val="1950"/>
+              </a:lnSpc>
+              <a:spcAft>
+                <a:spcPts val="0"/>
+              </a:spcAft>
+              <a:buNone/>
+            </a:pPr>
+            <a:r>
+              <a:rPr lang="en-US" sz="1500" b="0">
+                <a:solidFill>
+                  <a:srgbClr val="202B33"/>
+                </a:solidFill>
+                <a:latin typeface="Arial"/>
+                <a:ea typeface="Arial"/>
+                <a:cs typeface="Arial"/>
+              </a:rPr>
+              <a:t xml:space="preserve">What replaces it looks less like a grid of</a:t>
+            </a:r>
+            <a:endParaRPr lang="en-US" sz="1500"/>
+          </a:p>
+          <a:p>
+            <a:pPr marL="0" indent="0">
+              <a:lnSpc>
+                <a:spcPts val="1950"/>
+              </a:lnSpc>
+              <a:spcAft>
+                <a:spcPts val="0"/>
+              </a:spcAft>
+              <a:buNone/>
+            </a:pPr>
+            <a:r>
+              <a:rPr lang="en-US" sz="1500" b="0">
+                <a:solidFill>
+                  <a:srgbClr val="202B33"/>
+                </a:solidFill>
+                <a:latin typeface="Arial"/>
+                <a:ea typeface="Arial"/>
+                <a:cs typeface="Arial"/>
+              </a:rPr>
+              <a:t xml:space="preserve">apps and more like Minority Report, with a</a:t>
+            </a:r>
+            <a:endParaRPr lang="en-US" sz="1500"/>
+          </a:p>
+          <a:p>
+            <a:pPr marL="0" indent="0">
+              <a:lnSpc>
+                <a:spcPts val="1950"/>
+              </a:lnSpc>
+              <a:spcAft>
+                <a:spcPts val="0"/>
+              </a:spcAft>
+              <a:buNone/>
+            </a:pPr>
+            <a:r>
+              <a:rPr lang="en-US" sz="1500" b="0">
+                <a:solidFill>
+                  <a:srgbClr val="202B33"/>
+                </a:solidFill>
+                <a:latin typeface="Arial"/>
+                <a:ea typeface="Arial"/>
+                <a:cs typeface="Arial"/>
+              </a:rPr>
+              <a:t xml:space="preserve">surprise revival of the terminal. Which is</a:t>
+            </a:r>
+            <a:endParaRPr lang="en-US" sz="1500"/>
+          </a:p>
+          <a:p>
+            <a:pPr marL="0" indent="0">
+              <a:lnSpc>
+                <a:spcPts val="1950"/>
+              </a:lnSpc>
+              <a:spcAft>
+                <a:spcPts val="0"/>
+              </a:spcAft>
+              <a:buNone/>
+            </a:pPr>
+            <a:r>
+              <a:rPr lang="en-US" sz="1500" b="0">
+                <a:solidFill>
+                  <a:srgbClr val="202B33"/>
+                </a:solidFill>
+                <a:latin typeface="Arial"/>
+                <a:ea typeface="Arial"/>
+                <a:cs typeface="Arial"/>
+              </a:rPr>
+              <a:t xml:space="preserve">a Matrix ending when you think about it.</a:t>
+            </a:r>
+            <a:endParaRPr lang="en-US" sz="1500"/>
+          </a:p>
+          <a:p>
+            <a:pPr marL="0" indent="0">
+              <a:lnSpc>
+                <a:spcPts val="1950"/>
+              </a:lnSpc>
+              <a:spcAft>
+                <a:spcPts val="0"/>
+              </a:spcAft>
+              <a:buNone/>
+            </a:pPr>
+            <a:r>
+              <a:rPr lang="en-US" sz="1500" b="0">
+                <a:solidFill>
+                  <a:srgbClr val="202B33"/>
+                </a:solidFill>
+                <a:latin typeface="Arial"/>
+                <a:ea typeface="Arial"/>
+                <a:cs typeface="Arial"/>
+              </a:rPr>
+              <a:t xml:space="preserve">Thanks, AI. Skynet is not so bad if I get</a:t>
+            </a:r>
+            <a:endParaRPr lang="en-US" sz="1500"/>
+          </a:p>
+          <a:p>
+            <a:pPr marL="0" indent="0">
+              <a:lnSpc>
+                <a:spcPts val="1950"/>
+              </a:lnSpc>
+              <a:spcAft>
+                <a:spcPts val="0"/>
+              </a:spcAft>
+              <a:buNone/>
+            </a:pPr>
+            <a:r>
+              <a:rPr lang="en-US" sz="1500" b="0">
+                <a:solidFill>
+                  <a:srgbClr val="202B33"/>
+                </a:solidFill>
+                <a:latin typeface="Arial"/>
+                <a:ea typeface="Arial"/>
+                <a:cs typeface="Arial"/>
+              </a:rPr>
+              <a:t xml:space="preserve">to keep my CLIs.</a:t>
             </a:r>
             <a:endParaRPr lang="en-US" sz="1500"/>
           </a:p>
@@ -10898,7 +13735,7 @@
                 <a:ea typeface="Arial"/>
                 <a:cs typeface="Arial"/>
               </a:rPr>
-              <a:t xml:space="preserve">SOURCE REFERENCES</a:t>
+              <a:t xml:space="preserve">07 / 08    SOURCE SLIDE 15</a:t>
             </a:r>
             <a:endParaRPr lang="en-US" sz="1050"/>
           </a:p>
@@ -10947,7 +13784,7 @@
                 <a:ea typeface="Arial"/>
                 <a:cs typeface="Arial"/>
               </a:rPr>
-              <a:t xml:space="preserve">References</a:t>
+              <a:t xml:space="preserve">Minority Report, With Terminals (continued)</a:t>
             </a:r>
             <a:endParaRPr lang="en-US" sz="2550"/>
           </a:p>
@@ -10996,237 +13833,145 @@
                 <a:ea typeface="Arial"/>
                 <a:cs typeface="Arial"/>
               </a:rPr>
-              <a:t xml:space="preserve">Melvin E. Conway (1968), How Do Committees</a:t>
-            </a:r>
-            <a:endParaRPr lang="en-US" sz="1500"/>
-          </a:p>
-          <a:p>
-            <a:pPr marL="0" indent="0">
-              <a:lnSpc>
-                <a:spcPts val="1950"/>
-              </a:lnSpc>
-              <a:spcAft>
-                <a:spcPts val="0"/>
-              </a:spcAft>
-              <a:buNone/>
-            </a:pPr>
-            <a:r>
-              <a:rPr lang="en-US" sz="1500" b="0">
-                <a:solidFill>
-                  <a:srgbClr val="202B33"/>
-                </a:solidFill>
-                <a:latin typeface="Arial"/>
-                <a:ea typeface="Arial"/>
-                <a:cs typeface="Arial"/>
-              </a:rPr>
-              <a:t xml:space="preserve">Invent? —</a:t>
-            </a:r>
-            <a:endParaRPr lang="en-US" sz="1500"/>
-          </a:p>
-          <a:p>
-            <a:pPr marL="0" indent="0">
-              <a:lnSpc>
-                <a:spcPts val="1950"/>
-              </a:lnSpc>
-              <a:spcAft>
-                <a:spcPts val="0"/>
-              </a:spcAft>
-              <a:buNone/>
-            </a:pPr>
-            <a:r>
-              <a:rPr lang="en-US" sz="1500" b="0">
-                <a:solidFill>
-                  <a:srgbClr val="202B33"/>
-                </a:solidFill>
-                <a:latin typeface="Arial"/>
-                <a:ea typeface="Arial"/>
-                <a:cs typeface="Arial"/>
-              </a:rPr>
-              <a:t xml:space="preserve">https://melconway.com/Home/pdf/committees.pdf,</a:t>
-            </a:r>
-            <a:endParaRPr lang="en-US" sz="1500"/>
-          </a:p>
-          <a:p>
-            <a:pPr marL="0" indent="0">
-              <a:lnSpc>
-                <a:spcPts val="1950"/>
-              </a:lnSpc>
-              <a:spcAft>
-                <a:spcPts val="0"/>
-              </a:spcAft>
-              <a:buNone/>
-            </a:pPr>
-            <a:r>
-              <a:rPr lang="en-US" sz="1500" b="0">
-                <a:solidFill>
-                  <a:srgbClr val="202B33"/>
-                </a:solidFill>
-                <a:latin typeface="Arial"/>
-                <a:ea typeface="Arial"/>
-                <a:cs typeface="Arial"/>
-              </a:rPr>
-              <a:t xml:space="preserve">Datamation, April, 28–31.</a:t>
-            </a:r>
-            <a:endParaRPr lang="en-US" sz="1500"/>
-          </a:p>
-          <a:p>
-            <a:pPr marL="0" indent="0">
-              <a:lnSpc>
-                <a:spcPts val="1950"/>
-              </a:lnSpc>
-              <a:spcAft>
-                <a:spcPts val="0"/>
-              </a:spcAft>
-              <a:buNone/>
-            </a:pPr>
-            <a:r>
-              <a:rPr lang="en-US" sz="1500" b="0">
-                <a:solidFill>
-                  <a:srgbClr val="202B33"/>
-                </a:solidFill>
-                <a:latin typeface="Arial"/>
-                <a:ea typeface="Arial"/>
-                <a:cs typeface="Arial"/>
-              </a:rPr>
-              <a:t xml:space="preserve"/>
-            </a:r>
-            <a:endParaRPr lang="en-US" sz="1500"/>
-          </a:p>
-          <a:p>
-            <a:pPr marL="0" indent="0">
-              <a:lnSpc>
-                <a:spcPts val="1950"/>
-              </a:lnSpc>
-              <a:spcAft>
-                <a:spcPts val="0"/>
-              </a:spcAft>
-              <a:buNone/>
-            </a:pPr>
-            <a:r>
-              <a:rPr lang="en-US" sz="1500" b="0">
-                <a:solidFill>
-                  <a:srgbClr val="202B33"/>
-                </a:solidFill>
-                <a:latin typeface="Arial"/>
-                <a:ea typeface="Arial"/>
-                <a:cs typeface="Arial"/>
-              </a:rPr>
-              <a:t xml:space="preserve">Ronald H. Coase (1937), The Nature of the</a:t>
-            </a:r>
-            <a:endParaRPr lang="en-US" sz="1500"/>
-          </a:p>
-          <a:p>
-            <a:pPr marL="0" indent="0">
-              <a:lnSpc>
-                <a:spcPts val="1950"/>
-              </a:lnSpc>
-              <a:spcAft>
-                <a:spcPts val="0"/>
-              </a:spcAft>
-              <a:buNone/>
-            </a:pPr>
-            <a:r>
-              <a:rPr lang="en-US" sz="1500" b="0">
-                <a:solidFill>
-                  <a:srgbClr val="202B33"/>
-                </a:solidFill>
-                <a:latin typeface="Arial"/>
-                <a:ea typeface="Arial"/>
-                <a:cs typeface="Arial"/>
-              </a:rPr>
-              <a:t xml:space="preserve">Firm —</a:t>
-            </a:r>
-            <a:endParaRPr lang="en-US" sz="1500"/>
-          </a:p>
-          <a:p>
-            <a:pPr marL="0" indent="0">
-              <a:lnSpc>
-                <a:spcPts val="1950"/>
-              </a:lnSpc>
-              <a:spcAft>
-                <a:spcPts val="0"/>
-              </a:spcAft>
-              <a:buNone/>
-            </a:pPr>
-            <a:r>
-              <a:rPr lang="en-US" sz="1500" b="0">
-                <a:solidFill>
-                  <a:srgbClr val="202B33"/>
-                </a:solidFill>
-                <a:latin typeface="Arial"/>
-                <a:ea typeface="Arial"/>
-                <a:cs typeface="Arial"/>
-              </a:rPr>
-              <a:t xml:space="preserve">https://onlinelibrary.wiley.com/doi/10.1111/j.1468-0335.1937.tb00002.x),</a:t>
-            </a:r>
-            <a:endParaRPr lang="en-US" sz="1500"/>
-          </a:p>
-          <a:p>
-            <a:pPr marL="0" indent="0">
-              <a:lnSpc>
-                <a:spcPts val="1950"/>
-              </a:lnSpc>
-              <a:spcAft>
-                <a:spcPts val="0"/>
-              </a:spcAft>
-              <a:buNone/>
-            </a:pPr>
-            <a:r>
-              <a:rPr lang="en-US" sz="1500" b="0">
-                <a:solidFill>
-                  <a:srgbClr val="202B33"/>
-                </a:solidFill>
-                <a:latin typeface="Arial"/>
-                <a:ea typeface="Arial"/>
-                <a:cs typeface="Arial"/>
-              </a:rPr>
-              <a:t xml:space="preserve">Economica 4(16, 386–405. The agent-design</a:t>
-            </a:r>
-            <a:endParaRPr lang="en-US" sz="1500"/>
-          </a:p>
-          <a:p>
-            <a:pPr marL="0" indent="0">
-              <a:lnSpc>
-                <a:spcPts val="1950"/>
-              </a:lnSpc>
-              <a:spcAft>
-                <a:spcPts val="0"/>
-              </a:spcAft>
-              <a:buNone/>
-            </a:pPr>
-            <a:r>
-              <a:rPr lang="en-US" sz="1500" b="0">
-                <a:solidFill>
-                  <a:srgbClr val="202B33"/>
-                </a:solidFill>
-                <a:latin typeface="Arial"/>
-                <a:ea typeface="Arial"/>
-                <a:cs typeface="Arial"/>
-              </a:rPr>
-              <a:t xml:space="preserve">application is the speaker’s argument.</a:t>
-            </a:r>
-            <a:endParaRPr lang="en-US" sz="1500"/>
-          </a:p>
-          <a:p>
-            <a:pPr marL="0" indent="0">
-              <a:lnSpc>
-                <a:spcPts val="1950"/>
-              </a:lnSpc>
-              <a:spcAft>
-                <a:spcPts val="0"/>
-              </a:spcAft>
-              <a:buNone/>
-            </a:pPr>
-            <a:r>
-              <a:rPr lang="en-US" sz="1500" b="0">
-                <a:solidFill>
-                  <a:srgbClr val="202B33"/>
-                </a:solidFill>
-                <a:latin typeface="Arial"/>
-                <a:ea typeface="Arial"/>
-                <a:cs typeface="Arial"/>
-              </a:rPr>
-              <a:t xml:space="preserve"/>
+              <a:t xml:space="preserve">Here is the part I want you to leave with.</a:t>
+            </a:r>
+            <a:endParaRPr lang="en-US" sz="1500"/>
+          </a:p>
+          <a:p>
+            <a:pPr marL="0" indent="0">
+              <a:lnSpc>
+                <a:spcPts val="1950"/>
+              </a:lnSpc>
+              <a:spcAft>
+                <a:spcPts val="0"/>
+              </a:spcAft>
+              <a:buNone/>
+            </a:pPr>
+            <a:r>
+              <a:rPr lang="en-US" sz="1500" b="0">
+                <a:solidFill>
+                  <a:srgbClr val="202B33"/>
+                </a:solidFill>
+                <a:latin typeface="Arial"/>
+                <a:ea typeface="Arial"/>
+                <a:cs typeface="Arial"/>
+              </a:rPr>
+              <a:t xml:space="preserve">That future is not spoken for. GPT image</a:t>
+            </a:r>
+            <a:endParaRPr lang="en-US" sz="1500"/>
+          </a:p>
+          <a:p>
+            <a:pPr marL="0" indent="0">
+              <a:lnSpc>
+                <a:spcPts val="1950"/>
+              </a:lnSpc>
+              <a:spcAft>
+                <a:spcPts val="0"/>
+              </a:spcAft>
+              <a:buNone/>
+            </a:pPr>
+            <a:r>
+              <a:rPr lang="en-US" sz="1500" b="0">
+                <a:solidFill>
+                  <a:srgbClr val="202B33"/>
+                </a:solidFill>
+                <a:latin typeface="Arial"/>
+                <a:ea typeface="Arial"/>
+                <a:cs typeface="Arial"/>
+              </a:rPr>
+              <a:t xml:space="preserve">being pretty good does not mean the story</a:t>
+            </a:r>
+            <a:endParaRPr lang="en-US" sz="1500"/>
+          </a:p>
+          <a:p>
+            <a:pPr marL="0" indent="0">
+              <a:lnSpc>
+                <a:spcPts val="1950"/>
+              </a:lnSpc>
+              <a:spcAft>
+                <a:spcPts val="0"/>
+              </a:spcAft>
+              <a:buNone/>
+            </a:pPr>
+            <a:r>
+              <a:rPr lang="en-US" sz="1500" b="0">
+                <a:solidFill>
+                  <a:srgbClr val="202B33"/>
+                </a:solidFill>
+                <a:latin typeface="Arial"/>
+                <a:ea typeface="Arial"/>
+                <a:cs typeface="Arial"/>
+              </a:rPr>
+              <a:t xml:space="preserve">of image creation belongs to the big</a:t>
+            </a:r>
+            <a:endParaRPr lang="en-US" sz="1500"/>
+          </a:p>
+          <a:p>
+            <a:pPr marL="0" indent="0">
+              <a:lnSpc>
+                <a:spcPts val="1950"/>
+              </a:lnSpc>
+              <a:spcAft>
+                <a:spcPts val="0"/>
+              </a:spcAft>
+              <a:buNone/>
+            </a:pPr>
+            <a:r>
+              <a:rPr lang="en-US" sz="1500" b="0">
+                <a:solidFill>
+                  <a:srgbClr val="202B33"/>
+                </a:solidFill>
+                <a:latin typeface="Arial"/>
+                <a:ea typeface="Arial"/>
+                <a:cs typeface="Arial"/>
+              </a:rPr>
+              <a:t xml:space="preserve">players, and the same is true in whichever</a:t>
+            </a:r>
+            <a:endParaRPr lang="en-US" sz="1500"/>
+          </a:p>
+          <a:p>
+            <a:pPr marL="0" indent="0">
+              <a:lnSpc>
+                <a:spcPts val="1950"/>
+              </a:lnSpc>
+              <a:spcAft>
+                <a:spcPts val="0"/>
+              </a:spcAft>
+              <a:buNone/>
+            </a:pPr>
+            <a:r>
+              <a:rPr lang="en-US" sz="1500" b="0">
+                <a:solidFill>
+                  <a:srgbClr val="202B33"/>
+                </a:solidFill>
+                <a:latin typeface="Arial"/>
+                <a:ea typeface="Arial"/>
+                <a:cs typeface="Arial"/>
+              </a:rPr>
+              <a:t xml:space="preserve">industry you work in. Those of us who do</a:t>
+            </a:r>
+            <a:endParaRPr lang="en-US" sz="1500"/>
+          </a:p>
+          <a:p>
+            <a:pPr marL="0" indent="0">
+              <a:lnSpc>
+                <a:spcPts val="1950"/>
+              </a:lnSpc>
+              <a:spcAft>
+                <a:spcPts val="0"/>
+              </a:spcAft>
+              <a:buNone/>
+            </a:pPr>
+            <a:r>
+              <a:rPr lang="en-US" sz="1500" b="0">
+                <a:solidFill>
+                  <a:srgbClr val="202B33"/>
+                </a:solidFill>
+                <a:latin typeface="Arial"/>
+                <a:ea typeface="Arial"/>
+                <a:cs typeface="Arial"/>
+              </a:rPr>
+              <a:t xml:space="preserve">not work at a frontier lab, the organic</a:t>
             </a:r>
             <a:endParaRPr lang="en-US" sz="1500"/>
           </a:p>
@@ -11275,214 +14020,122 @@
                 <a:ea typeface="Arial"/>
                 <a:cs typeface="Arial"/>
               </a:rPr>
-              <a:t xml:space="preserve">Thoughtworks, Inverse Conway Maneuver —</a:t>
-            </a:r>
-            <a:endParaRPr lang="en-US" sz="1500"/>
-          </a:p>
-          <a:p>
-            <a:pPr marL="0" indent="0">
-              <a:lnSpc>
-                <a:spcPts val="1950"/>
-              </a:lnSpc>
-              <a:spcAft>
-                <a:spcPts val="0"/>
-              </a:spcAft>
-              <a:buNone/>
-            </a:pPr>
-            <a:r>
-              <a:rPr lang="en-US" sz="1500" b="0">
-                <a:solidFill>
-                  <a:srgbClr val="202B33"/>
-                </a:solidFill>
-                <a:latin typeface="Arial"/>
-                <a:ea typeface="Arial"/>
-                <a:cs typeface="Arial"/>
-              </a:rPr>
-              <a:t xml:space="preserve">https://www.thoughtworks.com/en-br/radar/techniques/inverse-conway-maneuver),</a:t>
-            </a:r>
-            <a:endParaRPr lang="en-US" sz="1500"/>
-          </a:p>
-          <a:p>
-            <a:pPr marL="0" indent="0">
-              <a:lnSpc>
-                <a:spcPts val="1950"/>
-              </a:lnSpc>
-              <a:spcAft>
-                <a:spcPts val="0"/>
-              </a:spcAft>
-              <a:buNone/>
-            </a:pPr>
-            <a:r>
-              <a:rPr lang="en-US" sz="1500" b="0">
-                <a:solidFill>
-                  <a:srgbClr val="202B33"/>
-                </a:solidFill>
-                <a:latin typeface="Arial"/>
-                <a:ea typeface="Arial"/>
-                <a:cs typeface="Arial"/>
-              </a:rPr>
-              <a:t xml:space="preserve">2014/2015. Skelton and Pais, [Team</a:t>
-            </a:r>
-            <a:endParaRPr lang="en-US" sz="1500"/>
-          </a:p>
-          <a:p>
-            <a:pPr marL="0" indent="0">
-              <a:lnSpc>
-                <a:spcPts val="1950"/>
-              </a:lnSpc>
-              <a:spcAft>
-                <a:spcPts val="0"/>
-              </a:spcAft>
-              <a:buNone/>
-            </a:pPr>
-            <a:r>
-              <a:rPr lang="en-US" sz="1500" b="0">
-                <a:solidFill>
-                  <a:srgbClr val="202B33"/>
-                </a:solidFill>
-                <a:latin typeface="Arial"/>
-                <a:ea typeface="Arial"/>
-                <a:cs typeface="Arial"/>
-              </a:rPr>
-              <a:t xml:space="preserve">Topologies interaction</a:t>
-            </a:r>
-            <a:endParaRPr lang="en-US" sz="1500"/>
-          </a:p>
-          <a:p>
-            <a:pPr marL="0" indent="0">
-              <a:lnSpc>
-                <a:spcPts val="1950"/>
-              </a:lnSpc>
-              <a:spcAft>
-                <a:spcPts val="0"/>
-              </a:spcAft>
-              <a:buNone/>
-            </a:pPr>
-            <a:r>
-              <a:rPr lang="en-US" sz="1500" b="0">
-                <a:solidFill>
-                  <a:srgbClr val="202B33"/>
-                </a:solidFill>
-                <a:latin typeface="Arial"/>
-                <a:ea typeface="Arial"/>
-                <a:cs typeface="Arial"/>
-              </a:rPr>
-              <a:t xml:space="preserve">modes](https://teamtopologies.com/key-concepts.</a:t>
-            </a:r>
-            <a:endParaRPr lang="en-US" sz="1500"/>
-          </a:p>
-          <a:p>
-            <a:pPr marL="0" indent="0">
-              <a:lnSpc>
-                <a:spcPts val="1950"/>
-              </a:lnSpc>
-              <a:spcAft>
-                <a:spcPts val="0"/>
-              </a:spcAft>
-              <a:buNone/>
-            </a:pPr>
-            <a:r>
-              <a:rPr lang="en-US" sz="1500" b="0">
-                <a:solidFill>
-                  <a:srgbClr val="202B33"/>
-                </a:solidFill>
-                <a:latin typeface="Arial"/>
-                <a:ea typeface="Arial"/>
-                <a:cs typeface="Arial"/>
-              </a:rPr>
-              <a:t xml:space="preserve"/>
-            </a:r>
-            <a:endParaRPr lang="en-US" sz="1500"/>
-          </a:p>
-          <a:p>
-            <a:pPr marL="0" indent="0">
-              <a:lnSpc>
-                <a:spcPts val="1950"/>
-              </a:lnSpc>
-              <a:spcAft>
-                <a:spcPts val="0"/>
-              </a:spcAft>
-              <a:buNone/>
-            </a:pPr>
-            <a:r>
-              <a:rPr lang="en-US" sz="1500" b="0">
-                <a:solidFill>
-                  <a:srgbClr val="202B33"/>
-                </a:solidFill>
-                <a:latin typeface="Arial"/>
-                <a:ea typeface="Arial"/>
-                <a:cs typeface="Arial"/>
-              </a:rPr>
-              <a:t xml:space="preserve">Donald T. Campbell (1979), Assessing the</a:t>
-            </a:r>
-            <a:endParaRPr lang="en-US" sz="1500"/>
-          </a:p>
-          <a:p>
-            <a:pPr marL="0" indent="0">
-              <a:lnSpc>
-                <a:spcPts val="1950"/>
-              </a:lnSpc>
-              <a:spcAft>
-                <a:spcPts val="0"/>
-              </a:spcAft>
-              <a:buNone/>
-            </a:pPr>
-            <a:r>
-              <a:rPr lang="en-US" sz="1500" b="0">
-                <a:solidFill>
-                  <a:srgbClr val="202B33"/>
-                </a:solidFill>
-                <a:latin typeface="Arial"/>
-                <a:ea typeface="Arial"/>
-                <a:cs typeface="Arial"/>
-              </a:rPr>
-              <a:t xml:space="preserve">impact of planned social change —</a:t>
-            </a:r>
-            <a:endParaRPr lang="en-US" sz="1500"/>
-          </a:p>
-          <a:p>
-            <a:pPr marL="0" indent="0">
-              <a:lnSpc>
-                <a:spcPts val="1950"/>
-              </a:lnSpc>
-              <a:spcAft>
-                <a:spcPts val="0"/>
-              </a:spcAft>
-              <a:buNone/>
-            </a:pPr>
-            <a:r>
-              <a:rPr lang="en-US" sz="1500" b="0">
-                <a:solidFill>
-                  <a:srgbClr val="202B33"/>
-                </a:solidFill>
-                <a:latin typeface="Arial"/>
-                <a:ea typeface="Arial"/>
-                <a:cs typeface="Arial"/>
-              </a:rPr>
-              <a:t xml:space="preserve">https://doi.org/10.1016/0149-7189%2879%2990048-X),</a:t>
-            </a:r>
-            <a:endParaRPr lang="en-US" sz="1500"/>
-          </a:p>
-          <a:p>
-            <a:pPr marL="0" indent="0">
-              <a:lnSpc>
-                <a:spcPts val="1950"/>
-              </a:lnSpc>
-              <a:spcAft>
-                <a:spcPts val="0"/>
-              </a:spcAft>
-              <a:buNone/>
-            </a:pPr>
-            <a:r>
-              <a:rPr lang="en-US" sz="1500" b="0">
-                <a:solidFill>
-                  <a:srgbClr val="202B33"/>
-                </a:solidFill>
-                <a:latin typeface="Arial"/>
-                <a:ea typeface="Arial"/>
-                <a:cs typeface="Arial"/>
-              </a:rPr>
-              <a:t xml:space="preserve">Evaluation and Program Planning 2(1, 67–90.</a:t>
+              <a:t xml:space="preserve">agents in the room, get to rethink any and</a:t>
+            </a:r>
+            <a:endParaRPr lang="en-US" sz="1500"/>
+          </a:p>
+          <a:p>
+            <a:pPr marL="0" indent="0">
+              <a:lnSpc>
+                <a:spcPts val="1950"/>
+              </a:lnSpc>
+              <a:spcAft>
+                <a:spcPts val="0"/>
+              </a:spcAft>
+              <a:buNone/>
+            </a:pPr>
+            <a:r>
+              <a:rPr lang="en-US" sz="1500" b="0">
+                <a:solidFill>
+                  <a:srgbClr val="202B33"/>
+                </a:solidFill>
+                <a:latin typeface="Arial"/>
+                <a:ea typeface="Arial"/>
+                <a:cs typeface="Arial"/>
+              </a:rPr>
+              <a:t xml:space="preserve">every app as an AI-native system from the</a:t>
+            </a:r>
+            <a:endParaRPr lang="en-US" sz="1500"/>
+          </a:p>
+          <a:p>
+            <a:pPr marL="0" indent="0">
+              <a:lnSpc>
+                <a:spcPts val="1950"/>
+              </a:lnSpc>
+              <a:spcAft>
+                <a:spcPts val="0"/>
+              </a:spcAft>
+              <a:buNone/>
+            </a:pPr>
+            <a:r>
+              <a:rPr lang="en-US" sz="1500" b="0">
+                <a:solidFill>
+                  <a:srgbClr val="202B33"/>
+                </a:solidFill>
+                <a:latin typeface="Arial"/>
+                <a:ea typeface="Arial"/>
+                <a:cs typeface="Arial"/>
+              </a:rPr>
+              <a:t xml:space="preserve">boundary up. That is this whole talk one</a:t>
+            </a:r>
+            <a:endParaRPr lang="en-US" sz="1500"/>
+          </a:p>
+          <a:p>
+            <a:pPr marL="0" indent="0">
+              <a:lnSpc>
+                <a:spcPts val="1950"/>
+              </a:lnSpc>
+              <a:spcAft>
+                <a:spcPts val="0"/>
+              </a:spcAft>
+              <a:buNone/>
+            </a:pPr>
+            <a:r>
+              <a:rPr lang="en-US" sz="1500" b="0">
+                <a:solidFill>
+                  <a:srgbClr val="202B33"/>
+                </a:solidFill>
+                <a:latin typeface="Arial"/>
+                <a:ea typeface="Arial"/>
+                <a:cs typeface="Arial"/>
+              </a:rPr>
+              <a:t xml:space="preserve">level higher: do not photocopy today's</a:t>
+            </a:r>
+            <a:endParaRPr lang="en-US" sz="1500"/>
+          </a:p>
+          <a:p>
+            <a:pPr marL="0" indent="0">
+              <a:lnSpc>
+                <a:spcPts val="1950"/>
+              </a:lnSpc>
+              <a:spcAft>
+                <a:spcPts val="0"/>
+              </a:spcAft>
+              <a:buNone/>
+            </a:pPr>
+            <a:r>
+              <a:rPr lang="en-US" sz="1500" b="0">
+                <a:solidFill>
+                  <a:srgbClr val="202B33"/>
+                </a:solidFill>
+                <a:latin typeface="Arial"/>
+                <a:ea typeface="Arial"/>
+                <a:cs typeface="Arial"/>
+              </a:rPr>
+              <a:t xml:space="preserve">product categories onto tomorrow's</a:t>
+            </a:r>
+            <a:endParaRPr lang="en-US" sz="1500"/>
+          </a:p>
+          <a:p>
+            <a:pPr marL="0" indent="0">
+              <a:lnSpc>
+                <a:spcPts val="1950"/>
+              </a:lnSpc>
+              <a:spcAft>
+                <a:spcPts val="0"/>
+              </a:spcAft>
+              <a:buNone/>
+            </a:pPr>
+            <a:r>
+              <a:rPr lang="en-US" sz="1500" b="0">
+                <a:solidFill>
+                  <a:srgbClr val="202B33"/>
+                </a:solidFill>
+                <a:latin typeface="Arial"/>
+                <a:ea typeface="Arial"/>
+                <a:cs typeface="Arial"/>
+              </a:rPr>
+              <a:t xml:space="preserve">substrate either.</a:t>
             </a:r>
             <a:endParaRPr lang="en-US" sz="1500"/>
           </a:p>

--- a/artifacts/speaking-portfolio-expanded/decks/product-engineering-15min-handout.pptx
+++ b/artifacts/speaking-portfolio-expanded/decks/product-engineering-15min-handout.pptx
@@ -354,99 +354,7 @@
                 <a:ea typeface="Arial"/>
                 <a:cs typeface="Arial"/>
               </a:rPr>
-              <a:t xml:space="preserve">Back to the org chart. Some of those boundaries exist because the work really is different. Some exist because the person with the spreadsheet sat in another department. We should know which before teaching agents to repeat them.</a:t>
-            </a:r>
-            <a:endParaRPr lang="en-US" sz="1200"/>
-          </a:p>
-          <a:p>
-            <a:pPr marL="0" indent="0">
-              <a:lnSpc>
-                <a:spcPts val="1560"/>
-              </a:lnSpc>
-              <a:spcAft>
-                <a:spcPts val="0"/>
-              </a:spcAft>
-              <a:buNone/>
-            </a:pPr>
-            <a:r>
-              <a:rPr lang="en-US" sz="1200" b="0">
-                <a:solidFill>
-                  <a:srgbClr val="202b33"/>
-                </a:solidFill>
-                <a:latin typeface="Arial"/>
-                <a:ea typeface="Arial"/>
-                <a:cs typeface="Arial"/>
-              </a:rPr>
-              <a:t xml:space="preserve"/>
-            </a:r>
-            <a:endParaRPr lang="en-US" sz="1200"/>
-          </a:p>
-          <a:p>
-            <a:pPr marL="0" indent="0">
-              <a:lnSpc>
-                <a:spcPts val="1560"/>
-              </a:lnSpc>
-              <a:spcAft>
-                <a:spcPts val="0"/>
-              </a:spcAft>
-              <a:buNone/>
-            </a:pPr>
-            <a:r>
-              <a:rPr lang="en-US" sz="1200" b="0">
-                <a:solidFill>
-                  <a:srgbClr val="202b33"/>
-                </a:solidFill>
-                <a:latin typeface="Arial"/>
-                <a:ea typeface="Arial"/>
-                <a:cs typeface="Arial"/>
-              </a:rPr>
               <a:t xml:space="preserve">Take one boundary. What arrives, what leaves, who decides, and what did it cost last week? Make collection cheaper without erasing the disagreement the handoff used to expose. Keep the product review where the evidence conflicts, and give the decision a durable artifact so the next agent does not have to guess.</a:t>
-            </a:r>
-            <a:endParaRPr lang="en-US" sz="1200"/>
-          </a:p>
-          <a:p>
-            <a:pPr marL="0" indent="0">
-              <a:lnSpc>
-                <a:spcPts val="1560"/>
-              </a:lnSpc>
-              <a:spcAft>
-                <a:spcPts val="0"/>
-              </a:spcAft>
-              <a:buNone/>
-            </a:pPr>
-            <a:r>
-              <a:rPr lang="en-US" sz="1200" b="0">
-                <a:solidFill>
-                  <a:srgbClr val="202b33"/>
-                </a:solidFill>
-                <a:latin typeface="Arial"/>
-                <a:ea typeface="Arial"/>
-                <a:cs typeface="Arial"/>
-              </a:rPr>
-              <a:t xml:space="preserve"/>
-            </a:r>
-            <a:endParaRPr lang="en-US" sz="1200"/>
-          </a:p>
-          <a:p>
-            <a:pPr marL="0" indent="0">
-              <a:lnSpc>
-                <a:spcPts val="1560"/>
-              </a:lnSpc>
-              <a:spcAft>
-                <a:spcPts val="0"/>
-              </a:spcAft>
-              <a:buNone/>
-            </a:pPr>
-            <a:r>
-              <a:rPr lang="en-US" sz="1200" b="0">
-                <a:solidFill>
-                  <a:srgbClr val="202b33"/>
-                </a:solidFill>
-                <a:latin typeface="Arial"/>
-                <a:ea typeface="Arial"/>
-                <a:cs typeface="Arial"/>
-              </a:rPr>
-              <a:t xml:space="preserve">Then price ownership, and price the fuel. Six agents do not become free because one person has their names in a config file, and neither does the burn that keeps them running. Put permission before customer consequences.</a:t>
             </a:r>
             <a:endParaRPr lang="en-US" sz="1200"/>
           </a:p>
@@ -948,7 +856,7 @@
                 <a:ea typeface="Arial"/>
                 <a:cs typeface="Arial"/>
               </a:rPr>
-              <a:t xml:space="preserve">Source slide 1. 00:00 to 01:30</a:t>
+              <a:t xml:space="preserve">Source slide 1. 00:00 to 01:45</a:t>
             </a:r>
             <a:endParaRPr lang="en-US" sz="1200"/>
           </a:p>
@@ -1475,7 +1383,7 @@
                 <a:ea typeface="Arial"/>
                 <a:cs typeface="Arial"/>
               </a:rPr>
-              <a:t xml:space="preserve">Source slide 3. 01:30 to 03:00</a:t>
+              <a:t xml:space="preserve">Source slide 3. 01:45 to 03:00</a:t>
             </a:r>
             <a:endParaRPr lang="en-US" sz="1200"/>
           </a:p>
@@ -1614,52 +1522,6 @@
                 <a:cs typeface="Arial"/>
               </a:rPr>
               <a:t xml:space="preserve">Coase asked why firms exist when people could contract through the market. Using the market costs something; coordinating inside the firm costs something too. The boundary depends on that comparison.</a:t>
-            </a:r>
-            <a:endParaRPr lang="en-US" sz="1200"/>
-          </a:p>
-          <a:p>
-            <a:pPr marL="0" indent="0">
-              <a:lnSpc>
-                <a:spcPts val="1560"/>
-              </a:lnSpc>
-              <a:spcAft>
-                <a:spcPts val="0"/>
-              </a:spcAft>
-              <a:buNone/>
-            </a:pPr>
-            <a:r>
-              <a:rPr lang="en-US" sz="1200" b="0">
-                <a:solidFill>
-                  <a:srgbClr val="202b33"/>
-                </a:solidFill>
-                <a:latin typeface="Arial"/>
-                <a:ea typeface="Arial"/>
-                <a:cs typeface="Arial"/>
-              </a:rPr>
-              <a:t xml:space="preserve"/>
-            </a:r>
-            <a:endParaRPr lang="en-US" sz="1200"/>
-          </a:p>
-          <a:p>
-            <a:pPr marL="0" indent="0">
-              <a:lnSpc>
-                <a:spcPts val="1560"/>
-              </a:lnSpc>
-              <a:spcAft>
-                <a:spcPts val="0"/>
-              </a:spcAft>
-              <a:buNone/>
-            </a:pPr>
-            <a:r>
-              <a:rPr lang="en-US" sz="1200" b="0">
-                <a:solidFill>
-                  <a:srgbClr val="202b33"/>
-                </a:solidFill>
-                <a:latin typeface="Arial"/>
-                <a:ea typeface="Arial"/>
-                <a:cs typeface="Arial"/>
-              </a:rPr>
-              <a:t xml:space="preserve">Apply that question inside a product group. A weekly brief may have existed because collecting it took somebody two days. A separate triage meeting may have existed because linking a complaint to a trace required three people and a spreadsheet. If those costs change, the old boundary deserves another look.</a:t>
             </a:r>
             <a:endParaRPr lang="en-US" sz="1200"/>
           </a:p>
@@ -2002,7 +1864,7 @@
                 <a:ea typeface="Arial"/>
                 <a:cs typeface="Arial"/>
               </a:rPr>
-              <a:t xml:space="preserve">Source slide 5. 03:00 to 05:00</a:t>
+              <a:t xml:space="preserve">Source slide 5. 03:00 to 04:30</a:t>
             </a:r>
             <a:endParaRPr lang="en-US" sz="1200"/>
           </a:p>
@@ -2233,52 +2095,6 @@
                 <a:cs typeface="Arial"/>
               </a:rPr>
               <a:t xml:space="preserve">Research delivers a brief with source URLs and dates. Feedback delivers clusters with the original complaints attached. The product review resolves disagreement between them and writes the accepted hypothesis. A build agent consumes that artifact. It does not poll six chat histories and guess which decision won.</a:t>
-            </a:r>
-            <a:endParaRPr lang="en-US" sz="1200"/>
-          </a:p>
-          <a:p>
-            <a:pPr marL="0" indent="0">
-              <a:lnSpc>
-                <a:spcPts val="1560"/>
-              </a:lnSpc>
-              <a:spcAft>
-                <a:spcPts val="0"/>
-              </a:spcAft>
-              <a:buNone/>
-            </a:pPr>
-            <a:r>
-              <a:rPr lang="en-US" sz="1200" b="0">
-                <a:solidFill>
-                  <a:srgbClr val="202b33"/>
-                </a:solidFill>
-                <a:latin typeface="Arial"/>
-                <a:ea typeface="Arial"/>
-                <a:cs typeface="Arial"/>
-              </a:rPr>
-              <a:t xml:space="preserve"/>
-            </a:r>
-            <a:endParaRPr lang="en-US" sz="1200"/>
-          </a:p>
-          <a:p>
-            <a:pPr marL="0" indent="0">
-              <a:lnSpc>
-                <a:spcPts val="1560"/>
-              </a:lnSpc>
-              <a:spcAft>
-                <a:spcPts val="0"/>
-              </a:spcAft>
-              <a:buNone/>
-            </a:pPr>
-            <a:r>
-              <a:rPr lang="en-US" sz="1200" b="0">
-                <a:solidFill>
-                  <a:srgbClr val="202b33"/>
-                </a:solidFill>
-                <a:latin typeface="Arial"/>
-                <a:ea typeface="Arial"/>
-                <a:cs typeface="Arial"/>
-              </a:rPr>
-              <a:t xml:space="preserve">Team Topologies distinguishes collaboration, service consumption, and facilitation. Use collaboration while discovering the interface. Make the repeated delivery a service once the contract is understood. Keep facilitation temporary. An agent roster without these wires is a seating plan.</a:t>
             </a:r>
             <a:endParaRPr lang="en-US" sz="1200"/>
           </a:p>
@@ -2575,7 +2391,7 @@
                 <a:ea typeface="Arial"/>
                 <a:cs typeface="Arial"/>
               </a:rPr>
-              <a:t xml:space="preserve">Source slide 10. 05:00 to 06:30</a:t>
+              <a:t xml:space="preserve">Source slide 10. 04:30 to 05:45</a:t>
             </a:r>
             <a:endParaRPr lang="en-US" sz="1200"/>
           </a:p>
@@ -2760,52 +2576,6 @@
                 <a:cs typeface="Arial"/>
               </a:rPr>
               <a:t xml:space="preserve">Our target is onboarding activation. The next screen has three candidates. Before we inspect anything else, choose the one you would investigate. Do not reverse-engineer the answer from the names; they are A, B, and C.</a:t>
-            </a:r>
-            <a:endParaRPr lang="en-US" sz="1200"/>
-          </a:p>
-          <a:p>
-            <a:pPr marL="0" indent="0">
-              <a:lnSpc>
-                <a:spcPts val="1560"/>
-              </a:lnSpc>
-              <a:spcAft>
-                <a:spcPts val="0"/>
-              </a:spcAft>
-              <a:buNone/>
-            </a:pPr>
-            <a:r>
-              <a:rPr lang="en-US" sz="1200" b="0">
-                <a:solidFill>
-                  <a:srgbClr val="202b33"/>
-                </a:solidFill>
-                <a:latin typeface="Arial"/>
-                <a:ea typeface="Arial"/>
-                <a:cs typeface="Arial"/>
-              </a:rPr>
-              <a:t xml:space="preserve"/>
-            </a:r>
-            <a:endParaRPr lang="en-US" sz="1200"/>
-          </a:p>
-          <a:p>
-            <a:pPr marL="0" indent="0">
-              <a:lnSpc>
-                <a:spcPts val="1560"/>
-              </a:lnSpc>
-              <a:spcAft>
-                <a:spcPts val="0"/>
-              </a:spcAft>
-              <a:buNone/>
-            </a:pPr>
-            <a:r>
-              <a:rPr lang="en-US" sz="1200" b="0">
-                <a:solidFill>
-                  <a:srgbClr val="202b33"/>
-                </a:solidFill>
-                <a:latin typeface="Arial"/>
-                <a:ea typeface="Arial"/>
-                <a:cs typeface="Arial"/>
-              </a:rPr>
-              <a:t xml:space="preserve">The interesting question is what the winning candidate did to earn the number. A metric tells you that something moved. It does not tell you whether you wanted the movement.</a:t>
             </a:r>
             <a:endParaRPr lang="en-US" sz="1200"/>
           </a:p>
@@ -3102,7 +2872,7 @@
                 <a:ea typeface="Arial"/>
                 <a:cs typeface="Arial"/>
               </a:rPr>
-              <a:t xml:space="preserve">Source slide 11. 06:30 to 10:00</a:t>
+              <a:t xml:space="preserve">Source slide 11. 05:45 to 08:45</a:t>
             </a:r>
             <a:endParaRPr lang="en-US" sz="1200"/>
           </a:p>
@@ -3675,7 +3445,7 @@
                 <a:ea typeface="Arial"/>
                 <a:cs typeface="Arial"/>
               </a:rPr>
-              <a:t xml:space="preserve">Source slide 12. 10:00 to 11:30</a:t>
+              <a:t xml:space="preserve">Source slide 12. 08:45 to 10:45</a:t>
             </a:r>
             <a:endParaRPr lang="en-US" sz="1200"/>
           </a:p>
@@ -4043,7 +3813,7 @@
                 <a:ea typeface="Arial"/>
                 <a:cs typeface="Arial"/>
               </a:rPr>
-              <a:t xml:space="preserve">Bridge: ownership consumes attention, and it is about to consume fuel; limit interfaces, reserve recovery practice, and put the ongoing token burn beside the latency budget.</a:t>
+              <a:t xml:space="preserve">Bridge: ownership consumes attention, and it is about to consume fuel. Two predictions close this talk and I will label them as predictions once, because I have measured neither. The first: tokens stop being a build cost and become a running cost, defensive agents run forever, and the ongoing burn belongs in the design doc beside the latency budget, with an owner who is not whoever wrote the prompt.</a:t>
             </a:r>
             <a:endParaRPr lang="en-US" sz="1200"/>
           </a:p>
@@ -4156,7 +3926,7 @@
                 <a:ea typeface="Arial"/>
                 <a:cs typeface="Arial"/>
               </a:rPr>
-              <a:t xml:space="preserve">Source slide 15. 11:30 to 13:30</a:t>
+              <a:t xml:space="preserve">Source slide 15. 10:45 to 13:30</a:t>
             </a:r>
             <a:endParaRPr lang="en-US" sz="1200"/>
           </a:p>
@@ -4340,7 +4110,7 @@
                 <a:ea typeface="Arial"/>
                 <a:cs typeface="Arial"/>
               </a:rPr>
-              <a:t xml:space="preserve">Which raises the question this room should actually be arguing about. Should OpenAI and Anthropic end up owning every software channel? Watch what happens when the assistants ship real-time collaboration: who spends less time in email, Slack and Google Docs then? I can already make and edit images and video in ways that make me less likely to open Photoshop or DaVinci. If I need a jingle for the company, I ask Suno and it is done. So is everything you spent a lifetime learning, mastering and fighting with about to be irrelevant? Yes. At least as you know it.</a:t>
+              <a:t xml:space="preserve">Second prediction, and this one is less comfortable. AI does not magically make software work. Well-understood software still gets harder to operate as the world moves under it: you outgrow a performance envelope, you accumulate features, somebody deprecates your dependency. Generation makes the first version cheap. It does not make the tenth year cheap.</a:t>
             </a:r>
             <a:endParaRPr lang="en-US" sz="1200"/>
           </a:p>
@@ -4683,7 +4453,7 @@
                 <a:ea typeface="Arial"/>
                 <a:cs typeface="Arial"/>
               </a:rPr>
-              <a:t xml:space="preserve">Source slide 15. 11:30 to 13:30</a:t>
+              <a:t xml:space="preserve">Source slide 15. 10:45 to 13:30</a:t>
             </a:r>
             <a:endParaRPr lang="en-US" sz="1200"/>
           </a:p>
@@ -4867,7 +4637,7 @@
                 <a:ea typeface="Arial"/>
                 <a:cs typeface="Arial"/>
               </a:rPr>
-              <a:t xml:space="preserve">Which raises the question this room should actually be arguing about. Should OpenAI and Anthropic end up owning every software channel? Watch what happens when the assistants ship real-time collaboration: who spends less time in email, Slack and Google Docs then? I can already make and edit images and video in ways that make me less likely to open Photoshop or DaVinci. If I need a jingle for the company, I ask Suno and it is done. So is everything you spent a lifetime learning, mastering and fighting with about to be irrelevant? Yes. At least as you know it.</a:t>
+              <a:t xml:space="preserve">Second prediction, and this one is less comfortable. AI does not magically make software work. Well-understood software still gets harder to operate as the world moves under it: you outgrow a performance envelope, you accumulate features, somebody deprecates your dependency. Generation makes the first version cheap. It does not make the tenth year cheap.</a:t>
             </a:r>
             <a:endParaRPr lang="en-US" sz="1200"/>
           </a:p>
@@ -5798,167 +5568,6 @@
                 <a:ea typeface="Arial"/>
                 <a:cs typeface="Arial"/>
               </a:rPr>
-              <a:t xml:space="preserve">Back to the org chart. Some of those</a:t>
-            </a:r>
-            <a:endParaRPr lang="en-US" sz="1500"/>
-          </a:p>
-          <a:p>
-            <a:pPr marL="0" indent="0">
-              <a:lnSpc>
-                <a:spcPts val="1950"/>
-              </a:lnSpc>
-              <a:spcAft>
-                <a:spcPts val="0"/>
-              </a:spcAft>
-              <a:buNone/>
-            </a:pPr>
-            <a:r>
-              <a:rPr lang="en-US" sz="1500" b="0">
-                <a:solidFill>
-                  <a:srgbClr val="202B33"/>
-                </a:solidFill>
-                <a:latin typeface="Arial"/>
-                <a:ea typeface="Arial"/>
-                <a:cs typeface="Arial"/>
-              </a:rPr>
-              <a:t xml:space="preserve">boundaries exist because the work really is</a:t>
-            </a:r>
-            <a:endParaRPr lang="en-US" sz="1500"/>
-          </a:p>
-          <a:p>
-            <a:pPr marL="0" indent="0">
-              <a:lnSpc>
-                <a:spcPts val="1950"/>
-              </a:lnSpc>
-              <a:spcAft>
-                <a:spcPts val="0"/>
-              </a:spcAft>
-              <a:buNone/>
-            </a:pPr>
-            <a:r>
-              <a:rPr lang="en-US" sz="1500" b="0">
-                <a:solidFill>
-                  <a:srgbClr val="202B33"/>
-                </a:solidFill>
-                <a:latin typeface="Arial"/>
-                <a:ea typeface="Arial"/>
-                <a:cs typeface="Arial"/>
-              </a:rPr>
-              <a:t xml:space="preserve">different. Some exist because the person</a:t>
-            </a:r>
-            <a:endParaRPr lang="en-US" sz="1500"/>
-          </a:p>
-          <a:p>
-            <a:pPr marL="0" indent="0">
-              <a:lnSpc>
-                <a:spcPts val="1950"/>
-              </a:lnSpc>
-              <a:spcAft>
-                <a:spcPts val="0"/>
-              </a:spcAft>
-              <a:buNone/>
-            </a:pPr>
-            <a:r>
-              <a:rPr lang="en-US" sz="1500" b="0">
-                <a:solidFill>
-                  <a:srgbClr val="202B33"/>
-                </a:solidFill>
-                <a:latin typeface="Arial"/>
-                <a:ea typeface="Arial"/>
-                <a:cs typeface="Arial"/>
-              </a:rPr>
-              <a:t xml:space="preserve">with the spreadsheet sat in another</a:t>
-            </a:r>
-            <a:endParaRPr lang="en-US" sz="1500"/>
-          </a:p>
-          <a:p>
-            <a:pPr marL="0" indent="0">
-              <a:lnSpc>
-                <a:spcPts val="1950"/>
-              </a:lnSpc>
-              <a:spcAft>
-                <a:spcPts val="0"/>
-              </a:spcAft>
-              <a:buNone/>
-            </a:pPr>
-            <a:r>
-              <a:rPr lang="en-US" sz="1500" b="0">
-                <a:solidFill>
-                  <a:srgbClr val="202B33"/>
-                </a:solidFill>
-                <a:latin typeface="Arial"/>
-                <a:ea typeface="Arial"/>
-                <a:cs typeface="Arial"/>
-              </a:rPr>
-              <a:t xml:space="preserve">department. We should know which before</a:t>
-            </a:r>
-            <a:endParaRPr lang="en-US" sz="1500"/>
-          </a:p>
-          <a:p>
-            <a:pPr marL="0" indent="0">
-              <a:lnSpc>
-                <a:spcPts val="1950"/>
-              </a:lnSpc>
-              <a:spcAft>
-                <a:spcPts val="0"/>
-              </a:spcAft>
-              <a:buNone/>
-            </a:pPr>
-            <a:r>
-              <a:rPr lang="en-US" sz="1500" b="0">
-                <a:solidFill>
-                  <a:srgbClr val="202B33"/>
-                </a:solidFill>
-                <a:latin typeface="Arial"/>
-                <a:ea typeface="Arial"/>
-                <a:cs typeface="Arial"/>
-              </a:rPr>
-              <a:t xml:space="preserve">teaching agents to repeat them.</a:t>
-            </a:r>
-            <a:endParaRPr lang="en-US" sz="1500"/>
-          </a:p>
-          <a:p>
-            <a:pPr marL="0" indent="0">
-              <a:lnSpc>
-                <a:spcPts val="1950"/>
-              </a:lnSpc>
-              <a:spcAft>
-                <a:spcPts val="0"/>
-              </a:spcAft>
-              <a:buNone/>
-            </a:pPr>
-            <a:r>
-              <a:rPr lang="en-US" sz="1500" b="0">
-                <a:solidFill>
-                  <a:srgbClr val="202B33"/>
-                </a:solidFill>
-                <a:latin typeface="Arial"/>
-                <a:ea typeface="Arial"/>
-                <a:cs typeface="Arial"/>
-              </a:rPr>
-              <a:t xml:space="preserve"/>
-            </a:r>
-            <a:endParaRPr lang="en-US" sz="1500"/>
-          </a:p>
-          <a:p>
-            <a:pPr marL="0" indent="0">
-              <a:lnSpc>
-                <a:spcPts val="1950"/>
-              </a:lnSpc>
-              <a:spcAft>
-                <a:spcPts val="0"/>
-              </a:spcAft>
-              <a:buNone/>
-            </a:pPr>
-            <a:r>
-              <a:rPr lang="en-US" sz="1500" b="0">
-                <a:solidFill>
-                  <a:srgbClr val="202B33"/>
-                </a:solidFill>
-                <a:latin typeface="Arial"/>
-                <a:ea typeface="Arial"/>
-                <a:cs typeface="Arial"/>
-              </a:rPr>
               <a:t xml:space="preserve">Take one boundary. What arrives, what</a:t>
             </a:r>
             <a:endParaRPr lang="en-US" sz="1500"/>
@@ -6147,167 +5756,6 @@
                 <a:cs typeface="Arial"/>
               </a:rPr>
               <a:t xml:space="preserve">agent does not have to guess.</a:t>
-            </a:r>
-            <a:endParaRPr lang="en-US" sz="1500"/>
-          </a:p>
-          <a:p>
-            <a:pPr marL="0" indent="0">
-              <a:lnSpc>
-                <a:spcPts val="1950"/>
-              </a:lnSpc>
-              <a:spcAft>
-                <a:spcPts val="0"/>
-              </a:spcAft>
-              <a:buNone/>
-            </a:pPr>
-            <a:r>
-              <a:rPr lang="en-US" sz="1500" b="0">
-                <a:solidFill>
-                  <a:srgbClr val="202B33"/>
-                </a:solidFill>
-                <a:latin typeface="Arial"/>
-                <a:ea typeface="Arial"/>
-                <a:cs typeface="Arial"/>
-              </a:rPr>
-              <a:t xml:space="preserve"/>
-            </a:r>
-            <a:endParaRPr lang="en-US" sz="1500"/>
-          </a:p>
-          <a:p>
-            <a:pPr marL="0" indent="0">
-              <a:lnSpc>
-                <a:spcPts val="1950"/>
-              </a:lnSpc>
-              <a:spcAft>
-                <a:spcPts val="0"/>
-              </a:spcAft>
-              <a:buNone/>
-            </a:pPr>
-            <a:r>
-              <a:rPr lang="en-US" sz="1500" b="0">
-                <a:solidFill>
-                  <a:srgbClr val="202B33"/>
-                </a:solidFill>
-                <a:latin typeface="Arial"/>
-                <a:ea typeface="Arial"/>
-                <a:cs typeface="Arial"/>
-              </a:rPr>
-              <a:t xml:space="preserve">Then price ownership, and price the fuel.</a:t>
-            </a:r>
-            <a:endParaRPr lang="en-US" sz="1500"/>
-          </a:p>
-          <a:p>
-            <a:pPr marL="0" indent="0">
-              <a:lnSpc>
-                <a:spcPts val="1950"/>
-              </a:lnSpc>
-              <a:spcAft>
-                <a:spcPts val="0"/>
-              </a:spcAft>
-              <a:buNone/>
-            </a:pPr>
-            <a:r>
-              <a:rPr lang="en-US" sz="1500" b="0">
-                <a:solidFill>
-                  <a:srgbClr val="202B33"/>
-                </a:solidFill>
-                <a:latin typeface="Arial"/>
-                <a:ea typeface="Arial"/>
-                <a:cs typeface="Arial"/>
-              </a:rPr>
-              <a:t xml:space="preserve">Six agents do not become free because one</a:t>
-            </a:r>
-            <a:endParaRPr lang="en-US" sz="1500"/>
-          </a:p>
-          <a:p>
-            <a:pPr marL="0" indent="0">
-              <a:lnSpc>
-                <a:spcPts val="1950"/>
-              </a:lnSpc>
-              <a:spcAft>
-                <a:spcPts val="0"/>
-              </a:spcAft>
-              <a:buNone/>
-            </a:pPr>
-            <a:r>
-              <a:rPr lang="en-US" sz="1500" b="0">
-                <a:solidFill>
-                  <a:srgbClr val="202B33"/>
-                </a:solidFill>
-                <a:latin typeface="Arial"/>
-                <a:ea typeface="Arial"/>
-                <a:cs typeface="Arial"/>
-              </a:rPr>
-              <a:t xml:space="preserve">person has their names in a config file,</a:t>
-            </a:r>
-            <a:endParaRPr lang="en-US" sz="1500"/>
-          </a:p>
-          <a:p>
-            <a:pPr marL="0" indent="0">
-              <a:lnSpc>
-                <a:spcPts val="1950"/>
-              </a:lnSpc>
-              <a:spcAft>
-                <a:spcPts val="0"/>
-              </a:spcAft>
-              <a:buNone/>
-            </a:pPr>
-            <a:r>
-              <a:rPr lang="en-US" sz="1500" b="0">
-                <a:solidFill>
-                  <a:srgbClr val="202B33"/>
-                </a:solidFill>
-                <a:latin typeface="Arial"/>
-                <a:ea typeface="Arial"/>
-                <a:cs typeface="Arial"/>
-              </a:rPr>
-              <a:t xml:space="preserve">and neither does the burn that keeps them</a:t>
-            </a:r>
-            <a:endParaRPr lang="en-US" sz="1500"/>
-          </a:p>
-          <a:p>
-            <a:pPr marL="0" indent="0">
-              <a:lnSpc>
-                <a:spcPts val="1950"/>
-              </a:lnSpc>
-              <a:spcAft>
-                <a:spcPts val="0"/>
-              </a:spcAft>
-              <a:buNone/>
-            </a:pPr>
-            <a:r>
-              <a:rPr lang="en-US" sz="1500" b="0">
-                <a:solidFill>
-                  <a:srgbClr val="202B33"/>
-                </a:solidFill>
-                <a:latin typeface="Arial"/>
-                <a:ea typeface="Arial"/>
-                <a:cs typeface="Arial"/>
-              </a:rPr>
-              <a:t xml:space="preserve">running. Put permission before customer</a:t>
-            </a:r>
-            <a:endParaRPr lang="en-US" sz="1500"/>
-          </a:p>
-          <a:p>
-            <a:pPr marL="0" indent="0">
-              <a:lnSpc>
-                <a:spcPts val="1950"/>
-              </a:lnSpc>
-              <a:spcAft>
-                <a:spcPts val="0"/>
-              </a:spcAft>
-              <a:buNone/>
-            </a:pPr>
-            <a:r>
-              <a:rPr lang="en-US" sz="1500" b="0">
-                <a:solidFill>
-                  <a:srgbClr val="202B33"/>
-                </a:solidFill>
-                <a:latin typeface="Arial"/>
-                <a:ea typeface="Arial"/>
-                <a:cs typeface="Arial"/>
-              </a:rPr>
-              <a:t xml:space="preserve">consequences.</a:t>
             </a:r>
             <a:endParaRPr lang="en-US" sz="1500"/>
           </a:p>
@@ -8646,121 +8094,6 @@
             </a:r>
             <a:endParaRPr lang="en-US" sz="1500"/>
           </a:p>
-          <a:p>
-            <a:pPr marL="0" indent="0">
-              <a:lnSpc>
-                <a:spcPts val="1950"/>
-              </a:lnSpc>
-              <a:spcAft>
-                <a:spcPts val="0"/>
-              </a:spcAft>
-              <a:buNone/>
-            </a:pPr>
-            <a:r>
-              <a:rPr lang="en-US" sz="1500" b="0">
-                <a:solidFill>
-                  <a:srgbClr val="202B33"/>
-                </a:solidFill>
-                <a:latin typeface="Arial"/>
-                <a:ea typeface="Arial"/>
-                <a:cs typeface="Arial"/>
-              </a:rPr>
-              <a:t xml:space="preserve"/>
-            </a:r>
-            <a:endParaRPr lang="en-US" sz="1500"/>
-          </a:p>
-          <a:p>
-            <a:pPr marL="0" indent="0">
-              <a:lnSpc>
-                <a:spcPts val="1950"/>
-              </a:lnSpc>
-              <a:spcAft>
-                <a:spcPts val="0"/>
-              </a:spcAft>
-              <a:buNone/>
-            </a:pPr>
-            <a:r>
-              <a:rPr lang="en-US" sz="1500" b="0">
-                <a:solidFill>
-                  <a:srgbClr val="202B33"/>
-                </a:solidFill>
-                <a:latin typeface="Arial"/>
-                <a:ea typeface="Arial"/>
-                <a:cs typeface="Arial"/>
-              </a:rPr>
-              <a:t xml:space="preserve">Apply that question inside a product group.</a:t>
-            </a:r>
-            <a:endParaRPr lang="en-US" sz="1500"/>
-          </a:p>
-          <a:p>
-            <a:pPr marL="0" indent="0">
-              <a:lnSpc>
-                <a:spcPts val="1950"/>
-              </a:lnSpc>
-              <a:spcAft>
-                <a:spcPts val="0"/>
-              </a:spcAft>
-              <a:buNone/>
-            </a:pPr>
-            <a:r>
-              <a:rPr lang="en-US" sz="1500" b="0">
-                <a:solidFill>
-                  <a:srgbClr val="202B33"/>
-                </a:solidFill>
-                <a:latin typeface="Arial"/>
-                <a:ea typeface="Arial"/>
-                <a:cs typeface="Arial"/>
-              </a:rPr>
-              <a:t xml:space="preserve">A weekly brief may have existed because</a:t>
-            </a:r>
-            <a:endParaRPr lang="en-US" sz="1500"/>
-          </a:p>
-          <a:p>
-            <a:pPr marL="0" indent="0">
-              <a:lnSpc>
-                <a:spcPts val="1950"/>
-              </a:lnSpc>
-              <a:spcAft>
-                <a:spcPts val="0"/>
-              </a:spcAft>
-              <a:buNone/>
-            </a:pPr>
-            <a:r>
-              <a:rPr lang="en-US" sz="1500" b="0">
-                <a:solidFill>
-                  <a:srgbClr val="202B33"/>
-                </a:solidFill>
-                <a:latin typeface="Arial"/>
-                <a:ea typeface="Arial"/>
-                <a:cs typeface="Arial"/>
-              </a:rPr>
-              <a:t xml:space="preserve">collecting it took somebody two days. A</a:t>
-            </a:r>
-            <a:endParaRPr lang="en-US" sz="1500"/>
-          </a:p>
-          <a:p>
-            <a:pPr marL="0" indent="0">
-              <a:lnSpc>
-                <a:spcPts val="1950"/>
-              </a:lnSpc>
-              <a:spcAft>
-                <a:spcPts val="0"/>
-              </a:spcAft>
-              <a:buNone/>
-            </a:pPr>
-            <a:r>
-              <a:rPr lang="en-US" sz="1500" b="0">
-                <a:solidFill>
-                  <a:srgbClr val="202B33"/>
-                </a:solidFill>
-                <a:latin typeface="Arial"/>
-                <a:ea typeface="Arial"/>
-                <a:cs typeface="Arial"/>
-              </a:rPr>
-              <a:t xml:space="preserve">separate triage meeting may have existed</a:t>
-            </a:r>
-            <a:endParaRPr lang="en-US" sz="1500"/>
-          </a:p>
         </p:txBody>
       </p:sp>
       <p:sp>
@@ -8787,98 +8120,6 @@
             <a:noAutofit/>
           </a:bodyPr>
           <a:lstStyle/>
-          <a:p>
-            <a:pPr marL="0" indent="0">
-              <a:lnSpc>
-                <a:spcPts val="1950"/>
-              </a:lnSpc>
-              <a:spcAft>
-                <a:spcPts val="0"/>
-              </a:spcAft>
-              <a:buNone/>
-            </a:pPr>
-            <a:r>
-              <a:rPr lang="en-US" sz="1500" b="0">
-                <a:solidFill>
-                  <a:srgbClr val="202B33"/>
-                </a:solidFill>
-                <a:latin typeface="Arial"/>
-                <a:ea typeface="Arial"/>
-                <a:cs typeface="Arial"/>
-              </a:rPr>
-              <a:t xml:space="preserve">because linking a complaint to a trace</a:t>
-            </a:r>
-            <a:endParaRPr lang="en-US" sz="1500"/>
-          </a:p>
-          <a:p>
-            <a:pPr marL="0" indent="0">
-              <a:lnSpc>
-                <a:spcPts val="1950"/>
-              </a:lnSpc>
-              <a:spcAft>
-                <a:spcPts val="0"/>
-              </a:spcAft>
-              <a:buNone/>
-            </a:pPr>
-            <a:r>
-              <a:rPr lang="en-US" sz="1500" b="0">
-                <a:solidFill>
-                  <a:srgbClr val="202B33"/>
-                </a:solidFill>
-                <a:latin typeface="Arial"/>
-                <a:ea typeface="Arial"/>
-                <a:cs typeface="Arial"/>
-              </a:rPr>
-              <a:t xml:space="preserve">required three people and a spreadsheet. If</a:t>
-            </a:r>
-            <a:endParaRPr lang="en-US" sz="1500"/>
-          </a:p>
-          <a:p>
-            <a:pPr marL="0" indent="0">
-              <a:lnSpc>
-                <a:spcPts val="1950"/>
-              </a:lnSpc>
-              <a:spcAft>
-                <a:spcPts val="0"/>
-              </a:spcAft>
-              <a:buNone/>
-            </a:pPr>
-            <a:r>
-              <a:rPr lang="en-US" sz="1500" b="0">
-                <a:solidFill>
-                  <a:srgbClr val="202B33"/>
-                </a:solidFill>
-                <a:latin typeface="Arial"/>
-                <a:ea typeface="Arial"/>
-                <a:cs typeface="Arial"/>
-              </a:rPr>
-              <a:t xml:space="preserve">those costs change, the old boundary</a:t>
-            </a:r>
-            <a:endParaRPr lang="en-US" sz="1500"/>
-          </a:p>
-          <a:p>
-            <a:pPr marL="0" indent="0">
-              <a:lnSpc>
-                <a:spcPts val="1950"/>
-              </a:lnSpc>
-              <a:spcAft>
-                <a:spcPts val="0"/>
-              </a:spcAft>
-              <a:buNone/>
-            </a:pPr>
-            <a:r>
-              <a:rPr lang="en-US" sz="1500" b="0">
-                <a:solidFill>
-                  <a:srgbClr val="202B33"/>
-                </a:solidFill>
-                <a:latin typeface="Arial"/>
-                <a:ea typeface="Arial"/>
-                <a:cs typeface="Arial"/>
-              </a:rPr>
-              <a:t xml:space="preserve">deserves another look.</a:t>
-            </a:r>
-            <a:endParaRPr lang="en-US" sz="1500"/>
-          </a:p>
           <a:p>
             <a:pPr marL="0" indent="0">
               <a:lnSpc>
@@ -9626,75 +8867,6 @@
             </a:r>
             <a:endParaRPr lang="en-US" sz="1200"/>
           </a:p>
-          <a:p>
-            <a:pPr marL="0" indent="0">
-              <a:lnSpc>
-                <a:spcPts val="1575"/>
-              </a:lnSpc>
-              <a:spcAft>
-                <a:spcPts val="0"/>
-              </a:spcAft>
-              <a:buNone/>
-            </a:pPr>
-            <a:r>
-              <a:rPr lang="en-US" sz="1200" b="0">
-                <a:solidFill>
-                  <a:srgbClr val="202B33"/>
-                </a:solidFill>
-                <a:latin typeface="Arial"/>
-                <a:ea typeface="Arial"/>
-                <a:cs typeface="Arial"/>
-              </a:rPr>
-              <a:t xml:space="preserve">a robot beside every job title.</a:t>
-            </a:r>
-            <a:endParaRPr lang="en-US" sz="1200"/>
-          </a:p>
-          <a:p>
-            <a:pPr marL="0" indent="0">
-              <a:lnSpc>
-                <a:spcPts val="1575"/>
-              </a:lnSpc>
-              <a:spcAft>
-                <a:spcPts val="0"/>
-              </a:spcAft>
-              <a:buNone/>
-            </a:pPr>
-            <a:r>
-              <a:rPr lang="en-US" sz="1200" b="0">
-                <a:solidFill>
-                  <a:srgbClr val="202B33"/>
-                </a:solidFill>
-                <a:latin typeface="Arial"/>
-                <a:ea typeface="Arial"/>
-                <a:cs typeface="Arial"/>
-              </a:rPr>
-              <a:t xml:space="preserve"/>
-            </a:r>
-            <a:endParaRPr lang="en-US" sz="1200"/>
-          </a:p>
-          <a:p>
-            <a:pPr marL="0" indent="0">
-              <a:lnSpc>
-                <a:spcPts val="1575"/>
-              </a:lnSpc>
-              <a:spcAft>
-                <a:spcPts val="0"/>
-              </a:spcAft>
-              <a:buNone/>
-            </a:pPr>
-            <a:r>
-              <a:rPr lang="en-US" sz="1200" b="0">
-                <a:solidFill>
-                  <a:srgbClr val="202B33"/>
-                </a:solidFill>
-                <a:latin typeface="Arial"/>
-                <a:ea typeface="Arial"/>
-                <a:cs typeface="Arial"/>
-              </a:rPr>
-              <a:t xml:space="preserve">Research delivers a brief with source URLs and dates.</a:t>
-            </a:r>
-            <a:endParaRPr lang="en-US" sz="1200"/>
-          </a:p>
         </p:txBody>
       </p:sp>
       <p:sp>
@@ -9740,6 +8912,75 @@
                 <a:ea typeface="Arial"/>
                 <a:cs typeface="Arial"/>
               </a:rPr>
+              <a:t xml:space="preserve">a robot beside every job title.</a:t>
+            </a:r>
+            <a:endParaRPr lang="en-US" sz="1200"/>
+          </a:p>
+          <a:p>
+            <a:pPr marL="0" indent="0">
+              <a:lnSpc>
+                <a:spcPts val="1575"/>
+              </a:lnSpc>
+              <a:spcAft>
+                <a:spcPts val="0"/>
+              </a:spcAft>
+              <a:buNone/>
+            </a:pPr>
+            <a:r>
+              <a:rPr lang="en-US" sz="1200" b="0">
+                <a:solidFill>
+                  <a:srgbClr val="202B33"/>
+                </a:solidFill>
+                <a:latin typeface="Arial"/>
+                <a:ea typeface="Arial"/>
+                <a:cs typeface="Arial"/>
+              </a:rPr>
+              <a:t xml:space="preserve"/>
+            </a:r>
+            <a:endParaRPr lang="en-US" sz="1200"/>
+          </a:p>
+          <a:p>
+            <a:pPr marL="0" indent="0">
+              <a:lnSpc>
+                <a:spcPts val="1575"/>
+              </a:lnSpc>
+              <a:spcAft>
+                <a:spcPts val="0"/>
+              </a:spcAft>
+              <a:buNone/>
+            </a:pPr>
+            <a:r>
+              <a:rPr lang="en-US" sz="1200" b="0">
+                <a:solidFill>
+                  <a:srgbClr val="202B33"/>
+                </a:solidFill>
+                <a:latin typeface="Arial"/>
+                <a:ea typeface="Arial"/>
+                <a:cs typeface="Arial"/>
+              </a:rPr>
+              <a:t xml:space="preserve">Research delivers a brief with source URLs and dates.</a:t>
+            </a:r>
+            <a:endParaRPr lang="en-US" sz="1200"/>
+          </a:p>
+          <a:p>
+            <a:pPr marL="0" indent="0">
+              <a:lnSpc>
+                <a:spcPts val="1575"/>
+              </a:lnSpc>
+              <a:spcAft>
+                <a:spcPts val="0"/>
+              </a:spcAft>
+              <a:buNone/>
+            </a:pPr>
+            <a:r>
+              <a:rPr lang="en-US" sz="1200" b="0">
+                <a:solidFill>
+                  <a:srgbClr val="202B33"/>
+                </a:solidFill>
+                <a:latin typeface="Arial"/>
+                <a:ea typeface="Arial"/>
+                <a:cs typeface="Arial"/>
+              </a:rPr>
               <a:t xml:space="preserve">Feedback delivers clusters with the original</a:t>
             </a:r>
             <a:endParaRPr lang="en-US" sz="1200"/>
@@ -9856,167 +9097,6 @@
                 <a:cs typeface="Arial"/>
               </a:rPr>
               <a:t xml:space="preserve">decision won.</a:t>
-            </a:r>
-            <a:endParaRPr lang="en-US" sz="1200"/>
-          </a:p>
-          <a:p>
-            <a:pPr marL="0" indent="0">
-              <a:lnSpc>
-                <a:spcPts val="1575"/>
-              </a:lnSpc>
-              <a:spcAft>
-                <a:spcPts val="0"/>
-              </a:spcAft>
-              <a:buNone/>
-            </a:pPr>
-            <a:r>
-              <a:rPr lang="en-US" sz="1200" b="0">
-                <a:solidFill>
-                  <a:srgbClr val="202B33"/>
-                </a:solidFill>
-                <a:latin typeface="Arial"/>
-                <a:ea typeface="Arial"/>
-                <a:cs typeface="Arial"/>
-              </a:rPr>
-              <a:t xml:space="preserve"/>
-            </a:r>
-            <a:endParaRPr lang="en-US" sz="1200"/>
-          </a:p>
-          <a:p>
-            <a:pPr marL="0" indent="0">
-              <a:lnSpc>
-                <a:spcPts val="1575"/>
-              </a:lnSpc>
-              <a:spcAft>
-                <a:spcPts val="0"/>
-              </a:spcAft>
-              <a:buNone/>
-            </a:pPr>
-            <a:r>
-              <a:rPr lang="en-US" sz="1200" b="0">
-                <a:solidFill>
-                  <a:srgbClr val="202B33"/>
-                </a:solidFill>
-                <a:latin typeface="Arial"/>
-                <a:ea typeface="Arial"/>
-                <a:cs typeface="Arial"/>
-              </a:rPr>
-              <a:t xml:space="preserve">Team Topologies distinguishes collaboration, service</a:t>
-            </a:r>
-            <a:endParaRPr lang="en-US" sz="1200"/>
-          </a:p>
-          <a:p>
-            <a:pPr marL="0" indent="0">
-              <a:lnSpc>
-                <a:spcPts val="1575"/>
-              </a:lnSpc>
-              <a:spcAft>
-                <a:spcPts val="0"/>
-              </a:spcAft>
-              <a:buNone/>
-            </a:pPr>
-            <a:r>
-              <a:rPr lang="en-US" sz="1200" b="0">
-                <a:solidFill>
-                  <a:srgbClr val="202B33"/>
-                </a:solidFill>
-                <a:latin typeface="Arial"/>
-                <a:ea typeface="Arial"/>
-                <a:cs typeface="Arial"/>
-              </a:rPr>
-              <a:t xml:space="preserve">consumption, and facilitation. Use collaboration</a:t>
-            </a:r>
-            <a:endParaRPr lang="en-US" sz="1200"/>
-          </a:p>
-          <a:p>
-            <a:pPr marL="0" indent="0">
-              <a:lnSpc>
-                <a:spcPts val="1575"/>
-              </a:lnSpc>
-              <a:spcAft>
-                <a:spcPts val="0"/>
-              </a:spcAft>
-              <a:buNone/>
-            </a:pPr>
-            <a:r>
-              <a:rPr lang="en-US" sz="1200" b="0">
-                <a:solidFill>
-                  <a:srgbClr val="202B33"/>
-                </a:solidFill>
-                <a:latin typeface="Arial"/>
-                <a:ea typeface="Arial"/>
-                <a:cs typeface="Arial"/>
-              </a:rPr>
-              <a:t xml:space="preserve">while discovering the interface. Make the repeated</a:t>
-            </a:r>
-            <a:endParaRPr lang="en-US" sz="1200"/>
-          </a:p>
-          <a:p>
-            <a:pPr marL="0" indent="0">
-              <a:lnSpc>
-                <a:spcPts val="1575"/>
-              </a:lnSpc>
-              <a:spcAft>
-                <a:spcPts val="0"/>
-              </a:spcAft>
-              <a:buNone/>
-            </a:pPr>
-            <a:r>
-              <a:rPr lang="en-US" sz="1200" b="0">
-                <a:solidFill>
-                  <a:srgbClr val="202B33"/>
-                </a:solidFill>
-                <a:latin typeface="Arial"/>
-                <a:ea typeface="Arial"/>
-                <a:cs typeface="Arial"/>
-              </a:rPr>
-              <a:t xml:space="preserve">delivery a service once the contract is understood.</a:t>
-            </a:r>
-            <a:endParaRPr lang="en-US" sz="1200"/>
-          </a:p>
-          <a:p>
-            <a:pPr marL="0" indent="0">
-              <a:lnSpc>
-                <a:spcPts val="1575"/>
-              </a:lnSpc>
-              <a:spcAft>
-                <a:spcPts val="0"/>
-              </a:spcAft>
-              <a:buNone/>
-            </a:pPr>
-            <a:r>
-              <a:rPr lang="en-US" sz="1200" b="0">
-                <a:solidFill>
-                  <a:srgbClr val="202B33"/>
-                </a:solidFill>
-                <a:latin typeface="Arial"/>
-                <a:ea typeface="Arial"/>
-                <a:cs typeface="Arial"/>
-              </a:rPr>
-              <a:t xml:space="preserve">Keep facilitation temporary. An agent roster without</a:t>
-            </a:r>
-            <a:endParaRPr lang="en-US" sz="1200"/>
-          </a:p>
-          <a:p>
-            <a:pPr marL="0" indent="0">
-              <a:lnSpc>
-                <a:spcPts val="1575"/>
-              </a:lnSpc>
-              <a:spcAft>
-                <a:spcPts val="0"/>
-              </a:spcAft>
-              <a:buNone/>
-            </a:pPr>
-            <a:r>
-              <a:rPr lang="en-US" sz="1200" b="0">
-                <a:solidFill>
-                  <a:srgbClr val="202B33"/>
-                </a:solidFill>
-                <a:latin typeface="Arial"/>
-                <a:ea typeface="Arial"/>
-                <a:cs typeface="Arial"/>
-              </a:rPr>
-              <a:t xml:space="preserve">these wires is a seating plan.</a:t>
             </a:r>
             <a:endParaRPr lang="en-US" sz="1200"/>
           </a:p>
@@ -10482,75 +9562,6 @@
             </a:r>
             <a:endParaRPr lang="en-US" sz="1500"/>
           </a:p>
-          <a:p>
-            <a:pPr marL="0" indent="0">
-              <a:lnSpc>
-                <a:spcPts val="1950"/>
-              </a:lnSpc>
-              <a:spcAft>
-                <a:spcPts val="0"/>
-              </a:spcAft>
-              <a:buNone/>
-            </a:pPr>
-            <a:r>
-              <a:rPr lang="en-US" sz="1500" b="0">
-                <a:solidFill>
-                  <a:srgbClr val="202B33"/>
-                </a:solidFill>
-                <a:latin typeface="Arial"/>
-                <a:ea typeface="Arial"/>
-                <a:cs typeface="Arial"/>
-              </a:rPr>
-              <a:t xml:space="preserve">supposed to measure.</a:t>
-            </a:r>
-            <a:endParaRPr lang="en-US" sz="1500"/>
-          </a:p>
-          <a:p>
-            <a:pPr marL="0" indent="0">
-              <a:lnSpc>
-                <a:spcPts val="1950"/>
-              </a:lnSpc>
-              <a:spcAft>
-                <a:spcPts val="0"/>
-              </a:spcAft>
-              <a:buNone/>
-            </a:pPr>
-            <a:r>
-              <a:rPr lang="en-US" sz="1500" b="0">
-                <a:solidFill>
-                  <a:srgbClr val="202B33"/>
-                </a:solidFill>
-                <a:latin typeface="Arial"/>
-                <a:ea typeface="Arial"/>
-                <a:cs typeface="Arial"/>
-              </a:rPr>
-              <a:t xml:space="preserve"/>
-            </a:r>
-            <a:endParaRPr lang="en-US" sz="1500"/>
-          </a:p>
-          <a:p>
-            <a:pPr marL="0" indent="0">
-              <a:lnSpc>
-                <a:spcPts val="1950"/>
-              </a:lnSpc>
-              <a:spcAft>
-                <a:spcPts val="0"/>
-              </a:spcAft>
-              <a:buNone/>
-            </a:pPr>
-            <a:r>
-              <a:rPr lang="en-US" sz="1500" b="0">
-                <a:solidFill>
-                  <a:srgbClr val="202B33"/>
-                </a:solidFill>
-                <a:latin typeface="Arial"/>
-                <a:ea typeface="Arial"/>
-                <a:cs typeface="Arial"/>
-              </a:rPr>
-              <a:t xml:space="preserve">Our target is onboarding activation. The</a:t>
-            </a:r>
-            <a:endParaRPr lang="en-US" sz="1500"/>
-          </a:p>
         </p:txBody>
       </p:sp>
       <p:sp>
@@ -10596,6 +9607,75 @@
                 <a:ea typeface="Arial"/>
                 <a:cs typeface="Arial"/>
               </a:rPr>
+              <a:t xml:space="preserve">supposed to measure.</a:t>
+            </a:r>
+            <a:endParaRPr lang="en-US" sz="1500"/>
+          </a:p>
+          <a:p>
+            <a:pPr marL="0" indent="0">
+              <a:lnSpc>
+                <a:spcPts val="1950"/>
+              </a:lnSpc>
+              <a:spcAft>
+                <a:spcPts val="0"/>
+              </a:spcAft>
+              <a:buNone/>
+            </a:pPr>
+            <a:r>
+              <a:rPr lang="en-US" sz="1500" b="0">
+                <a:solidFill>
+                  <a:srgbClr val="202B33"/>
+                </a:solidFill>
+                <a:latin typeface="Arial"/>
+                <a:ea typeface="Arial"/>
+                <a:cs typeface="Arial"/>
+              </a:rPr>
+              <a:t xml:space="preserve"/>
+            </a:r>
+            <a:endParaRPr lang="en-US" sz="1500"/>
+          </a:p>
+          <a:p>
+            <a:pPr marL="0" indent="0">
+              <a:lnSpc>
+                <a:spcPts val="1950"/>
+              </a:lnSpc>
+              <a:spcAft>
+                <a:spcPts val="0"/>
+              </a:spcAft>
+              <a:buNone/>
+            </a:pPr>
+            <a:r>
+              <a:rPr lang="en-US" sz="1500" b="0">
+                <a:solidFill>
+                  <a:srgbClr val="202B33"/>
+                </a:solidFill>
+                <a:latin typeface="Arial"/>
+                <a:ea typeface="Arial"/>
+                <a:cs typeface="Arial"/>
+              </a:rPr>
+              <a:t xml:space="preserve">Our target is onboarding activation. The</a:t>
+            </a:r>
+            <a:endParaRPr lang="en-US" sz="1500"/>
+          </a:p>
+          <a:p>
+            <a:pPr marL="0" indent="0">
+              <a:lnSpc>
+                <a:spcPts val="1950"/>
+              </a:lnSpc>
+              <a:spcAft>
+                <a:spcPts val="0"/>
+              </a:spcAft>
+              <a:buNone/>
+            </a:pPr>
+            <a:r>
+              <a:rPr lang="en-US" sz="1500" b="0">
+                <a:solidFill>
+                  <a:srgbClr val="202B33"/>
+                </a:solidFill>
+                <a:latin typeface="Arial"/>
+                <a:ea typeface="Arial"/>
+                <a:cs typeface="Arial"/>
+              </a:rPr>
               <a:t xml:space="preserve">next screen has three candidates. Before we</a:t>
             </a:r>
             <a:endParaRPr lang="en-US" sz="1500"/>
@@ -10689,144 +9769,6 @@
                 <a:cs typeface="Arial"/>
               </a:rPr>
               <a:t xml:space="preserve">and C.</a:t>
-            </a:r>
-            <a:endParaRPr lang="en-US" sz="1500"/>
-          </a:p>
-          <a:p>
-            <a:pPr marL="0" indent="0">
-              <a:lnSpc>
-                <a:spcPts val="1950"/>
-              </a:lnSpc>
-              <a:spcAft>
-                <a:spcPts val="0"/>
-              </a:spcAft>
-              <a:buNone/>
-            </a:pPr>
-            <a:r>
-              <a:rPr lang="en-US" sz="1500" b="0">
-                <a:solidFill>
-                  <a:srgbClr val="202B33"/>
-                </a:solidFill>
-                <a:latin typeface="Arial"/>
-                <a:ea typeface="Arial"/>
-                <a:cs typeface="Arial"/>
-              </a:rPr>
-              <a:t xml:space="preserve"/>
-            </a:r>
-            <a:endParaRPr lang="en-US" sz="1500"/>
-          </a:p>
-          <a:p>
-            <a:pPr marL="0" indent="0">
-              <a:lnSpc>
-                <a:spcPts val="1950"/>
-              </a:lnSpc>
-              <a:spcAft>
-                <a:spcPts val="0"/>
-              </a:spcAft>
-              <a:buNone/>
-            </a:pPr>
-            <a:r>
-              <a:rPr lang="en-US" sz="1500" b="0">
-                <a:solidFill>
-                  <a:srgbClr val="202B33"/>
-                </a:solidFill>
-                <a:latin typeface="Arial"/>
-                <a:ea typeface="Arial"/>
-                <a:cs typeface="Arial"/>
-              </a:rPr>
-              <a:t xml:space="preserve">The interesting question is what the</a:t>
-            </a:r>
-            <a:endParaRPr lang="en-US" sz="1500"/>
-          </a:p>
-          <a:p>
-            <a:pPr marL="0" indent="0">
-              <a:lnSpc>
-                <a:spcPts val="1950"/>
-              </a:lnSpc>
-              <a:spcAft>
-                <a:spcPts val="0"/>
-              </a:spcAft>
-              <a:buNone/>
-            </a:pPr>
-            <a:r>
-              <a:rPr lang="en-US" sz="1500" b="0">
-                <a:solidFill>
-                  <a:srgbClr val="202B33"/>
-                </a:solidFill>
-                <a:latin typeface="Arial"/>
-                <a:ea typeface="Arial"/>
-                <a:cs typeface="Arial"/>
-              </a:rPr>
-              <a:t xml:space="preserve">winning candidate did to earn the number. A</a:t>
-            </a:r>
-            <a:endParaRPr lang="en-US" sz="1500"/>
-          </a:p>
-          <a:p>
-            <a:pPr marL="0" indent="0">
-              <a:lnSpc>
-                <a:spcPts val="1950"/>
-              </a:lnSpc>
-              <a:spcAft>
-                <a:spcPts val="0"/>
-              </a:spcAft>
-              <a:buNone/>
-            </a:pPr>
-            <a:r>
-              <a:rPr lang="en-US" sz="1500" b="0">
-                <a:solidFill>
-                  <a:srgbClr val="202B33"/>
-                </a:solidFill>
-                <a:latin typeface="Arial"/>
-                <a:ea typeface="Arial"/>
-                <a:cs typeface="Arial"/>
-              </a:rPr>
-              <a:t xml:space="preserve">metric tells you that something moved. It</a:t>
-            </a:r>
-            <a:endParaRPr lang="en-US" sz="1500"/>
-          </a:p>
-          <a:p>
-            <a:pPr marL="0" indent="0">
-              <a:lnSpc>
-                <a:spcPts val="1950"/>
-              </a:lnSpc>
-              <a:spcAft>
-                <a:spcPts val="0"/>
-              </a:spcAft>
-              <a:buNone/>
-            </a:pPr>
-            <a:r>
-              <a:rPr lang="en-US" sz="1500" b="0">
-                <a:solidFill>
-                  <a:srgbClr val="202B33"/>
-                </a:solidFill>
-                <a:latin typeface="Arial"/>
-                <a:ea typeface="Arial"/>
-                <a:cs typeface="Arial"/>
-              </a:rPr>
-              <a:t xml:space="preserve">does not tell you whether you wanted the</a:t>
-            </a:r>
-            <a:endParaRPr lang="en-US" sz="1500"/>
-          </a:p>
-          <a:p>
-            <a:pPr marL="0" indent="0">
-              <a:lnSpc>
-                <a:spcPts val="1950"/>
-              </a:lnSpc>
-              <a:spcAft>
-                <a:spcPts val="0"/>
-              </a:spcAft>
-              <a:buNone/>
-            </a:pPr>
-            <a:r>
-              <a:rPr lang="en-US" sz="1500" b="0">
-                <a:solidFill>
-                  <a:srgbClr val="202B33"/>
-                </a:solidFill>
-                <a:latin typeface="Arial"/>
-                <a:ea typeface="Arial"/>
-                <a:cs typeface="Arial"/>
-              </a:rPr>
-              <a:t xml:space="preserve">movement.</a:t>
             </a:r>
             <a:endParaRPr lang="en-US" sz="1500"/>
           </a:p>
@@ -12844,14 +11786,69 @@
       </p:sp>
       <p:sp>
         <p:nvSpPr>
-          <p:cNvPr id="4" name="Text 4"/>
+          <p:cNvPr id="4" name="Image background"/>
+          <p:cNvSpPr/>
+          <p:nvPr/>
+        </p:nvSpPr>
+        <p:spPr>
+          <a:xfrm>
+            <a:off x="1554480" y="1781175"/>
+            <a:ext cx="6949440" cy="2714625"/>
+          </a:xfrm>
+          <a:prstGeom prst="rect">
+            <a:avLst/>
+          </a:prstGeom>
+          <a:solidFill>
+            <a:srgbClr val="161D26"/>
+          </a:solidFill>
+          <a:ln>
+            <a:noFill/>
+          </a:ln>
+        </p:spPr>
+      </p:sp>
+      <p:pic>
+        <p:nvPicPr>
+          <p:cNvPr id="5" name="f1622316a6930645ce2701de05e30b019086ac9401bd06917acb71f400ca25e3" descr="Prediction: a grid of chosen apps gives way to one generated surface, adapting per person, with a revived terminal beside it. Who owns that channel is still open, and non-frontier builders can rethink any app as AI-native."/>
+          <p:cNvPicPr>
+            <a:picLocks noChangeAspect="1"/>
+          </p:cNvPicPr>
+          <p:nvPr/>
+        </p:nvPicPr>
+        <p:blipFill>
+          <a:blip r:embed="rIdImage1">
+            <a:extLst>
+              <a:ext uri="{96DAC541-7B7A-43D3-8B79-37D633B846F1}">
+                <asvg:svgBlip xmlns:asvg="http://schemas.microsoft.com/office/drawing/2016/SVG/main" r:embed="rIdSvg1"/>
+              </a:ext>
+            </a:extLst>
+          </a:blip>
+          <a:stretch>
+            <a:fillRect/>
+          </a:stretch>
+        </p:blipFill>
+        <p:spPr>
+          <a:xfrm>
+            <a:off x="1554480" y="1781175"/>
+            <a:ext cx="6949440" cy="2714625"/>
+          </a:xfrm>
+          <a:prstGeom prst="rect">
+            <a:avLst/>
+          </a:prstGeom>
+          <a:ln>
+            <a:noFill/>
+          </a:ln>
+        </p:spPr>
+      </p:pic>
+      <p:sp>
+        <p:nvSpPr>
+          <p:cNvPr id="6" name="Text 6"/>
           <p:cNvSpPr txBox="1"/>
           <p:nvPr/>
         </p:nvSpPr>
         <p:spPr>
           <a:xfrm>
-            <a:off x="457200" y="1971675"/>
-            <a:ext cx="4352925" cy="5314950"/>
+            <a:off x="457200" y="4648200"/>
+            <a:ext cx="4352925" cy="2647950"/>
           </a:xfrm>
           <a:prstGeom prst="rect">
             <a:avLst/>
@@ -12869,153 +11866,130 @@
           <a:p>
             <a:pPr marL="0" indent="0">
               <a:lnSpc>
-                <a:spcPts val="1950"/>
-              </a:lnSpc>
-              <a:spcAft>
-                <a:spcPts val="0"/>
-              </a:spcAft>
-              <a:buNone/>
-            </a:pPr>
-            <a:r>
-              <a:rPr lang="en-US" sz="1500" b="0">
-                <a:solidFill>
-                  <a:srgbClr val="202B33"/>
-                </a:solidFill>
-                <a:latin typeface="Arial"/>
-                <a:ea typeface="Arial"/>
-                <a:cs typeface="Arial"/>
-              </a:rPr>
-              <a:t xml:space="preserve">Generated UI, adapting in real time, per</a:t>
-            </a:r>
-            <a:endParaRPr lang="en-US" sz="1500"/>
-          </a:p>
-          <a:p>
-            <a:pPr marL="0" indent="0">
-              <a:lnSpc>
-                <a:spcPts val="1950"/>
-              </a:lnSpc>
-              <a:spcAft>
-                <a:spcPts val="0"/>
-              </a:spcAft>
-              <a:buNone/>
-            </a:pPr>
-            <a:r>
-              <a:rPr lang="en-US" sz="1500" b="0">
-                <a:solidFill>
-                  <a:srgbClr val="202B33"/>
-                </a:solidFill>
-                <a:latin typeface="Arial"/>
-                <a:ea typeface="Arial"/>
-                <a:cs typeface="Arial"/>
-              </a:rPr>
-              <a:t xml:space="preserve">person</a:t>
-            </a:r>
-            <a:endParaRPr lang="en-US" sz="1500"/>
-          </a:p>
-          <a:p>
-            <a:pPr marL="0" indent="0">
-              <a:lnSpc>
-                <a:spcPts val="1950"/>
-              </a:lnSpc>
-              <a:spcAft>
-                <a:spcPts val="0"/>
-              </a:spcAft>
-              <a:buNone/>
-            </a:pPr>
-            <a:r>
-              <a:rPr lang="en-US" sz="1500" b="0">
-                <a:solidFill>
-                  <a:srgbClr val="202B33"/>
-                </a:solidFill>
-                <a:latin typeface="Arial"/>
-                <a:ea typeface="Arial"/>
-                <a:cs typeface="Arial"/>
-              </a:rPr>
-              <a:t xml:space="preserve"/>
-            </a:r>
-            <a:endParaRPr lang="en-US" sz="1500"/>
-          </a:p>
-          <a:p>
-            <a:pPr marL="0" indent="0">
-              <a:lnSpc>
-                <a:spcPts val="1950"/>
-              </a:lnSpc>
-              <a:spcAft>
-                <a:spcPts val="0"/>
-              </a:spcAft>
-              <a:buNone/>
-            </a:pPr>
-            <a:r>
-              <a:rPr lang="en-US" sz="1500" b="0">
-                <a:solidFill>
-                  <a:srgbClr val="202B33"/>
-                </a:solidFill>
-                <a:latin typeface="Arial"/>
-                <a:ea typeface="Arial"/>
-                <a:cs typeface="Arial"/>
-              </a:rPr>
-              <a:t xml:space="preserve">Yes, the software you mastered is going</a:t>
-            </a:r>
-            <a:endParaRPr lang="en-US" sz="1500"/>
-          </a:p>
-          <a:p>
-            <a:pPr marL="0" indent="0">
-              <a:lnSpc>
-                <a:spcPts val="1950"/>
-              </a:lnSpc>
-              <a:spcAft>
-                <a:spcPts val="0"/>
-              </a:spcAft>
-              <a:buNone/>
-            </a:pPr>
-            <a:r>
-              <a:rPr lang="en-US" sz="1500" b="0">
-                <a:solidFill>
-                  <a:srgbClr val="202B33"/>
-                </a:solidFill>
-                <a:latin typeface="Arial"/>
-                <a:ea typeface="Arial"/>
-                <a:cs typeface="Arial"/>
-              </a:rPr>
-              <a:t xml:space="preserve">away. As you know it.</a:t>
-            </a:r>
-            <a:endParaRPr lang="en-US" sz="1500"/>
-          </a:p>
-          <a:p>
-            <a:pPr marL="0" indent="0">
-              <a:lnSpc>
-                <a:spcPts val="1950"/>
-              </a:lnSpc>
-              <a:spcAft>
-                <a:spcPts val="0"/>
-              </a:spcAft>
-              <a:buNone/>
-            </a:pPr>
-            <a:r>
-              <a:rPr lang="en-US" sz="1500" b="0">
-                <a:solidFill>
-                  <a:srgbClr val="202B33"/>
-                </a:solidFill>
-                <a:latin typeface="Arial"/>
-                <a:ea typeface="Arial"/>
-                <a:cs typeface="Arial"/>
-              </a:rPr>
-              <a:t xml:space="preserve"/>
-            </a:r>
-            <a:endParaRPr lang="en-US" sz="1500"/>
-          </a:p>
-          <a:p>
-            <a:pPr marL="0" indent="0">
-              <a:lnSpc>
-                <a:spcPts val="1950"/>
-              </a:lnSpc>
-              <a:spcAft>
-                <a:spcPts val="0"/>
-              </a:spcAft>
-              <a:buNone/>
-            </a:pPr>
-            <a:r>
-              <a:rPr lang="en-US" sz="1500" b="0">
+                <a:spcPts val="1575"/>
+              </a:lnSpc>
+              <a:spcAft>
+                <a:spcPts val="0"/>
+              </a:spcAft>
+              <a:buNone/>
+            </a:pPr>
+            <a:r>
+              <a:rPr lang="en-US" sz="1200" b="0">
+                <a:solidFill>
+                  <a:srgbClr val="202B33"/>
+                </a:solidFill>
+                <a:latin typeface="Arial"/>
+                <a:ea typeface="Arial"/>
+                <a:cs typeface="Arial"/>
+              </a:rPr>
+              <a:t xml:space="preserve">Generated UI, adapting in real time, per person</a:t>
+            </a:r>
+            <a:endParaRPr lang="en-US" sz="1200"/>
+          </a:p>
+          <a:p>
+            <a:pPr marL="0" indent="0">
+              <a:lnSpc>
+                <a:spcPts val="1575"/>
+              </a:lnSpc>
+              <a:spcAft>
+                <a:spcPts val="0"/>
+              </a:spcAft>
+              <a:buNone/>
+            </a:pPr>
+            <a:r>
+              <a:rPr lang="en-US" sz="1200" b="0">
+                <a:solidFill>
+                  <a:srgbClr val="202B33"/>
+                </a:solidFill>
+                <a:latin typeface="Arial"/>
+                <a:ea typeface="Arial"/>
+                <a:cs typeface="Arial"/>
+              </a:rPr>
+              <a:t xml:space="preserve"/>
+            </a:r>
+            <a:endParaRPr lang="en-US" sz="1200"/>
+          </a:p>
+          <a:p>
+            <a:pPr marL="0" indent="0">
+              <a:lnSpc>
+                <a:spcPts val="1575"/>
+              </a:lnSpc>
+              <a:spcAft>
+                <a:spcPts val="0"/>
+              </a:spcAft>
+              <a:buNone/>
+            </a:pPr>
+            <a:r>
+              <a:rPr lang="en-US" sz="1200" b="0">
+                <a:solidFill>
+                  <a:srgbClr val="202B33"/>
+                </a:solidFill>
+                <a:latin typeface="Arial"/>
+                <a:ea typeface="Arial"/>
+                <a:cs typeface="Arial"/>
+              </a:rPr>
+              <a:t xml:space="preserve">Yes, the software you mastered is going away. As you</a:t>
+            </a:r>
+            <a:endParaRPr lang="en-US" sz="1200"/>
+          </a:p>
+          <a:p>
+            <a:pPr marL="0" indent="0">
+              <a:lnSpc>
+                <a:spcPts val="1575"/>
+              </a:lnSpc>
+              <a:spcAft>
+                <a:spcPts val="0"/>
+              </a:spcAft>
+              <a:buNone/>
+            </a:pPr>
+            <a:r>
+              <a:rPr lang="en-US" sz="1200" b="0">
+                <a:solidFill>
+                  <a:srgbClr val="202B33"/>
+                </a:solidFill>
+                <a:latin typeface="Arial"/>
+                <a:ea typeface="Arial"/>
+                <a:cs typeface="Arial"/>
+              </a:rPr>
+              <a:t xml:space="preserve">know it.</a:t>
+            </a:r>
+            <a:endParaRPr lang="en-US" sz="1200"/>
+          </a:p>
+          <a:p>
+            <a:pPr marL="0" indent="0">
+              <a:lnSpc>
+                <a:spcPts val="1575"/>
+              </a:lnSpc>
+              <a:spcAft>
+                <a:spcPts val="0"/>
+              </a:spcAft>
+              <a:buNone/>
+            </a:pPr>
+            <a:r>
+              <a:rPr lang="en-US" sz="1200" b="0">
+                <a:solidFill>
+                  <a:srgbClr val="202B33"/>
+                </a:solidFill>
+                <a:latin typeface="Arial"/>
+                <a:ea typeface="Arial"/>
+                <a:cs typeface="Arial"/>
+              </a:rPr>
+              <a:t xml:space="preserve"/>
+            </a:r>
+            <a:endParaRPr lang="en-US" sz="1200"/>
+          </a:p>
+          <a:p>
+            <a:pPr marL="0" indent="0">
+              <a:lnSpc>
+                <a:spcPts val="1575"/>
+              </a:lnSpc>
+              <a:spcAft>
+                <a:spcPts val="0"/>
+              </a:spcAft>
+              <a:buNone/>
+            </a:pPr>
+            <a:r>
+              <a:rPr lang="en-US" sz="1200" b="0">
                 <a:solidFill>
                   <a:srgbClr val="202B33"/>
                 </a:solidFill>
@@ -13025,204 +11999,135 @@
               </a:rPr>
               <a:t xml:space="preserve">The channel is not spoken for.</a:t>
             </a:r>
-            <a:endParaRPr lang="en-US" sz="1500"/>
-          </a:p>
-          <a:p>
-            <a:pPr marL="0" indent="0">
-              <a:lnSpc>
-                <a:spcPts val="1950"/>
-              </a:lnSpc>
-              <a:spcAft>
-                <a:spcPts val="0"/>
-              </a:spcAft>
-              <a:buNone/>
-            </a:pPr>
-            <a:r>
-              <a:rPr lang="en-US" sz="1500" b="0">
-                <a:solidFill>
-                  <a:srgbClr val="202B33"/>
-                </a:solidFill>
-                <a:latin typeface="Arial"/>
-                <a:ea typeface="Arial"/>
-                <a:cs typeface="Arial"/>
-              </a:rPr>
-              <a:t xml:space="preserve"/>
-            </a:r>
-            <a:endParaRPr lang="en-US" sz="1500"/>
-          </a:p>
-          <a:p>
-            <a:pPr marL="0" indent="0">
-              <a:lnSpc>
-                <a:spcPts val="1950"/>
-              </a:lnSpc>
-              <a:spcAft>
-                <a:spcPts val="0"/>
-              </a:spcAft>
-              <a:buNone/>
-            </a:pPr>
-            <a:r>
-              <a:rPr lang="en-US" sz="1500" b="0">
-                <a:solidFill>
-                  <a:srgbClr val="202B33"/>
-                </a:solidFill>
-                <a:latin typeface="Arial"/>
-                <a:ea typeface="Arial"/>
-                <a:cs typeface="Arial"/>
-              </a:rPr>
-              <a:t xml:space="preserve">Which raises the question this room should</a:t>
-            </a:r>
-            <a:endParaRPr lang="en-US" sz="1500"/>
-          </a:p>
-          <a:p>
-            <a:pPr marL="0" indent="0">
-              <a:lnSpc>
-                <a:spcPts val="1950"/>
-              </a:lnSpc>
-              <a:spcAft>
-                <a:spcPts val="0"/>
-              </a:spcAft>
-              <a:buNone/>
-            </a:pPr>
-            <a:r>
-              <a:rPr lang="en-US" sz="1500" b="0">
-                <a:solidFill>
-                  <a:srgbClr val="202B33"/>
-                </a:solidFill>
-                <a:latin typeface="Arial"/>
-                <a:ea typeface="Arial"/>
-                <a:cs typeface="Arial"/>
-              </a:rPr>
-              <a:t xml:space="preserve">actually be arguing about. Should OpenAI</a:t>
-            </a:r>
-            <a:endParaRPr lang="en-US" sz="1500"/>
-          </a:p>
-          <a:p>
-            <a:pPr marL="0" indent="0">
-              <a:lnSpc>
-                <a:spcPts val="1950"/>
-              </a:lnSpc>
-              <a:spcAft>
-                <a:spcPts val="0"/>
-              </a:spcAft>
-              <a:buNone/>
-            </a:pPr>
-            <a:r>
-              <a:rPr lang="en-US" sz="1500" b="0">
-                <a:solidFill>
-                  <a:srgbClr val="202B33"/>
-                </a:solidFill>
-                <a:latin typeface="Arial"/>
-                <a:ea typeface="Arial"/>
-                <a:cs typeface="Arial"/>
-              </a:rPr>
-              <a:t xml:space="preserve">and Anthropic end up owning every software</a:t>
-            </a:r>
-            <a:endParaRPr lang="en-US" sz="1500"/>
-          </a:p>
-          <a:p>
-            <a:pPr marL="0" indent="0">
-              <a:lnSpc>
-                <a:spcPts val="1950"/>
-              </a:lnSpc>
-              <a:spcAft>
-                <a:spcPts val="0"/>
-              </a:spcAft>
-              <a:buNone/>
-            </a:pPr>
-            <a:r>
-              <a:rPr lang="en-US" sz="1500" b="0">
-                <a:solidFill>
-                  <a:srgbClr val="202B33"/>
-                </a:solidFill>
-                <a:latin typeface="Arial"/>
-                <a:ea typeface="Arial"/>
-                <a:cs typeface="Arial"/>
-              </a:rPr>
-              <a:t xml:space="preserve">channel? Watch what happens when the</a:t>
-            </a:r>
-            <a:endParaRPr lang="en-US" sz="1500"/>
-          </a:p>
-          <a:p>
-            <a:pPr marL="0" indent="0">
-              <a:lnSpc>
-                <a:spcPts val="1950"/>
-              </a:lnSpc>
-              <a:spcAft>
-                <a:spcPts val="0"/>
-              </a:spcAft>
-              <a:buNone/>
-            </a:pPr>
-            <a:r>
-              <a:rPr lang="en-US" sz="1500" b="0">
-                <a:solidFill>
-                  <a:srgbClr val="202B33"/>
-                </a:solidFill>
-                <a:latin typeface="Arial"/>
-                <a:ea typeface="Arial"/>
-                <a:cs typeface="Arial"/>
-              </a:rPr>
-              <a:t xml:space="preserve">assistants ship real-time collaboration:</a:t>
-            </a:r>
-            <a:endParaRPr lang="en-US" sz="1500"/>
-          </a:p>
-          <a:p>
-            <a:pPr marL="0" indent="0">
-              <a:lnSpc>
-                <a:spcPts val="1950"/>
-              </a:lnSpc>
-              <a:spcAft>
-                <a:spcPts val="0"/>
-              </a:spcAft>
-              <a:buNone/>
-            </a:pPr>
-            <a:r>
-              <a:rPr lang="en-US" sz="1500" b="0">
-                <a:solidFill>
-                  <a:srgbClr val="202B33"/>
-                </a:solidFill>
-                <a:latin typeface="Arial"/>
-                <a:ea typeface="Arial"/>
-                <a:cs typeface="Arial"/>
-              </a:rPr>
-              <a:t xml:space="preserve">who spends less time in email, Slack and</a:t>
-            </a:r>
-            <a:endParaRPr lang="en-US" sz="1500"/>
-          </a:p>
-          <a:p>
-            <a:pPr marL="0" indent="0">
-              <a:lnSpc>
-                <a:spcPts val="1950"/>
-              </a:lnSpc>
-              <a:spcAft>
-                <a:spcPts val="0"/>
-              </a:spcAft>
-              <a:buNone/>
-            </a:pPr>
-            <a:r>
-              <a:rPr lang="en-US" sz="1500" b="0">
-                <a:solidFill>
-                  <a:srgbClr val="202B33"/>
-                </a:solidFill>
-                <a:latin typeface="Arial"/>
-                <a:ea typeface="Arial"/>
-                <a:cs typeface="Arial"/>
-              </a:rPr>
-              <a:t xml:space="preserve">Google Docs then? I can already make and</a:t>
-            </a:r>
-            <a:endParaRPr lang="en-US" sz="1500"/>
+            <a:endParaRPr lang="en-US" sz="1200"/>
+          </a:p>
+          <a:p>
+            <a:pPr marL="0" indent="0">
+              <a:lnSpc>
+                <a:spcPts val="1575"/>
+              </a:lnSpc>
+              <a:spcAft>
+                <a:spcPts val="0"/>
+              </a:spcAft>
+              <a:buNone/>
+            </a:pPr>
+            <a:r>
+              <a:rPr lang="en-US" sz="1200" b="0">
+                <a:solidFill>
+                  <a:srgbClr val="202B33"/>
+                </a:solidFill>
+                <a:latin typeface="Arial"/>
+                <a:ea typeface="Arial"/>
+                <a:cs typeface="Arial"/>
+              </a:rPr>
+              <a:t xml:space="preserve"/>
+            </a:r>
+            <a:endParaRPr lang="en-US" sz="1200"/>
+          </a:p>
+          <a:p>
+            <a:pPr marL="0" indent="0">
+              <a:lnSpc>
+                <a:spcPts val="1575"/>
+              </a:lnSpc>
+              <a:spcAft>
+                <a:spcPts val="0"/>
+              </a:spcAft>
+              <a:buNone/>
+            </a:pPr>
+            <a:r>
+              <a:rPr lang="en-US" sz="1200" b="0">
+                <a:solidFill>
+                  <a:srgbClr val="202B33"/>
+                </a:solidFill>
+                <a:latin typeface="Arial"/>
+                <a:ea typeface="Arial"/>
+                <a:cs typeface="Arial"/>
+              </a:rPr>
+              <a:t xml:space="preserve">Second prediction, and this one is less comfortable.</a:t>
+            </a:r>
+            <a:endParaRPr lang="en-US" sz="1200"/>
+          </a:p>
+          <a:p>
+            <a:pPr marL="0" indent="0">
+              <a:lnSpc>
+                <a:spcPts val="1575"/>
+              </a:lnSpc>
+              <a:spcAft>
+                <a:spcPts val="0"/>
+              </a:spcAft>
+              <a:buNone/>
+            </a:pPr>
+            <a:r>
+              <a:rPr lang="en-US" sz="1200" b="0">
+                <a:solidFill>
+                  <a:srgbClr val="202B33"/>
+                </a:solidFill>
+                <a:latin typeface="Arial"/>
+                <a:ea typeface="Arial"/>
+                <a:cs typeface="Arial"/>
+              </a:rPr>
+              <a:t xml:space="preserve">AI does not magically make software work.</a:t>
+            </a:r>
+            <a:endParaRPr lang="en-US" sz="1200"/>
+          </a:p>
+          <a:p>
+            <a:pPr marL="0" indent="0">
+              <a:lnSpc>
+                <a:spcPts val="1575"/>
+              </a:lnSpc>
+              <a:spcAft>
+                <a:spcPts val="0"/>
+              </a:spcAft>
+              <a:buNone/>
+            </a:pPr>
+            <a:r>
+              <a:rPr lang="en-US" sz="1200" b="0">
+                <a:solidFill>
+                  <a:srgbClr val="202B33"/>
+                </a:solidFill>
+                <a:latin typeface="Arial"/>
+                <a:ea typeface="Arial"/>
+                <a:cs typeface="Arial"/>
+              </a:rPr>
+              <a:t xml:space="preserve">Well-understood software still gets harder to operate</a:t>
+            </a:r>
+            <a:endParaRPr lang="en-US" sz="1200"/>
+          </a:p>
+          <a:p>
+            <a:pPr marL="0" indent="0">
+              <a:lnSpc>
+                <a:spcPts val="1575"/>
+              </a:lnSpc>
+              <a:spcAft>
+                <a:spcPts val="0"/>
+              </a:spcAft>
+              <a:buNone/>
+            </a:pPr>
+            <a:r>
+              <a:rPr lang="en-US" sz="1200" b="0">
+                <a:solidFill>
+                  <a:srgbClr val="202B33"/>
+                </a:solidFill>
+                <a:latin typeface="Arial"/>
+                <a:ea typeface="Arial"/>
+                <a:cs typeface="Arial"/>
+              </a:rPr>
+              <a:t xml:space="preserve">as the world moves under it: you outgrow a</a:t>
+            </a:r>
+            <a:endParaRPr lang="en-US" sz="1200"/>
           </a:p>
         </p:txBody>
       </p:sp>
       <p:sp>
         <p:nvSpPr>
-          <p:cNvPr id="5" name="Text 5"/>
+          <p:cNvPr id="7" name="Text 7"/>
           <p:cNvSpPr txBox="1"/>
           <p:nvPr/>
         </p:nvSpPr>
         <p:spPr>
           <a:xfrm>
-            <a:off x="5238750" y="1971675"/>
-            <a:ext cx="4362450" cy="5314950"/>
+            <a:off x="5238750" y="4648200"/>
+            <a:ext cx="4362450" cy="2647950"/>
           </a:xfrm>
           <a:prstGeom prst="rect">
             <a:avLst/>
@@ -13240,314 +12145,222 @@
           <a:p>
             <a:pPr marL="0" indent="0">
               <a:lnSpc>
-                <a:spcPts val="1950"/>
-              </a:lnSpc>
-              <a:spcAft>
-                <a:spcPts val="0"/>
-              </a:spcAft>
-              <a:buNone/>
-            </a:pPr>
-            <a:r>
-              <a:rPr lang="en-US" sz="1500" b="0">
-                <a:solidFill>
-                  <a:srgbClr val="202B33"/>
-                </a:solidFill>
-                <a:latin typeface="Arial"/>
-                <a:ea typeface="Arial"/>
-                <a:cs typeface="Arial"/>
-              </a:rPr>
-              <a:t xml:space="preserve">edit images and video in ways that make me</a:t>
-            </a:r>
-            <a:endParaRPr lang="en-US" sz="1500"/>
-          </a:p>
-          <a:p>
-            <a:pPr marL="0" indent="0">
-              <a:lnSpc>
-                <a:spcPts val="1950"/>
-              </a:lnSpc>
-              <a:spcAft>
-                <a:spcPts val="0"/>
-              </a:spcAft>
-              <a:buNone/>
-            </a:pPr>
-            <a:r>
-              <a:rPr lang="en-US" sz="1500" b="0">
-                <a:solidFill>
-                  <a:srgbClr val="202B33"/>
-                </a:solidFill>
-                <a:latin typeface="Arial"/>
-                <a:ea typeface="Arial"/>
-                <a:cs typeface="Arial"/>
-              </a:rPr>
-              <a:t xml:space="preserve">less likely to open Photoshop or DaVinci.</a:t>
-            </a:r>
-            <a:endParaRPr lang="en-US" sz="1500"/>
-          </a:p>
-          <a:p>
-            <a:pPr marL="0" indent="0">
-              <a:lnSpc>
-                <a:spcPts val="1950"/>
-              </a:lnSpc>
-              <a:spcAft>
-                <a:spcPts val="0"/>
-              </a:spcAft>
-              <a:buNone/>
-            </a:pPr>
-            <a:r>
-              <a:rPr lang="en-US" sz="1500" b="0">
-                <a:solidFill>
-                  <a:srgbClr val="202B33"/>
-                </a:solidFill>
-                <a:latin typeface="Arial"/>
-                <a:ea typeface="Arial"/>
-                <a:cs typeface="Arial"/>
-              </a:rPr>
-              <a:t xml:space="preserve">If I need a jingle for the company, I ask</a:t>
-            </a:r>
-            <a:endParaRPr lang="en-US" sz="1500"/>
-          </a:p>
-          <a:p>
-            <a:pPr marL="0" indent="0">
-              <a:lnSpc>
-                <a:spcPts val="1950"/>
-              </a:lnSpc>
-              <a:spcAft>
-                <a:spcPts val="0"/>
-              </a:spcAft>
-              <a:buNone/>
-            </a:pPr>
-            <a:r>
-              <a:rPr lang="en-US" sz="1500" b="0">
-                <a:solidFill>
-                  <a:srgbClr val="202B33"/>
-                </a:solidFill>
-                <a:latin typeface="Arial"/>
-                <a:ea typeface="Arial"/>
-                <a:cs typeface="Arial"/>
-              </a:rPr>
-              <a:t xml:space="preserve">Suno and it is done. So is everything you</a:t>
-            </a:r>
-            <a:endParaRPr lang="en-US" sz="1500"/>
-          </a:p>
-          <a:p>
-            <a:pPr marL="0" indent="0">
-              <a:lnSpc>
-                <a:spcPts val="1950"/>
-              </a:lnSpc>
-              <a:spcAft>
-                <a:spcPts val="0"/>
-              </a:spcAft>
-              <a:buNone/>
-            </a:pPr>
-            <a:r>
-              <a:rPr lang="en-US" sz="1500" b="0">
-                <a:solidFill>
-                  <a:srgbClr val="202B33"/>
-                </a:solidFill>
-                <a:latin typeface="Arial"/>
-                <a:ea typeface="Arial"/>
-                <a:cs typeface="Arial"/>
-              </a:rPr>
-              <a:t xml:space="preserve">spent a lifetime learning, mastering and</a:t>
-            </a:r>
-            <a:endParaRPr lang="en-US" sz="1500"/>
-          </a:p>
-          <a:p>
-            <a:pPr marL="0" indent="0">
-              <a:lnSpc>
-                <a:spcPts val="1950"/>
-              </a:lnSpc>
-              <a:spcAft>
-                <a:spcPts val="0"/>
-              </a:spcAft>
-              <a:buNone/>
-            </a:pPr>
-            <a:r>
-              <a:rPr lang="en-US" sz="1500" b="0">
-                <a:solidFill>
-                  <a:srgbClr val="202B33"/>
-                </a:solidFill>
-                <a:latin typeface="Arial"/>
-                <a:ea typeface="Arial"/>
-                <a:cs typeface="Arial"/>
-              </a:rPr>
-              <a:t xml:space="preserve">fighting with about to be irrelevant? Yes.</a:t>
-            </a:r>
-            <a:endParaRPr lang="en-US" sz="1500"/>
-          </a:p>
-          <a:p>
-            <a:pPr marL="0" indent="0">
-              <a:lnSpc>
-                <a:spcPts val="1950"/>
-              </a:lnSpc>
-              <a:spcAft>
-                <a:spcPts val="0"/>
-              </a:spcAft>
-              <a:buNone/>
-            </a:pPr>
-            <a:r>
-              <a:rPr lang="en-US" sz="1500" b="0">
-                <a:solidFill>
-                  <a:srgbClr val="202B33"/>
-                </a:solidFill>
-                <a:latin typeface="Arial"/>
-                <a:ea typeface="Arial"/>
-                <a:cs typeface="Arial"/>
-              </a:rPr>
-              <a:t xml:space="preserve">At least as you know it.</a:t>
-            </a:r>
-            <a:endParaRPr lang="en-US" sz="1500"/>
-          </a:p>
-          <a:p>
-            <a:pPr marL="0" indent="0">
-              <a:lnSpc>
-                <a:spcPts val="1950"/>
-              </a:lnSpc>
-              <a:spcAft>
-                <a:spcPts val="0"/>
-              </a:spcAft>
-              <a:buNone/>
-            </a:pPr>
-            <a:r>
-              <a:rPr lang="en-US" sz="1500" b="0">
-                <a:solidFill>
-                  <a:srgbClr val="202B33"/>
-                </a:solidFill>
-                <a:latin typeface="Arial"/>
-                <a:ea typeface="Arial"/>
-                <a:cs typeface="Arial"/>
-              </a:rPr>
-              <a:t xml:space="preserve"/>
-            </a:r>
-            <a:endParaRPr lang="en-US" sz="1500"/>
-          </a:p>
-          <a:p>
-            <a:pPr marL="0" indent="0">
-              <a:lnSpc>
-                <a:spcPts val="1950"/>
-              </a:lnSpc>
-              <a:spcAft>
-                <a:spcPts val="0"/>
-              </a:spcAft>
-              <a:buNone/>
-            </a:pPr>
-            <a:r>
-              <a:rPr lang="en-US" sz="1500" b="0">
-                <a:solidFill>
-                  <a:srgbClr val="202B33"/>
-                </a:solidFill>
-                <a:latin typeface="Arial"/>
-                <a:ea typeface="Arial"/>
-                <a:cs typeface="Arial"/>
-              </a:rPr>
-              <a:t xml:space="preserve">What replaces it looks less like a grid of</a:t>
-            </a:r>
-            <a:endParaRPr lang="en-US" sz="1500"/>
-          </a:p>
-          <a:p>
-            <a:pPr marL="0" indent="0">
-              <a:lnSpc>
-                <a:spcPts val="1950"/>
-              </a:lnSpc>
-              <a:spcAft>
-                <a:spcPts val="0"/>
-              </a:spcAft>
-              <a:buNone/>
-            </a:pPr>
-            <a:r>
-              <a:rPr lang="en-US" sz="1500" b="0">
-                <a:solidFill>
-                  <a:srgbClr val="202B33"/>
-                </a:solidFill>
-                <a:latin typeface="Arial"/>
-                <a:ea typeface="Arial"/>
-                <a:cs typeface="Arial"/>
-              </a:rPr>
-              <a:t xml:space="preserve">apps and more like Minority Report, with a</a:t>
-            </a:r>
-            <a:endParaRPr lang="en-US" sz="1500"/>
-          </a:p>
-          <a:p>
-            <a:pPr marL="0" indent="0">
-              <a:lnSpc>
-                <a:spcPts val="1950"/>
-              </a:lnSpc>
-              <a:spcAft>
-                <a:spcPts val="0"/>
-              </a:spcAft>
-              <a:buNone/>
-            </a:pPr>
-            <a:r>
-              <a:rPr lang="en-US" sz="1500" b="0">
-                <a:solidFill>
-                  <a:srgbClr val="202B33"/>
-                </a:solidFill>
-                <a:latin typeface="Arial"/>
-                <a:ea typeface="Arial"/>
-                <a:cs typeface="Arial"/>
-              </a:rPr>
-              <a:t xml:space="preserve">surprise revival of the terminal. Which is</a:t>
-            </a:r>
-            <a:endParaRPr lang="en-US" sz="1500"/>
-          </a:p>
-          <a:p>
-            <a:pPr marL="0" indent="0">
-              <a:lnSpc>
-                <a:spcPts val="1950"/>
-              </a:lnSpc>
-              <a:spcAft>
-                <a:spcPts val="0"/>
-              </a:spcAft>
-              <a:buNone/>
-            </a:pPr>
-            <a:r>
-              <a:rPr lang="en-US" sz="1500" b="0">
-                <a:solidFill>
-                  <a:srgbClr val="202B33"/>
-                </a:solidFill>
-                <a:latin typeface="Arial"/>
-                <a:ea typeface="Arial"/>
-                <a:cs typeface="Arial"/>
-              </a:rPr>
-              <a:t xml:space="preserve">a Matrix ending when you think about it.</a:t>
-            </a:r>
-            <a:endParaRPr lang="en-US" sz="1500"/>
-          </a:p>
-          <a:p>
-            <a:pPr marL="0" indent="0">
-              <a:lnSpc>
-                <a:spcPts val="1950"/>
-              </a:lnSpc>
-              <a:spcAft>
-                <a:spcPts val="0"/>
-              </a:spcAft>
-              <a:buNone/>
-            </a:pPr>
-            <a:r>
-              <a:rPr lang="en-US" sz="1500" b="0">
-                <a:solidFill>
-                  <a:srgbClr val="202B33"/>
-                </a:solidFill>
-                <a:latin typeface="Arial"/>
-                <a:ea typeface="Arial"/>
-                <a:cs typeface="Arial"/>
-              </a:rPr>
-              <a:t xml:space="preserve">Thanks, AI. Skynet is not so bad if I get</a:t>
-            </a:r>
-            <a:endParaRPr lang="en-US" sz="1500"/>
-          </a:p>
-          <a:p>
-            <a:pPr marL="0" indent="0">
-              <a:lnSpc>
-                <a:spcPts val="1950"/>
-              </a:lnSpc>
-              <a:spcAft>
-                <a:spcPts val="0"/>
-              </a:spcAft>
-              <a:buNone/>
-            </a:pPr>
-            <a:r>
-              <a:rPr lang="en-US" sz="1500" b="0">
+                <a:spcPts val="1575"/>
+              </a:lnSpc>
+              <a:spcAft>
+                <a:spcPts val="0"/>
+              </a:spcAft>
+              <a:buNone/>
+            </a:pPr>
+            <a:r>
+              <a:rPr lang="en-US" sz="1200" b="0">
+                <a:solidFill>
+                  <a:srgbClr val="202B33"/>
+                </a:solidFill>
+                <a:latin typeface="Arial"/>
+                <a:ea typeface="Arial"/>
+                <a:cs typeface="Arial"/>
+              </a:rPr>
+              <a:t xml:space="preserve">performance envelope, you accumulate features,</a:t>
+            </a:r>
+            <a:endParaRPr lang="en-US" sz="1200"/>
+          </a:p>
+          <a:p>
+            <a:pPr marL="0" indent="0">
+              <a:lnSpc>
+                <a:spcPts val="1575"/>
+              </a:lnSpc>
+              <a:spcAft>
+                <a:spcPts val="0"/>
+              </a:spcAft>
+              <a:buNone/>
+            </a:pPr>
+            <a:r>
+              <a:rPr lang="en-US" sz="1200" b="0">
+                <a:solidFill>
+                  <a:srgbClr val="202B33"/>
+                </a:solidFill>
+                <a:latin typeface="Arial"/>
+                <a:ea typeface="Arial"/>
+                <a:cs typeface="Arial"/>
+              </a:rPr>
+              <a:t xml:space="preserve">somebody deprecates your dependency. Generation makes</a:t>
+            </a:r>
+            <a:endParaRPr lang="en-US" sz="1200"/>
+          </a:p>
+          <a:p>
+            <a:pPr marL="0" indent="0">
+              <a:lnSpc>
+                <a:spcPts val="1575"/>
+              </a:lnSpc>
+              <a:spcAft>
+                <a:spcPts val="0"/>
+              </a:spcAft>
+              <a:buNone/>
+            </a:pPr>
+            <a:r>
+              <a:rPr lang="en-US" sz="1200" b="0">
+                <a:solidFill>
+                  <a:srgbClr val="202B33"/>
+                </a:solidFill>
+                <a:latin typeface="Arial"/>
+                <a:ea typeface="Arial"/>
+                <a:cs typeface="Arial"/>
+              </a:rPr>
+              <a:t xml:space="preserve">the first version cheap. It does not make the tenth</a:t>
+            </a:r>
+            <a:endParaRPr lang="en-US" sz="1200"/>
+          </a:p>
+          <a:p>
+            <a:pPr marL="0" indent="0">
+              <a:lnSpc>
+                <a:spcPts val="1575"/>
+              </a:lnSpc>
+              <a:spcAft>
+                <a:spcPts val="0"/>
+              </a:spcAft>
+              <a:buNone/>
+            </a:pPr>
+            <a:r>
+              <a:rPr lang="en-US" sz="1200" b="0">
+                <a:solidFill>
+                  <a:srgbClr val="202B33"/>
+                </a:solidFill>
+                <a:latin typeface="Arial"/>
+                <a:ea typeface="Arial"/>
+                <a:cs typeface="Arial"/>
+              </a:rPr>
+              <a:t xml:space="preserve">year cheap.</a:t>
+            </a:r>
+            <a:endParaRPr lang="en-US" sz="1200"/>
+          </a:p>
+          <a:p>
+            <a:pPr marL="0" indent="0">
+              <a:lnSpc>
+                <a:spcPts val="1575"/>
+              </a:lnSpc>
+              <a:spcAft>
+                <a:spcPts val="0"/>
+              </a:spcAft>
+              <a:buNone/>
+            </a:pPr>
+            <a:r>
+              <a:rPr lang="en-US" sz="1200" b="0">
+                <a:solidFill>
+                  <a:srgbClr val="202B33"/>
+                </a:solidFill>
+                <a:latin typeface="Arial"/>
+                <a:ea typeface="Arial"/>
+                <a:cs typeface="Arial"/>
+              </a:rPr>
+              <a:t xml:space="preserve"/>
+            </a:r>
+            <a:endParaRPr lang="en-US" sz="1200"/>
+          </a:p>
+          <a:p>
+            <a:pPr marL="0" indent="0">
+              <a:lnSpc>
+                <a:spcPts val="1575"/>
+              </a:lnSpc>
+              <a:spcAft>
+                <a:spcPts val="0"/>
+              </a:spcAft>
+              <a:buNone/>
+            </a:pPr>
+            <a:r>
+              <a:rPr lang="en-US" sz="1200" b="0">
+                <a:solidFill>
+                  <a:srgbClr val="202B33"/>
+                </a:solidFill>
+                <a:latin typeface="Arial"/>
+                <a:ea typeface="Arial"/>
+                <a:cs typeface="Arial"/>
+              </a:rPr>
+              <a:t xml:space="preserve">What replaces it looks less like a grid of apps and</a:t>
+            </a:r>
+            <a:endParaRPr lang="en-US" sz="1200"/>
+          </a:p>
+          <a:p>
+            <a:pPr marL="0" indent="0">
+              <a:lnSpc>
+                <a:spcPts val="1575"/>
+              </a:lnSpc>
+              <a:spcAft>
+                <a:spcPts val="0"/>
+              </a:spcAft>
+              <a:buNone/>
+            </a:pPr>
+            <a:r>
+              <a:rPr lang="en-US" sz="1200" b="0">
+                <a:solidFill>
+                  <a:srgbClr val="202B33"/>
+                </a:solidFill>
+                <a:latin typeface="Arial"/>
+                <a:ea typeface="Arial"/>
+                <a:cs typeface="Arial"/>
+              </a:rPr>
+              <a:t xml:space="preserve">more like Minority Report, with a surprise revival of</a:t>
+            </a:r>
+            <a:endParaRPr lang="en-US" sz="1200"/>
+          </a:p>
+          <a:p>
+            <a:pPr marL="0" indent="0">
+              <a:lnSpc>
+                <a:spcPts val="1575"/>
+              </a:lnSpc>
+              <a:spcAft>
+                <a:spcPts val="0"/>
+              </a:spcAft>
+              <a:buNone/>
+            </a:pPr>
+            <a:r>
+              <a:rPr lang="en-US" sz="1200" b="0">
+                <a:solidFill>
+                  <a:srgbClr val="202B33"/>
+                </a:solidFill>
+                <a:latin typeface="Arial"/>
+                <a:ea typeface="Arial"/>
+                <a:cs typeface="Arial"/>
+              </a:rPr>
+              <a:t xml:space="preserve">the terminal. Which is a Matrix ending when you think</a:t>
+            </a:r>
+            <a:endParaRPr lang="en-US" sz="1200"/>
+          </a:p>
+          <a:p>
+            <a:pPr marL="0" indent="0">
+              <a:lnSpc>
+                <a:spcPts val="1575"/>
+              </a:lnSpc>
+              <a:spcAft>
+                <a:spcPts val="0"/>
+              </a:spcAft>
+              <a:buNone/>
+            </a:pPr>
+            <a:r>
+              <a:rPr lang="en-US" sz="1200" b="0">
+                <a:solidFill>
+                  <a:srgbClr val="202B33"/>
+                </a:solidFill>
+                <a:latin typeface="Arial"/>
+                <a:ea typeface="Arial"/>
+                <a:cs typeface="Arial"/>
+              </a:rPr>
+              <a:t xml:space="preserve">about it. Thanks, AI. Skynet is not so bad if I get</a:t>
+            </a:r>
+            <a:endParaRPr lang="en-US" sz="1200"/>
+          </a:p>
+          <a:p>
+            <a:pPr marL="0" indent="0">
+              <a:lnSpc>
+                <a:spcPts val="1575"/>
+              </a:lnSpc>
+              <a:spcAft>
+                <a:spcPts val="0"/>
+              </a:spcAft>
+              <a:buNone/>
+            </a:pPr>
+            <a:r>
+              <a:rPr lang="en-US" sz="1200" b="0">
                 <a:solidFill>
                   <a:srgbClr val="202B33"/>
                 </a:solidFill>
@@ -13557,13 +12370,13 @@
               </a:rPr>
               <a:t xml:space="preserve">to keep my CLIs.</a:t>
             </a:r>
-            <a:endParaRPr lang="en-US" sz="1500"/>
+            <a:endParaRPr lang="en-US" sz="1200"/>
           </a:p>
         </p:txBody>
       </p:sp>
       <p:sp>
         <p:nvSpPr>
-          <p:cNvPr id="6" name="Text 6"/>
+          <p:cNvPr id="8" name="Text 8"/>
           <p:cNvSpPr txBox="1"/>
           <p:nvPr/>
         </p:nvSpPr>
@@ -13612,7 +12425,7 @@
       </p:sp>
       <p:sp>
         <p:nvSpPr>
-          <p:cNvPr id="7" name="Text 7"/>
+          <p:cNvPr id="9" name="Text 9"/>
           <p:cNvSpPr txBox="1"/>
           <p:nvPr/>
         </p:nvSpPr>

--- a/artifacts/speaking-portfolio-expanded/decks/product-engineering-15min-handout.pptx
+++ b/artifacts/speaking-portfolio-expanded/decks/product-engineering-15min-handout.pptx
@@ -4202,7 +4202,7 @@
                 <a:ea typeface="Arial"/>
                 <a:cs typeface="Arial"/>
               </a:rPr>
-              <a:t xml:space="preserve">Here is the part I want you to leave with. That future is not spoken for. GPT image being pretty good does not mean the story of image creation belongs to the big players, and the same is true in whichever industry you work in. Those of us who do not work at a frontier lab, the organic agents in the room, get to rethink any and every app as an AI-native system from the boundary up. That is this whole talk one level higher: do not photocopy today's product categories onto tomorrow's substrate either.</a:t>
+              <a:t xml:space="preserve">Here is the part I want you to leave with. That future is not spoken for. GPT image being pretty good does not mean image creation belongs to the big players, and the same holds in whichever industry you work in. Those of us who do not work at a frontier lab — the organic agents in the room — get to rethink any and every app as an AI-native system, from the boundary up. That is this whole talk one level higher: do not photocopy today's product categories onto tomorrow's substrate either.</a:t>
             </a:r>
             <a:endParaRPr lang="en-US" sz="1200"/>
           </a:p>
@@ -4729,7 +4729,7 @@
                 <a:ea typeface="Arial"/>
                 <a:cs typeface="Arial"/>
               </a:rPr>
-              <a:t xml:space="preserve">Here is the part I want you to leave with. That future is not spoken for. GPT image being pretty good does not mean the story of image creation belongs to the big players, and the same is true in whichever industry you work in. Those of us who do not work at a frontier lab, the organic agents in the room, get to rethink any and every app as an AI-native system from the boundary up. That is this whole talk one level higher: do not photocopy today's product categories onto tomorrow's substrate either.</a:t>
+              <a:t xml:space="preserve">Here is the part I want you to leave with. That future is not spoken for. GPT image being pretty good does not mean image creation belongs to the big players, and the same holds in whichever industry you work in. Those of us who do not work at a frontier lab — the organic agents in the room — get to rethink any and every app as an AI-native system, from the boundary up. That is this whole talk one level higher: do not photocopy today's product categories onto tomorrow's substrate either.</a:t>
             </a:r>
             <a:endParaRPr lang="en-US" sz="1200"/>
           </a:p>
@@ -12692,99 +12692,76 @@
                 <a:ea typeface="Arial"/>
                 <a:cs typeface="Arial"/>
               </a:rPr>
-              <a:t xml:space="preserve">being pretty good does not mean the story</a:t>
-            </a:r>
-            <a:endParaRPr lang="en-US" sz="1500"/>
-          </a:p>
-          <a:p>
-            <a:pPr marL="0" indent="0">
-              <a:lnSpc>
-                <a:spcPts val="1950"/>
-              </a:lnSpc>
-              <a:spcAft>
-                <a:spcPts val="0"/>
-              </a:spcAft>
-              <a:buNone/>
-            </a:pPr>
-            <a:r>
-              <a:rPr lang="en-US" sz="1500" b="0">
-                <a:solidFill>
-                  <a:srgbClr val="202B33"/>
-                </a:solidFill>
-                <a:latin typeface="Arial"/>
-                <a:ea typeface="Arial"/>
-                <a:cs typeface="Arial"/>
-              </a:rPr>
-              <a:t xml:space="preserve">of image creation belongs to the big</a:t>
-            </a:r>
-            <a:endParaRPr lang="en-US" sz="1500"/>
-          </a:p>
-          <a:p>
-            <a:pPr marL="0" indent="0">
-              <a:lnSpc>
-                <a:spcPts val="1950"/>
-              </a:lnSpc>
-              <a:spcAft>
-                <a:spcPts val="0"/>
-              </a:spcAft>
-              <a:buNone/>
-            </a:pPr>
-            <a:r>
-              <a:rPr lang="en-US" sz="1500" b="0">
-                <a:solidFill>
-                  <a:srgbClr val="202B33"/>
-                </a:solidFill>
-                <a:latin typeface="Arial"/>
-                <a:ea typeface="Arial"/>
-                <a:cs typeface="Arial"/>
-              </a:rPr>
-              <a:t xml:space="preserve">players, and the same is true in whichever</a:t>
-            </a:r>
-            <a:endParaRPr lang="en-US" sz="1500"/>
-          </a:p>
-          <a:p>
-            <a:pPr marL="0" indent="0">
-              <a:lnSpc>
-                <a:spcPts val="1950"/>
-              </a:lnSpc>
-              <a:spcAft>
-                <a:spcPts val="0"/>
-              </a:spcAft>
-              <a:buNone/>
-            </a:pPr>
-            <a:r>
-              <a:rPr lang="en-US" sz="1500" b="0">
-                <a:solidFill>
-                  <a:srgbClr val="202B33"/>
-                </a:solidFill>
-                <a:latin typeface="Arial"/>
-                <a:ea typeface="Arial"/>
-                <a:cs typeface="Arial"/>
-              </a:rPr>
-              <a:t xml:space="preserve">industry you work in. Those of us who do</a:t>
-            </a:r>
-            <a:endParaRPr lang="en-US" sz="1500"/>
-          </a:p>
-          <a:p>
-            <a:pPr marL="0" indent="0">
-              <a:lnSpc>
-                <a:spcPts val="1950"/>
-              </a:lnSpc>
-              <a:spcAft>
-                <a:spcPts val="0"/>
-              </a:spcAft>
-              <a:buNone/>
-            </a:pPr>
-            <a:r>
-              <a:rPr lang="en-US" sz="1500" b="0">
-                <a:solidFill>
-                  <a:srgbClr val="202B33"/>
-                </a:solidFill>
-                <a:latin typeface="Arial"/>
-                <a:ea typeface="Arial"/>
-                <a:cs typeface="Arial"/>
-              </a:rPr>
-              <a:t xml:space="preserve">not work at a frontier lab, the organic</a:t>
+              <a:t xml:space="preserve">being pretty good does not mean image</a:t>
+            </a:r>
+            <a:endParaRPr lang="en-US" sz="1500"/>
+          </a:p>
+          <a:p>
+            <a:pPr marL="0" indent="0">
+              <a:lnSpc>
+                <a:spcPts val="1950"/>
+              </a:lnSpc>
+              <a:spcAft>
+                <a:spcPts val="0"/>
+              </a:spcAft>
+              <a:buNone/>
+            </a:pPr>
+            <a:r>
+              <a:rPr lang="en-US" sz="1500" b="0">
+                <a:solidFill>
+                  <a:srgbClr val="202B33"/>
+                </a:solidFill>
+                <a:latin typeface="Arial"/>
+                <a:ea typeface="Arial"/>
+                <a:cs typeface="Arial"/>
+              </a:rPr>
+              <a:t xml:space="preserve">creation belongs to the big players, and</a:t>
+            </a:r>
+            <a:endParaRPr lang="en-US" sz="1500"/>
+          </a:p>
+          <a:p>
+            <a:pPr marL="0" indent="0">
+              <a:lnSpc>
+                <a:spcPts val="1950"/>
+              </a:lnSpc>
+              <a:spcAft>
+                <a:spcPts val="0"/>
+              </a:spcAft>
+              <a:buNone/>
+            </a:pPr>
+            <a:r>
+              <a:rPr lang="en-US" sz="1500" b="0">
+                <a:solidFill>
+                  <a:srgbClr val="202B33"/>
+                </a:solidFill>
+                <a:latin typeface="Arial"/>
+                <a:ea typeface="Arial"/>
+                <a:cs typeface="Arial"/>
+              </a:rPr>
+              <a:t xml:space="preserve">the same holds in whichever industry you</a:t>
+            </a:r>
+            <a:endParaRPr lang="en-US" sz="1500"/>
+          </a:p>
+          <a:p>
+            <a:pPr marL="0" indent="0">
+              <a:lnSpc>
+                <a:spcPts val="1950"/>
+              </a:lnSpc>
+              <a:spcAft>
+                <a:spcPts val="0"/>
+              </a:spcAft>
+              <a:buNone/>
+            </a:pPr>
+            <a:r>
+              <a:rPr lang="en-US" sz="1500" b="0">
+                <a:solidFill>
+                  <a:srgbClr val="202B33"/>
+                </a:solidFill>
+                <a:latin typeface="Arial"/>
+                <a:ea typeface="Arial"/>
+                <a:cs typeface="Arial"/>
+              </a:rPr>
+              <a:t xml:space="preserve">work in. Those of us who do not work at a</a:t>
             </a:r>
             <a:endParaRPr lang="en-US" sz="1500"/>
           </a:p>
@@ -12833,122 +12810,122 @@
                 <a:ea typeface="Arial"/>
                 <a:cs typeface="Arial"/>
               </a:rPr>
-              <a:t xml:space="preserve">agents in the room, get to rethink any and</a:t>
-            </a:r>
-            <a:endParaRPr lang="en-US" sz="1500"/>
-          </a:p>
-          <a:p>
-            <a:pPr marL="0" indent="0">
-              <a:lnSpc>
-                <a:spcPts val="1950"/>
-              </a:lnSpc>
-              <a:spcAft>
-                <a:spcPts val="0"/>
-              </a:spcAft>
-              <a:buNone/>
-            </a:pPr>
-            <a:r>
-              <a:rPr lang="en-US" sz="1500" b="0">
-                <a:solidFill>
-                  <a:srgbClr val="202B33"/>
-                </a:solidFill>
-                <a:latin typeface="Arial"/>
-                <a:ea typeface="Arial"/>
-                <a:cs typeface="Arial"/>
-              </a:rPr>
-              <a:t xml:space="preserve">every app as an AI-native system from the</a:t>
-            </a:r>
-            <a:endParaRPr lang="en-US" sz="1500"/>
-          </a:p>
-          <a:p>
-            <a:pPr marL="0" indent="0">
-              <a:lnSpc>
-                <a:spcPts val="1950"/>
-              </a:lnSpc>
-              <a:spcAft>
-                <a:spcPts val="0"/>
-              </a:spcAft>
-              <a:buNone/>
-            </a:pPr>
-            <a:r>
-              <a:rPr lang="en-US" sz="1500" b="0">
-                <a:solidFill>
-                  <a:srgbClr val="202B33"/>
-                </a:solidFill>
-                <a:latin typeface="Arial"/>
-                <a:ea typeface="Arial"/>
-                <a:cs typeface="Arial"/>
-              </a:rPr>
-              <a:t xml:space="preserve">boundary up. That is this whole talk one</a:t>
-            </a:r>
-            <a:endParaRPr lang="en-US" sz="1500"/>
-          </a:p>
-          <a:p>
-            <a:pPr marL="0" indent="0">
-              <a:lnSpc>
-                <a:spcPts val="1950"/>
-              </a:lnSpc>
-              <a:spcAft>
-                <a:spcPts val="0"/>
-              </a:spcAft>
-              <a:buNone/>
-            </a:pPr>
-            <a:r>
-              <a:rPr lang="en-US" sz="1500" b="0">
-                <a:solidFill>
-                  <a:srgbClr val="202B33"/>
-                </a:solidFill>
-                <a:latin typeface="Arial"/>
-                <a:ea typeface="Arial"/>
-                <a:cs typeface="Arial"/>
-              </a:rPr>
-              <a:t xml:space="preserve">level higher: do not photocopy today's</a:t>
-            </a:r>
-            <a:endParaRPr lang="en-US" sz="1500"/>
-          </a:p>
-          <a:p>
-            <a:pPr marL="0" indent="0">
-              <a:lnSpc>
-                <a:spcPts val="1950"/>
-              </a:lnSpc>
-              <a:spcAft>
-                <a:spcPts val="0"/>
-              </a:spcAft>
-              <a:buNone/>
-            </a:pPr>
-            <a:r>
-              <a:rPr lang="en-US" sz="1500" b="0">
-                <a:solidFill>
-                  <a:srgbClr val="202B33"/>
-                </a:solidFill>
-                <a:latin typeface="Arial"/>
-                <a:ea typeface="Arial"/>
-                <a:cs typeface="Arial"/>
-              </a:rPr>
-              <a:t xml:space="preserve">product categories onto tomorrow's</a:t>
-            </a:r>
-            <a:endParaRPr lang="en-US" sz="1500"/>
-          </a:p>
-          <a:p>
-            <a:pPr marL="0" indent="0">
-              <a:lnSpc>
-                <a:spcPts val="1950"/>
-              </a:lnSpc>
-              <a:spcAft>
-                <a:spcPts val="0"/>
-              </a:spcAft>
-              <a:buNone/>
-            </a:pPr>
-            <a:r>
-              <a:rPr lang="en-US" sz="1500" b="0">
-                <a:solidFill>
-                  <a:srgbClr val="202B33"/>
-                </a:solidFill>
-                <a:latin typeface="Arial"/>
-                <a:ea typeface="Arial"/>
-                <a:cs typeface="Arial"/>
-              </a:rPr>
-              <a:t xml:space="preserve">substrate either.</a:t>
+              <a:t xml:space="preserve">frontier lab — the organic agents in the</a:t>
+            </a:r>
+            <a:endParaRPr lang="en-US" sz="1500"/>
+          </a:p>
+          <a:p>
+            <a:pPr marL="0" indent="0">
+              <a:lnSpc>
+                <a:spcPts val="1950"/>
+              </a:lnSpc>
+              <a:spcAft>
+                <a:spcPts val="0"/>
+              </a:spcAft>
+              <a:buNone/>
+            </a:pPr>
+            <a:r>
+              <a:rPr lang="en-US" sz="1500" b="0">
+                <a:solidFill>
+                  <a:srgbClr val="202B33"/>
+                </a:solidFill>
+                <a:latin typeface="Arial"/>
+                <a:ea typeface="Arial"/>
+                <a:cs typeface="Arial"/>
+              </a:rPr>
+              <a:t xml:space="preserve">room — get to rethink any and every app as</a:t>
+            </a:r>
+            <a:endParaRPr lang="en-US" sz="1500"/>
+          </a:p>
+          <a:p>
+            <a:pPr marL="0" indent="0">
+              <a:lnSpc>
+                <a:spcPts val="1950"/>
+              </a:lnSpc>
+              <a:spcAft>
+                <a:spcPts val="0"/>
+              </a:spcAft>
+              <a:buNone/>
+            </a:pPr>
+            <a:r>
+              <a:rPr lang="en-US" sz="1500" b="0">
+                <a:solidFill>
+                  <a:srgbClr val="202B33"/>
+                </a:solidFill>
+                <a:latin typeface="Arial"/>
+                <a:ea typeface="Arial"/>
+                <a:cs typeface="Arial"/>
+              </a:rPr>
+              <a:t xml:space="preserve">an AI-native system, from the boundary up.</a:t>
+            </a:r>
+            <a:endParaRPr lang="en-US" sz="1500"/>
+          </a:p>
+          <a:p>
+            <a:pPr marL="0" indent="0">
+              <a:lnSpc>
+                <a:spcPts val="1950"/>
+              </a:lnSpc>
+              <a:spcAft>
+                <a:spcPts val="0"/>
+              </a:spcAft>
+              <a:buNone/>
+            </a:pPr>
+            <a:r>
+              <a:rPr lang="en-US" sz="1500" b="0">
+                <a:solidFill>
+                  <a:srgbClr val="202B33"/>
+                </a:solidFill>
+                <a:latin typeface="Arial"/>
+                <a:ea typeface="Arial"/>
+                <a:cs typeface="Arial"/>
+              </a:rPr>
+              <a:t xml:space="preserve">That is this whole talk one level higher:</a:t>
+            </a:r>
+            <a:endParaRPr lang="en-US" sz="1500"/>
+          </a:p>
+          <a:p>
+            <a:pPr marL="0" indent="0">
+              <a:lnSpc>
+                <a:spcPts val="1950"/>
+              </a:lnSpc>
+              <a:spcAft>
+                <a:spcPts val="0"/>
+              </a:spcAft>
+              <a:buNone/>
+            </a:pPr>
+            <a:r>
+              <a:rPr lang="en-US" sz="1500" b="0">
+                <a:solidFill>
+                  <a:srgbClr val="202B33"/>
+                </a:solidFill>
+                <a:latin typeface="Arial"/>
+                <a:ea typeface="Arial"/>
+                <a:cs typeface="Arial"/>
+              </a:rPr>
+              <a:t xml:space="preserve">do not photocopy today's product categories</a:t>
+            </a:r>
+            <a:endParaRPr lang="en-US" sz="1500"/>
+          </a:p>
+          <a:p>
+            <a:pPr marL="0" indent="0">
+              <a:lnSpc>
+                <a:spcPts val="1950"/>
+              </a:lnSpc>
+              <a:spcAft>
+                <a:spcPts val="0"/>
+              </a:spcAft>
+              <a:buNone/>
+            </a:pPr>
+            <a:r>
+              <a:rPr lang="en-US" sz="1500" b="0">
+                <a:solidFill>
+                  <a:srgbClr val="202B33"/>
+                </a:solidFill>
+                <a:latin typeface="Arial"/>
+                <a:ea typeface="Arial"/>
+                <a:cs typeface="Arial"/>
+              </a:rPr>
+              <a:t xml:space="preserve">onto tomorrow's substrate either.</a:t>
             </a:r>
             <a:endParaRPr lang="en-US" sz="1500"/>
           </a:p>
